--- a/TUIA_Segundo/2Cuatrimestre/4C_MachineLearning/Unidad 1_ Introducción a Aprendizaje Automático/Clase 1 - Introducción AA1.pptx
+++ b/TUIA_Segundo/2Cuatrimestre/4C_MachineLearning/Unidad 1_ Introducción a Aprendizaje Automático/Clase 1 - Introducción AA1.pptx
@@ -35,35 +35,36 @@
     <p:sldId id="280" r:id="rId30"/>
     <p:sldId id="281" r:id="rId31"/>
     <p:sldId id="282" r:id="rId32"/>
+    <p:sldId id="283" r:id="rId33"/>
   </p:sldIdLst>
   <p:sldSz cy="5143500" cx="9144000"/>
   <p:notesSz cx="6858000" cy="9144000"/>
   <p:embeddedFontLst>
     <p:embeddedFont>
       <p:font typeface="Raleway"/>
-      <p:regular r:id="rId33"/>
-      <p:bold r:id="rId34"/>
-      <p:italic r:id="rId35"/>
-      <p:boldItalic r:id="rId36"/>
+      <p:regular r:id="rId34"/>
+      <p:bold r:id="rId35"/>
+      <p:italic r:id="rId36"/>
+      <p:boldItalic r:id="rId37"/>
     </p:embeddedFont>
     <p:embeddedFont>
       <p:font typeface="Caveat"/>
-      <p:regular r:id="rId37"/>
-      <p:bold r:id="rId38"/>
+      <p:regular r:id="rId38"/>
+      <p:bold r:id="rId39"/>
     </p:embeddedFont>
     <p:embeddedFont>
       <p:font typeface="Roboto"/>
-      <p:regular r:id="rId39"/>
-      <p:bold r:id="rId40"/>
-      <p:italic r:id="rId41"/>
-      <p:boldItalic r:id="rId42"/>
+      <p:regular r:id="rId40"/>
+      <p:bold r:id="rId41"/>
+      <p:italic r:id="rId42"/>
+      <p:boldItalic r:id="rId43"/>
     </p:embeddedFont>
     <p:embeddedFont>
       <p:font typeface="Lato"/>
-      <p:regular r:id="rId43"/>
-      <p:bold r:id="rId44"/>
-      <p:italic r:id="rId45"/>
-      <p:boldItalic r:id="rId46"/>
+      <p:regular r:id="rId44"/>
+      <p:bold r:id="rId45"/>
+      <p:italic r:id="rId46"/>
+      <p:boldItalic r:id="rId47"/>
     </p:embeddedFont>
   </p:embeddedFontLst>
   <p:defaultTextStyle>
@@ -92,7 +93,7 @@
         <a:srgbClr val="000000"/>
       </a:buClr>
       <a:buFont typeface="Arial"/>
-      <a:defRPr b="0" i="0" sz="1400" u="none" cap="none" strike="noStrike">
+      <a:defRPr b="0" i="0" spc="0" sz="1400" u="none" cap="none" strike="noStrike">
         <a:solidFill>
           <a:srgbClr val="000000"/>
         </a:solidFill>
@@ -116,7 +117,7 @@
         <a:srgbClr val="000000"/>
       </a:buClr>
       <a:buFont typeface="Arial"/>
-      <a:defRPr b="0" i="0" sz="1400" u="none" cap="none" strike="noStrike">
+      <a:defRPr b="0" i="0" spc="0" sz="1400" u="none" cap="none" strike="noStrike">
         <a:solidFill>
           <a:srgbClr val="000000"/>
         </a:solidFill>
@@ -140,7 +141,7 @@
         <a:srgbClr val="000000"/>
       </a:buClr>
       <a:buFont typeface="Arial"/>
-      <a:defRPr b="0" i="0" sz="1400" u="none" cap="none" strike="noStrike">
+      <a:defRPr b="0" i="0" spc="0" sz="1400" u="none" cap="none" strike="noStrike">
         <a:solidFill>
           <a:srgbClr val="000000"/>
         </a:solidFill>
@@ -164,7 +165,7 @@
         <a:srgbClr val="000000"/>
       </a:buClr>
       <a:buFont typeface="Arial"/>
-      <a:defRPr b="0" i="0" sz="1400" u="none" cap="none" strike="noStrike">
+      <a:defRPr b="0" i="0" spc="0" sz="1400" u="none" cap="none" strike="noStrike">
         <a:solidFill>
           <a:srgbClr val="000000"/>
         </a:solidFill>
@@ -188,7 +189,7 @@
         <a:srgbClr val="000000"/>
       </a:buClr>
       <a:buFont typeface="Arial"/>
-      <a:defRPr b="0" i="0" sz="1400" u="none" cap="none" strike="noStrike">
+      <a:defRPr b="0" i="0" spc="0" sz="1400" u="none" cap="none" strike="noStrike">
         <a:solidFill>
           <a:srgbClr val="000000"/>
         </a:solidFill>
@@ -212,7 +213,7 @@
         <a:srgbClr val="000000"/>
       </a:buClr>
       <a:buFont typeface="Arial"/>
-      <a:defRPr b="0" i="0" sz="1400" u="none" cap="none" strike="noStrike">
+      <a:defRPr b="0" i="0" spc="0" sz="1400" u="none" cap="none" strike="noStrike">
         <a:solidFill>
           <a:srgbClr val="000000"/>
         </a:solidFill>
@@ -236,7 +237,7 @@
         <a:srgbClr val="000000"/>
       </a:buClr>
       <a:buFont typeface="Arial"/>
-      <a:defRPr b="0" i="0" sz="1400" u="none" cap="none" strike="noStrike">
+      <a:defRPr b="0" i="0" spc="0" sz="1400" u="none" cap="none" strike="noStrike">
         <a:solidFill>
           <a:srgbClr val="000000"/>
         </a:solidFill>
@@ -260,7 +261,7 @@
         <a:srgbClr val="000000"/>
       </a:buClr>
       <a:buFont typeface="Arial"/>
-      <a:defRPr b="0" i="0" sz="1400" u="none" cap="none" strike="noStrike">
+      <a:defRPr b="0" i="0" spc="0" sz="1400" u="none" cap="none" strike="noStrike">
         <a:solidFill>
           <a:srgbClr val="000000"/>
         </a:solidFill>
@@ -284,7 +285,7 @@
         <a:srgbClr val="000000"/>
       </a:buClr>
       <a:buFont typeface="Arial"/>
-      <a:defRPr b="0" i="0" sz="1400" u="none" cap="none" strike="noStrike">
+      <a:defRPr b="0" i="0" spc="0" sz="1400" u="none" cap="none" strike="noStrike">
         <a:solidFill>
           <a:srgbClr val="000000"/>
         </a:solidFill>
@@ -311,7 +312,7 @@
       </p15:sldGuideLst>
     </p:ext>
     <p:ext uri="GoogleSlidesCustomDataVersion2">
-      <go:slidesCustomData xmlns:go="http://customooxmlschemas.google.com/" r:id="rId47" roundtripDataSignature="AMtx7mjsxuqeGA0Exx0/33MDT76uGgMBcw=="/>
+      <go:slidesCustomData xmlns:go="http://customooxmlschemas.google.com/" r:id="rId48" roundtripDataSignature="AMtx7mgoV1hbNFssQxKtqkW2RM9DLQMKMA=="/>
     </p:ext>
   </p:extLst>
 </p:presentation>
@@ -672,7 +673,7 @@
         <a:srgbClr val="000000"/>
       </a:buClr>
       <a:buFont typeface="Arial"/>
-      <a:defRPr b="0" i="0" sz="1400" u="none" cap="none" strike="noStrike">
+      <a:defRPr b="0" i="0" spc="0" sz="1400" u="none" cap="none" strike="noStrike">
         <a:solidFill>
           <a:srgbClr val="000000"/>
         </a:solidFill>
@@ -696,7 +697,7 @@
         <a:srgbClr val="000000"/>
       </a:buClr>
       <a:buFont typeface="Arial"/>
-      <a:defRPr b="0" i="0" sz="1400" u="none" cap="none" strike="noStrike">
+      <a:defRPr b="0" i="0" spc="0" sz="1400" u="none" cap="none" strike="noStrike">
         <a:solidFill>
           <a:srgbClr val="000000"/>
         </a:solidFill>
@@ -720,7 +721,7 @@
         <a:srgbClr val="000000"/>
       </a:buClr>
       <a:buFont typeface="Arial"/>
-      <a:defRPr b="0" i="0" sz="1400" u="none" cap="none" strike="noStrike">
+      <a:defRPr b="0" i="0" spc="0" sz="1400" u="none" cap="none" strike="noStrike">
         <a:solidFill>
           <a:srgbClr val="000000"/>
         </a:solidFill>
@@ -744,7 +745,7 @@
         <a:srgbClr val="000000"/>
       </a:buClr>
       <a:buFont typeface="Arial"/>
-      <a:defRPr b="0" i="0" sz="1400" u="none" cap="none" strike="noStrike">
+      <a:defRPr b="0" i="0" spc="0" sz="1400" u="none" cap="none" strike="noStrike">
         <a:solidFill>
           <a:srgbClr val="000000"/>
         </a:solidFill>
@@ -768,7 +769,7 @@
         <a:srgbClr val="000000"/>
       </a:buClr>
       <a:buFont typeface="Arial"/>
-      <a:defRPr b="0" i="0" sz="1400" u="none" cap="none" strike="noStrike">
+      <a:defRPr b="0" i="0" spc="0" sz="1400" u="none" cap="none" strike="noStrike">
         <a:solidFill>
           <a:srgbClr val="000000"/>
         </a:solidFill>
@@ -792,7 +793,7 @@
         <a:srgbClr val="000000"/>
       </a:buClr>
       <a:buFont typeface="Arial"/>
-      <a:defRPr b="0" i="0" sz="1400" u="none" cap="none" strike="noStrike">
+      <a:defRPr b="0" i="0" spc="0" sz="1400" u="none" cap="none" strike="noStrike">
         <a:solidFill>
           <a:srgbClr val="000000"/>
         </a:solidFill>
@@ -816,7 +817,7 @@
         <a:srgbClr val="000000"/>
       </a:buClr>
       <a:buFont typeface="Arial"/>
-      <a:defRPr b="0" i="0" sz="1400" u="none" cap="none" strike="noStrike">
+      <a:defRPr b="0" i="0" spc="0" sz="1400" u="none" cap="none" strike="noStrike">
         <a:solidFill>
           <a:srgbClr val="000000"/>
         </a:solidFill>
@@ -840,7 +841,7 @@
         <a:srgbClr val="000000"/>
       </a:buClr>
       <a:buFont typeface="Arial"/>
-      <a:defRPr b="0" i="0" sz="1400" u="none" cap="none" strike="noStrike">
+      <a:defRPr b="0" i="0" spc="0" sz="1400" u="none" cap="none" strike="noStrike">
         <a:solidFill>
           <a:srgbClr val="000000"/>
         </a:solidFill>
@@ -864,7 +865,7 @@
         <a:srgbClr val="000000"/>
       </a:buClr>
       <a:buFont typeface="Arial"/>
-      <a:defRPr b="0" i="0" sz="1400" u="none" cap="none" strike="noStrike">
+      <a:defRPr b="0" i="0" spc="0" sz="1400" u="none" cap="none" strike="noStrike">
         <a:solidFill>
           <a:srgbClr val="000000"/>
         </a:solidFill>
@@ -1000,7 +1001,7 @@
   <p:cSld>
     <p:spTree>
       <p:nvGrpSpPr>
-        <p:cNvPr id="179" name="Shape 179"/>
+        <p:cNvPr id="173" name="Shape 173"/>
         <p:cNvGrpSpPr/>
         <p:nvPr/>
       </p:nvGrpSpPr>
@@ -1014,7 +1015,7 @@
       </p:grpSpPr>
       <p:sp>
         <p:nvSpPr>
-          <p:cNvPr id="180" name="Google Shape;180;p10:notes"/>
+          <p:cNvPr id="174" name="Google Shape;174;p9:notes"/>
           <p:cNvSpPr/>
           <p:nvPr>
             <p:ph idx="2" type="sldImg"/>
@@ -1059,7 +1060,7 @@
       </p:sp>
       <p:sp>
         <p:nvSpPr>
-          <p:cNvPr id="181" name="Google Shape;181;p10:notes"/>
+          <p:cNvPr id="175" name="Google Shape;175;p9:notes"/>
           <p:cNvSpPr txBox="1"/>
           <p:nvPr>
             <p:ph idx="1" type="body"/>
@@ -1117,7 +1118,7 @@
   <p:cSld>
     <p:spTree>
       <p:nvGrpSpPr>
-        <p:cNvPr id="196" name="Shape 196"/>
+        <p:cNvPr id="195" name="Shape 195"/>
         <p:cNvGrpSpPr/>
         <p:nvPr/>
       </p:nvGrpSpPr>
@@ -1131,7 +1132,7 @@
       </p:grpSpPr>
       <p:sp>
         <p:nvSpPr>
-          <p:cNvPr id="197" name="Google Shape;197;p11:notes"/>
+          <p:cNvPr id="196" name="Google Shape;196;g3f77e98ea1e_1_2:notes"/>
           <p:cNvSpPr/>
           <p:nvPr>
             <p:ph idx="2" type="sldImg"/>
@@ -1176,7 +1177,7 @@
       </p:sp>
       <p:sp>
         <p:nvSpPr>
-          <p:cNvPr id="198" name="Google Shape;198;p11:notes"/>
+          <p:cNvPr id="197" name="Google Shape;197;g3f77e98ea1e_1_2:notes"/>
           <p:cNvSpPr txBox="1"/>
           <p:nvPr>
             <p:ph idx="1" type="body"/>
@@ -1234,7 +1235,7 @@
   <p:cSld>
     <p:spTree>
       <p:nvGrpSpPr>
-        <p:cNvPr id="202" name="Shape 202"/>
+        <p:cNvPr id="200" name="Shape 200"/>
         <p:cNvGrpSpPr/>
         <p:nvPr/>
       </p:nvGrpSpPr>
@@ -1248,7 +1249,7 @@
       </p:grpSpPr>
       <p:sp>
         <p:nvSpPr>
-          <p:cNvPr id="203" name="Google Shape;203;p12:notes"/>
+          <p:cNvPr id="201" name="Google Shape;201;p12:notes"/>
           <p:cNvSpPr/>
           <p:nvPr>
             <p:ph idx="2" type="sldImg"/>
@@ -1293,7 +1294,7 @@
       </p:sp>
       <p:sp>
         <p:nvSpPr>
-          <p:cNvPr id="204" name="Google Shape;204;p12:notes"/>
+          <p:cNvPr id="202" name="Google Shape;202;p12:notes"/>
           <p:cNvSpPr txBox="1"/>
           <p:nvPr>
             <p:ph idx="1" type="body"/>
@@ -1351,7 +1352,7 @@
   <p:cSld>
     <p:spTree>
       <p:nvGrpSpPr>
-        <p:cNvPr id="207" name="Shape 207"/>
+        <p:cNvPr id="205" name="Shape 205"/>
         <p:cNvGrpSpPr/>
         <p:nvPr/>
       </p:nvGrpSpPr>
@@ -1365,7 +1366,7 @@
       </p:grpSpPr>
       <p:sp>
         <p:nvSpPr>
-          <p:cNvPr id="208" name="Google Shape;208;p13:notes"/>
+          <p:cNvPr id="206" name="Google Shape;206;p13:notes"/>
           <p:cNvSpPr/>
           <p:nvPr>
             <p:ph idx="2" type="sldImg"/>
@@ -1410,7 +1411,7 @@
       </p:sp>
       <p:sp>
         <p:nvSpPr>
-          <p:cNvPr id="209" name="Google Shape;209;p13:notes"/>
+          <p:cNvPr id="207" name="Google Shape;207;p13:notes"/>
           <p:cNvSpPr txBox="1"/>
           <p:nvPr>
             <p:ph idx="1" type="body"/>
@@ -1468,7 +1469,7 @@
   <p:cSld>
     <p:spTree>
       <p:nvGrpSpPr>
-        <p:cNvPr id="214" name="Shape 214"/>
+        <p:cNvPr id="212" name="Shape 212"/>
         <p:cNvGrpSpPr/>
         <p:nvPr/>
       </p:nvGrpSpPr>
@@ -1482,7 +1483,7 @@
       </p:grpSpPr>
       <p:sp>
         <p:nvSpPr>
-          <p:cNvPr id="215" name="Google Shape;215;p14:notes"/>
+          <p:cNvPr id="213" name="Google Shape;213;p14:notes"/>
           <p:cNvSpPr/>
           <p:nvPr>
             <p:ph idx="2" type="sldImg"/>
@@ -1527,7 +1528,7 @@
       </p:sp>
       <p:sp>
         <p:nvSpPr>
-          <p:cNvPr id="216" name="Google Shape;216;p14:notes"/>
+          <p:cNvPr id="214" name="Google Shape;214;p14:notes"/>
           <p:cNvSpPr txBox="1"/>
           <p:nvPr>
             <p:ph idx="1" type="body"/>
@@ -1585,7 +1586,7 @@
   <p:cSld>
     <p:spTree>
       <p:nvGrpSpPr>
-        <p:cNvPr id="222" name="Shape 222"/>
+        <p:cNvPr id="220" name="Shape 220"/>
         <p:cNvGrpSpPr/>
         <p:nvPr/>
       </p:nvGrpSpPr>
@@ -1599,7 +1600,7 @@
       </p:grpSpPr>
       <p:sp>
         <p:nvSpPr>
-          <p:cNvPr id="223" name="Google Shape;223;p15:notes"/>
+          <p:cNvPr id="221" name="Google Shape;221;p15:notes"/>
           <p:cNvSpPr/>
           <p:nvPr>
             <p:ph idx="2" type="sldImg"/>
@@ -1644,7 +1645,7 @@
       </p:sp>
       <p:sp>
         <p:nvSpPr>
-          <p:cNvPr id="224" name="Google Shape;224;p15:notes"/>
+          <p:cNvPr id="222" name="Google Shape;222;p15:notes"/>
           <p:cNvSpPr txBox="1"/>
           <p:nvPr>
             <p:ph idx="1" type="body"/>
@@ -1702,7 +1703,7 @@
   <p:cSld>
     <p:spTree>
       <p:nvGrpSpPr>
-        <p:cNvPr id="230" name="Shape 230"/>
+        <p:cNvPr id="228" name="Shape 228"/>
         <p:cNvGrpSpPr/>
         <p:nvPr/>
       </p:nvGrpSpPr>
@@ -1716,7 +1717,7 @@
       </p:grpSpPr>
       <p:sp>
         <p:nvSpPr>
-          <p:cNvPr id="231" name="Google Shape;231;p16:notes"/>
+          <p:cNvPr id="229" name="Google Shape;229;p16:notes"/>
           <p:cNvSpPr/>
           <p:nvPr>
             <p:ph idx="2" type="sldImg"/>
@@ -1761,7 +1762,7 @@
       </p:sp>
       <p:sp>
         <p:nvSpPr>
-          <p:cNvPr id="232" name="Google Shape;232;p16:notes"/>
+          <p:cNvPr id="230" name="Google Shape;230;p16:notes"/>
           <p:cNvSpPr txBox="1"/>
           <p:nvPr>
             <p:ph idx="1" type="body"/>
@@ -1819,7 +1820,7 @@
   <p:cSld>
     <p:spTree>
       <p:nvGrpSpPr>
-        <p:cNvPr id="235" name="Shape 235"/>
+        <p:cNvPr id="233" name="Shape 233"/>
         <p:cNvGrpSpPr/>
         <p:nvPr/>
       </p:nvGrpSpPr>
@@ -1833,7 +1834,7 @@
       </p:grpSpPr>
       <p:sp>
         <p:nvSpPr>
-          <p:cNvPr id="236" name="Google Shape;236;p17:notes"/>
+          <p:cNvPr id="234" name="Google Shape;234;p17:notes"/>
           <p:cNvSpPr/>
           <p:nvPr>
             <p:ph idx="2" type="sldImg"/>
@@ -1878,7 +1879,7 @@
       </p:sp>
       <p:sp>
         <p:nvSpPr>
-          <p:cNvPr id="237" name="Google Shape;237;p17:notes"/>
+          <p:cNvPr id="235" name="Google Shape;235;p17:notes"/>
           <p:cNvSpPr txBox="1"/>
           <p:nvPr>
             <p:ph idx="1" type="body"/>
@@ -1936,7 +1937,7 @@
   <p:cSld>
     <p:spTree>
       <p:nvGrpSpPr>
-        <p:cNvPr id="241" name="Shape 241"/>
+        <p:cNvPr id="239" name="Shape 239"/>
         <p:cNvGrpSpPr/>
         <p:nvPr/>
       </p:nvGrpSpPr>
@@ -1950,7 +1951,7 @@
       </p:grpSpPr>
       <p:sp>
         <p:nvSpPr>
-          <p:cNvPr id="242" name="Google Shape;242;p18:notes"/>
+          <p:cNvPr id="240" name="Google Shape;240;p18:notes"/>
           <p:cNvSpPr/>
           <p:nvPr>
             <p:ph idx="2" type="sldImg"/>
@@ -1995,7 +1996,7 @@
       </p:sp>
       <p:sp>
         <p:nvSpPr>
-          <p:cNvPr id="243" name="Google Shape;243;p18:notes"/>
+          <p:cNvPr id="241" name="Google Shape;241;p18:notes"/>
           <p:cNvSpPr txBox="1"/>
           <p:nvPr>
             <p:ph idx="1" type="body"/>
@@ -2053,7 +2054,7 @@
   <p:cSld>
     <p:spTree>
       <p:nvGrpSpPr>
-        <p:cNvPr id="247" name="Shape 247"/>
+        <p:cNvPr id="245" name="Shape 245"/>
         <p:cNvGrpSpPr/>
         <p:nvPr/>
       </p:nvGrpSpPr>
@@ -2067,7 +2068,7 @@
       </p:grpSpPr>
       <p:sp>
         <p:nvSpPr>
-          <p:cNvPr id="248" name="Google Shape;248;p19:notes"/>
+          <p:cNvPr id="246" name="Google Shape;246;p19:notes"/>
           <p:cNvSpPr/>
           <p:nvPr>
             <p:ph idx="2" type="sldImg"/>
@@ -2112,7 +2113,7 @@
       </p:sp>
       <p:sp>
         <p:nvSpPr>
-          <p:cNvPr id="249" name="Google Shape;249;p19:notes"/>
+          <p:cNvPr id="247" name="Google Shape;247;p19:notes"/>
           <p:cNvSpPr txBox="1"/>
           <p:nvPr>
             <p:ph idx="1" type="body"/>
@@ -2287,7 +2288,7 @@
   <p:cSld>
     <p:spTree>
       <p:nvGrpSpPr>
-        <p:cNvPr id="254" name="Shape 254"/>
+        <p:cNvPr id="252" name="Shape 252"/>
         <p:cNvGrpSpPr/>
         <p:nvPr/>
       </p:nvGrpSpPr>
@@ -2301,7 +2302,7 @@
       </p:grpSpPr>
       <p:sp>
         <p:nvSpPr>
-          <p:cNvPr id="255" name="Google Shape;255;p20:notes"/>
+          <p:cNvPr id="253" name="Google Shape;253;p20:notes"/>
           <p:cNvSpPr/>
           <p:nvPr>
             <p:ph idx="2" type="sldImg"/>
@@ -2346,7 +2347,7 @@
       </p:sp>
       <p:sp>
         <p:nvSpPr>
-          <p:cNvPr id="256" name="Google Shape;256;p20:notes"/>
+          <p:cNvPr id="254" name="Google Shape;254;p20:notes"/>
           <p:cNvSpPr txBox="1"/>
           <p:nvPr>
             <p:ph idx="1" type="body"/>
@@ -2404,7 +2405,7 @@
   <p:cSld>
     <p:spTree>
       <p:nvGrpSpPr>
-        <p:cNvPr id="262" name="Shape 262"/>
+        <p:cNvPr id="260" name="Shape 260"/>
         <p:cNvGrpSpPr/>
         <p:nvPr/>
       </p:nvGrpSpPr>
@@ -2418,7 +2419,7 @@
       </p:grpSpPr>
       <p:sp>
         <p:nvSpPr>
-          <p:cNvPr id="263" name="Google Shape;263;p21:notes"/>
+          <p:cNvPr id="261" name="Google Shape;261;p21:notes"/>
           <p:cNvSpPr/>
           <p:nvPr>
             <p:ph idx="2" type="sldImg"/>
@@ -2463,7 +2464,7 @@
       </p:sp>
       <p:sp>
         <p:nvSpPr>
-          <p:cNvPr id="264" name="Google Shape;264;p21:notes"/>
+          <p:cNvPr id="262" name="Google Shape;262;p21:notes"/>
           <p:cNvSpPr txBox="1"/>
           <p:nvPr>
             <p:ph idx="1" type="body"/>
@@ -2521,7 +2522,7 @@
   <p:cSld>
     <p:spTree>
       <p:nvGrpSpPr>
-        <p:cNvPr id="268" name="Shape 268"/>
+        <p:cNvPr id="266" name="Shape 266"/>
         <p:cNvGrpSpPr/>
         <p:nvPr/>
       </p:nvGrpSpPr>
@@ -2535,7 +2536,7 @@
       </p:grpSpPr>
       <p:sp>
         <p:nvSpPr>
-          <p:cNvPr id="269" name="Google Shape;269;p22:notes"/>
+          <p:cNvPr id="267" name="Google Shape;267;p22:notes"/>
           <p:cNvSpPr/>
           <p:nvPr>
             <p:ph idx="2" type="sldImg"/>
@@ -2580,7 +2581,7 @@
       </p:sp>
       <p:sp>
         <p:nvSpPr>
-          <p:cNvPr id="270" name="Google Shape;270;p22:notes"/>
+          <p:cNvPr id="268" name="Google Shape;268;p22:notes"/>
           <p:cNvSpPr txBox="1"/>
           <p:nvPr>
             <p:ph idx="1" type="body"/>
@@ -2638,7 +2639,7 @@
   <p:cSld>
     <p:spTree>
       <p:nvGrpSpPr>
-        <p:cNvPr id="273" name="Shape 273"/>
+        <p:cNvPr id="271" name="Shape 271"/>
         <p:cNvGrpSpPr/>
         <p:nvPr/>
       </p:nvGrpSpPr>
@@ -2652,7 +2653,7 @@
       </p:grpSpPr>
       <p:sp>
         <p:nvSpPr>
-          <p:cNvPr id="274" name="Google Shape;274;p23:notes"/>
+          <p:cNvPr id="272" name="Google Shape;272;p23:notes"/>
           <p:cNvSpPr/>
           <p:nvPr>
             <p:ph idx="2" type="sldImg"/>
@@ -2697,7 +2698,7 @@
       </p:sp>
       <p:sp>
         <p:nvSpPr>
-          <p:cNvPr id="275" name="Google Shape;275;p23:notes"/>
+          <p:cNvPr id="273" name="Google Shape;273;p23:notes"/>
           <p:cNvSpPr txBox="1"/>
           <p:nvPr>
             <p:ph idx="1" type="body"/>
@@ -2755,7 +2756,7 @@
   <p:cSld>
     <p:spTree>
       <p:nvGrpSpPr>
-        <p:cNvPr id="321" name="Shape 321"/>
+        <p:cNvPr id="319" name="Shape 319"/>
         <p:cNvGrpSpPr/>
         <p:nvPr/>
       </p:nvGrpSpPr>
@@ -2769,7 +2770,7 @@
       </p:grpSpPr>
       <p:sp>
         <p:nvSpPr>
-          <p:cNvPr id="322" name="Google Shape;322;p24:notes"/>
+          <p:cNvPr id="320" name="Google Shape;320;p24:notes"/>
           <p:cNvSpPr/>
           <p:nvPr>
             <p:ph idx="2" type="sldImg"/>
@@ -2814,7 +2815,7 @@
       </p:sp>
       <p:sp>
         <p:nvSpPr>
-          <p:cNvPr id="323" name="Google Shape;323;p24:notes"/>
+          <p:cNvPr id="321" name="Google Shape;321;p24:notes"/>
           <p:cNvSpPr txBox="1"/>
           <p:nvPr>
             <p:ph idx="1" type="body"/>
@@ -2872,7 +2873,7 @@
   <p:cSld>
     <p:spTree>
       <p:nvGrpSpPr>
-        <p:cNvPr id="328" name="Shape 328"/>
+        <p:cNvPr id="326" name="Shape 326"/>
         <p:cNvGrpSpPr/>
         <p:nvPr/>
       </p:nvGrpSpPr>
@@ -2886,7 +2887,7 @@
       </p:grpSpPr>
       <p:sp>
         <p:nvSpPr>
-          <p:cNvPr id="329" name="Google Shape;329;p25:notes"/>
+          <p:cNvPr id="327" name="Google Shape;327;p25:notes"/>
           <p:cNvSpPr/>
           <p:nvPr>
             <p:ph idx="2" type="sldImg"/>
@@ -2931,7 +2932,7 @@
       </p:sp>
       <p:sp>
         <p:nvSpPr>
-          <p:cNvPr id="330" name="Google Shape;330;p25:notes"/>
+          <p:cNvPr id="328" name="Google Shape;328;p25:notes"/>
           <p:cNvSpPr txBox="1"/>
           <p:nvPr>
             <p:ph idx="1" type="body"/>
@@ -2989,7 +2990,7 @@
   <p:cSld>
     <p:spTree>
       <p:nvGrpSpPr>
-        <p:cNvPr id="336" name="Shape 336"/>
+        <p:cNvPr id="334" name="Shape 334"/>
         <p:cNvGrpSpPr/>
         <p:nvPr/>
       </p:nvGrpSpPr>
@@ -3003,7 +3004,7 @@
       </p:grpSpPr>
       <p:sp>
         <p:nvSpPr>
-          <p:cNvPr id="337" name="Google Shape;337;p26:notes"/>
+          <p:cNvPr id="335" name="Google Shape;335;p26:notes"/>
           <p:cNvSpPr/>
           <p:nvPr>
             <p:ph idx="2" type="sldImg"/>
@@ -3048,7 +3049,7 @@
       </p:sp>
       <p:sp>
         <p:nvSpPr>
-          <p:cNvPr id="338" name="Google Shape;338;p26:notes"/>
+          <p:cNvPr id="336" name="Google Shape;336;p26:notes"/>
           <p:cNvSpPr txBox="1"/>
           <p:nvPr>
             <p:ph idx="1" type="body"/>
@@ -3106,7 +3107,7 @@
   <p:cSld>
     <p:spTree>
       <p:nvGrpSpPr>
-        <p:cNvPr id="342" name="Shape 342"/>
+        <p:cNvPr id="340" name="Shape 340"/>
         <p:cNvGrpSpPr/>
         <p:nvPr/>
       </p:nvGrpSpPr>
@@ -3120,7 +3121,7 @@
       </p:grpSpPr>
       <p:sp>
         <p:nvSpPr>
-          <p:cNvPr id="343" name="Google Shape;343;p27:notes"/>
+          <p:cNvPr id="341" name="Google Shape;341;p27:notes"/>
           <p:cNvSpPr/>
           <p:nvPr>
             <p:ph idx="2" type="sldImg"/>
@@ -3165,7 +3166,7 @@
       </p:sp>
       <p:sp>
         <p:nvSpPr>
-          <p:cNvPr id="344" name="Google Shape;344;p27:notes"/>
+          <p:cNvPr id="342" name="Google Shape;342;p27:notes"/>
           <p:cNvSpPr txBox="1"/>
           <p:nvPr>
             <p:ph idx="1" type="body"/>
@@ -3201,6 +3202,105 @@
                 <a:spcPts val="0"/>
               </a:spcAft>
               <a:buSzPts val="1100"/>
+              <a:buNone/>
+            </a:pPr>
+            <a:r>
+              <a:t/>
+            </a:r>
+            <a:endParaRPr/>
+          </a:p>
+        </p:txBody>
+      </p:sp>
+    </p:spTree>
+  </p:cSld>
+  <p:clrMapOvr>
+    <a:masterClrMapping/>
+  </p:clrMapOvr>
+</p:notes>
+</file>
+
+<file path=ppt/notesSlides/notesSlide28.xml><?xml version="1.0" encoding="utf-8"?>
+<p:notes xmlns:a="http://schemas.openxmlformats.org/drawingml/2006/main" xmlns:r="http://schemas.openxmlformats.org/officeDocument/2006/relationships" xmlns:mc="http://schemas.openxmlformats.org/markup-compatibility/2006" xmlns:mv="urn:schemas-microsoft-com:mac:vml" xmlns:p="http://schemas.openxmlformats.org/presentationml/2006/main" xmlns:c="http://schemas.openxmlformats.org/drawingml/2006/chart" xmlns:dgm="http://schemas.openxmlformats.org/drawingml/2006/diagram" xmlns:o="urn:schemas-microsoft-com:office:office" xmlns:v="urn:schemas-microsoft-com:vml" xmlns:pvml="urn:schemas-microsoft-com:office:powerpoint" xmlns:com="http://schemas.openxmlformats.org/drawingml/2006/compatibility" xmlns:p14="http://schemas.microsoft.com/office/powerpoint/2010/main" xmlns:p15="http://schemas.microsoft.com/office/powerpoint/2012/main" xmlns:ahyp="http://schemas.microsoft.com/office/drawing/2018/hyperlinkcolor" showMasterPhAnim="0" showMasterSp="0">
+  <p:cSld>
+    <p:spTree>
+      <p:nvGrpSpPr>
+        <p:cNvPr id="359" name="Shape 359"/>
+        <p:cNvGrpSpPr/>
+        <p:nvPr/>
+      </p:nvGrpSpPr>
+      <p:grpSpPr>
+        <a:xfrm>
+          <a:off x="0" y="0"/>
+          <a:ext cx="0" cy="0"/>
+          <a:chOff x="0" y="0"/>
+          <a:chExt cx="0" cy="0"/>
+        </a:xfrm>
+      </p:grpSpPr>
+      <p:sp>
+        <p:nvSpPr>
+          <p:cNvPr id="360" name="Google Shape;360;g3f77e98ea1e_1_26:notes"/>
+          <p:cNvSpPr/>
+          <p:nvPr>
+            <p:ph idx="2" type="sldImg"/>
+          </p:nvPr>
+        </p:nvSpPr>
+        <p:spPr>
+          <a:xfrm>
+            <a:off x="381300" y="685800"/>
+            <a:ext cx="6096000" cy="3429000"/>
+          </a:xfrm>
+          <a:custGeom>
+            <a:rect b="b" l="l" r="r" t="t"/>
+            <a:pathLst>
+              <a:path extrusionOk="0" h="120000" w="120000">
+                <a:moveTo>
+                  <a:pt x="0" y="0"/>
+                </a:moveTo>
+                <a:lnTo>
+                  <a:pt x="120000" y="0"/>
+                </a:lnTo>
+                <a:lnTo>
+                  <a:pt x="120000" y="120000"/>
+                </a:lnTo>
+                <a:lnTo>
+                  <a:pt x="0" y="120000"/>
+                </a:lnTo>
+                <a:close/>
+              </a:path>
+            </a:pathLst>
+          </a:custGeom>
+        </p:spPr>
+      </p:sp>
+      <p:sp>
+        <p:nvSpPr>
+          <p:cNvPr id="361" name="Google Shape;361;g3f77e98ea1e_1_26:notes"/>
+          <p:cNvSpPr txBox="1"/>
+          <p:nvPr>
+            <p:ph idx="1" type="body"/>
+          </p:nvPr>
+        </p:nvSpPr>
+        <p:spPr>
+          <a:xfrm>
+            <a:off x="685800" y="4343400"/>
+            <a:ext cx="5486400" cy="4114800"/>
+          </a:xfrm>
+          <a:prstGeom prst="rect">
+            <a:avLst/>
+          </a:prstGeom>
+        </p:spPr>
+        <p:txBody>
+          <a:bodyPr anchorCtr="0" anchor="t" bIns="91425" lIns="91425" spcFirstLastPara="1" rIns="91425" wrap="square" tIns="91425">
+            <a:noAutofit/>
+          </a:bodyPr>
+          <a:lstStyle/>
+          <a:p>
+            <a:pPr indent="0" lvl="0" marL="0" rtl="0" algn="l">
+              <a:spcBef>
+                <a:spcPts val="0"/>
+              </a:spcBef>
+              <a:spcAft>
+                <a:spcPts val="0"/>
+              </a:spcAft>
               <a:buNone/>
             </a:pPr>
             <a:r>
@@ -3939,7 +4039,7 @@
       </p:grpSpPr>
       <p:sp>
         <p:nvSpPr>
-          <p:cNvPr id="157" name="Google Shape;157;p9:notes"/>
+          <p:cNvPr id="157" name="Google Shape;157;p10:notes"/>
           <p:cNvSpPr/>
           <p:nvPr>
             <p:ph idx="2" type="sldImg"/>
@@ -3984,7 +4084,7 @@
       </p:sp>
       <p:sp>
         <p:nvSpPr>
-          <p:cNvPr id="158" name="Google Shape;158;p9:notes"/>
+          <p:cNvPr id="158" name="Google Shape;158;p10:notes"/>
           <p:cNvSpPr txBox="1"/>
           <p:nvPr>
             <p:ph idx="1" type="body"/>
@@ -12787,7 +12887,7 @@
           <a:srgbClr val="000000"/>
         </a:buClr>
         <a:buFont typeface="Arial"/>
-        <a:defRPr b="0" i="0" sz="1400" u="none" cap="none" strike="noStrike">
+        <a:defRPr b="0" i="0" spc="0" sz="1400" u="none" cap="none" strike="noStrike">
           <a:solidFill>
             <a:srgbClr val="000000"/>
           </a:solidFill>
@@ -12811,7 +12911,7 @@
           <a:srgbClr val="000000"/>
         </a:buClr>
         <a:buFont typeface="Arial"/>
-        <a:defRPr b="0" i="0" sz="1400" u="none" cap="none" strike="noStrike">
+        <a:defRPr b="0" i="0" spc="0" sz="1400" u="none" cap="none" strike="noStrike">
           <a:solidFill>
             <a:srgbClr val="000000"/>
           </a:solidFill>
@@ -12835,7 +12935,7 @@
           <a:srgbClr val="000000"/>
         </a:buClr>
         <a:buFont typeface="Arial"/>
-        <a:defRPr b="0" i="0" sz="1400" u="none" cap="none" strike="noStrike">
+        <a:defRPr b="0" i="0" spc="0" sz="1400" u="none" cap="none" strike="noStrike">
           <a:solidFill>
             <a:srgbClr val="000000"/>
           </a:solidFill>
@@ -12859,7 +12959,7 @@
           <a:srgbClr val="000000"/>
         </a:buClr>
         <a:buFont typeface="Arial"/>
-        <a:defRPr b="0" i="0" sz="1400" u="none" cap="none" strike="noStrike">
+        <a:defRPr b="0" i="0" spc="0" sz="1400" u="none" cap="none" strike="noStrike">
           <a:solidFill>
             <a:srgbClr val="000000"/>
           </a:solidFill>
@@ -12883,7 +12983,7 @@
           <a:srgbClr val="000000"/>
         </a:buClr>
         <a:buFont typeface="Arial"/>
-        <a:defRPr b="0" i="0" sz="1400" u="none" cap="none" strike="noStrike">
+        <a:defRPr b="0" i="0" spc="0" sz="1400" u="none" cap="none" strike="noStrike">
           <a:solidFill>
             <a:srgbClr val="000000"/>
           </a:solidFill>
@@ -12907,7 +13007,7 @@
           <a:srgbClr val="000000"/>
         </a:buClr>
         <a:buFont typeface="Arial"/>
-        <a:defRPr b="0" i="0" sz="1400" u="none" cap="none" strike="noStrike">
+        <a:defRPr b="0" i="0" spc="0" sz="1400" u="none" cap="none" strike="noStrike">
           <a:solidFill>
             <a:srgbClr val="000000"/>
           </a:solidFill>
@@ -12931,7 +13031,7 @@
           <a:srgbClr val="000000"/>
         </a:buClr>
         <a:buFont typeface="Arial"/>
-        <a:defRPr b="0" i="0" sz="1400" u="none" cap="none" strike="noStrike">
+        <a:defRPr b="0" i="0" spc="0" sz="1400" u="none" cap="none" strike="noStrike">
           <a:solidFill>
             <a:srgbClr val="000000"/>
           </a:solidFill>
@@ -12955,7 +13055,7 @@
           <a:srgbClr val="000000"/>
         </a:buClr>
         <a:buFont typeface="Arial"/>
-        <a:defRPr b="0" i="0" sz="1400" u="none" cap="none" strike="noStrike">
+        <a:defRPr b="0" i="0" spc="0" sz="1400" u="none" cap="none" strike="noStrike">
           <a:solidFill>
             <a:srgbClr val="000000"/>
           </a:solidFill>
@@ -12979,7 +13079,7 @@
           <a:srgbClr val="000000"/>
         </a:buClr>
         <a:buFont typeface="Arial"/>
-        <a:defRPr b="0" i="0" sz="1400" u="none" cap="none" strike="noStrike">
+        <a:defRPr b="0" i="0" spc="0" sz="1400" u="none" cap="none" strike="noStrike">
           <a:solidFill>
             <a:srgbClr val="000000"/>
           </a:solidFill>
@@ -13016,7 +13116,7 @@
           <a:srgbClr val="000000"/>
         </a:buClr>
         <a:buFont typeface="Arial"/>
-        <a:defRPr b="0" i="0" sz="1400" u="none" cap="none" strike="noStrike">
+        <a:defRPr b="0" i="0" spc="0" sz="1400" u="none" cap="none" strike="noStrike">
           <a:solidFill>
             <a:srgbClr val="000000"/>
           </a:solidFill>
@@ -13040,7 +13140,7 @@
           <a:srgbClr val="000000"/>
         </a:buClr>
         <a:buFont typeface="Arial"/>
-        <a:defRPr b="0" i="0" sz="1400" u="none" cap="none" strike="noStrike">
+        <a:defRPr b="0" i="0" spc="0" sz="1400" u="none" cap="none" strike="noStrike">
           <a:solidFill>
             <a:srgbClr val="000000"/>
           </a:solidFill>
@@ -13064,7 +13164,7 @@
           <a:srgbClr val="000000"/>
         </a:buClr>
         <a:buFont typeface="Arial"/>
-        <a:defRPr b="0" i="0" sz="1400" u="none" cap="none" strike="noStrike">
+        <a:defRPr b="0" i="0" spc="0" sz="1400" u="none" cap="none" strike="noStrike">
           <a:solidFill>
             <a:srgbClr val="000000"/>
           </a:solidFill>
@@ -13088,7 +13188,7 @@
           <a:srgbClr val="000000"/>
         </a:buClr>
         <a:buFont typeface="Arial"/>
-        <a:defRPr b="0" i="0" sz="1400" u="none" cap="none" strike="noStrike">
+        <a:defRPr b="0" i="0" spc="0" sz="1400" u="none" cap="none" strike="noStrike">
           <a:solidFill>
             <a:srgbClr val="000000"/>
           </a:solidFill>
@@ -13112,7 +13212,7 @@
           <a:srgbClr val="000000"/>
         </a:buClr>
         <a:buFont typeface="Arial"/>
-        <a:defRPr b="0" i="0" sz="1400" u="none" cap="none" strike="noStrike">
+        <a:defRPr b="0" i="0" spc="0" sz="1400" u="none" cap="none" strike="noStrike">
           <a:solidFill>
             <a:srgbClr val="000000"/>
           </a:solidFill>
@@ -13136,7 +13236,7 @@
           <a:srgbClr val="000000"/>
         </a:buClr>
         <a:buFont typeface="Arial"/>
-        <a:defRPr b="0" i="0" sz="1400" u="none" cap="none" strike="noStrike">
+        <a:defRPr b="0" i="0" spc="0" sz="1400" u="none" cap="none" strike="noStrike">
           <a:solidFill>
             <a:srgbClr val="000000"/>
           </a:solidFill>
@@ -13160,7 +13260,7 @@
           <a:srgbClr val="000000"/>
         </a:buClr>
         <a:buFont typeface="Arial"/>
-        <a:defRPr b="0" i="0" sz="1400" u="none" cap="none" strike="noStrike">
+        <a:defRPr b="0" i="0" spc="0" sz="1400" u="none" cap="none" strike="noStrike">
           <a:solidFill>
             <a:srgbClr val="000000"/>
           </a:solidFill>
@@ -13184,7 +13284,7 @@
           <a:srgbClr val="000000"/>
         </a:buClr>
         <a:buFont typeface="Arial"/>
-        <a:defRPr b="0" i="0" sz="1400" u="none" cap="none" strike="noStrike">
+        <a:defRPr b="0" i="0" spc="0" sz="1400" u="none" cap="none" strike="noStrike">
           <a:solidFill>
             <a:srgbClr val="000000"/>
           </a:solidFill>
@@ -13208,7 +13308,7 @@
           <a:srgbClr val="000000"/>
         </a:buClr>
         <a:buFont typeface="Arial"/>
-        <a:defRPr b="0" i="0" sz="1400" u="none" cap="none" strike="noStrike">
+        <a:defRPr b="0" i="0" spc="0" sz="1400" u="none" cap="none" strike="noStrike">
           <a:solidFill>
             <a:srgbClr val="000000"/>
           </a:solidFill>
@@ -13245,7 +13345,7 @@
           <a:srgbClr val="000000"/>
         </a:buClr>
         <a:buFont typeface="Arial"/>
-        <a:defRPr b="0" i="0" sz="1400" u="none" cap="none" strike="noStrike">
+        <a:defRPr b="0" i="0" spc="0" sz="1400" u="none" cap="none" strike="noStrike">
           <a:solidFill>
             <a:srgbClr val="000000"/>
           </a:solidFill>
@@ -13269,7 +13369,7 @@
           <a:srgbClr val="000000"/>
         </a:buClr>
         <a:buFont typeface="Arial"/>
-        <a:defRPr b="0" i="0" sz="1400" u="none" cap="none" strike="noStrike">
+        <a:defRPr b="0" i="0" spc="0" sz="1400" u="none" cap="none" strike="noStrike">
           <a:solidFill>
             <a:srgbClr val="000000"/>
           </a:solidFill>
@@ -13293,7 +13393,7 @@
           <a:srgbClr val="000000"/>
         </a:buClr>
         <a:buFont typeface="Arial"/>
-        <a:defRPr b="0" i="0" sz="1400" u="none" cap="none" strike="noStrike">
+        <a:defRPr b="0" i="0" spc="0" sz="1400" u="none" cap="none" strike="noStrike">
           <a:solidFill>
             <a:srgbClr val="000000"/>
           </a:solidFill>
@@ -13317,7 +13417,7 @@
           <a:srgbClr val="000000"/>
         </a:buClr>
         <a:buFont typeface="Arial"/>
-        <a:defRPr b="0" i="0" sz="1400" u="none" cap="none" strike="noStrike">
+        <a:defRPr b="0" i="0" spc="0" sz="1400" u="none" cap="none" strike="noStrike">
           <a:solidFill>
             <a:srgbClr val="000000"/>
           </a:solidFill>
@@ -13341,7 +13441,7 @@
           <a:srgbClr val="000000"/>
         </a:buClr>
         <a:buFont typeface="Arial"/>
-        <a:defRPr b="0" i="0" sz="1400" u="none" cap="none" strike="noStrike">
+        <a:defRPr b="0" i="0" spc="0" sz="1400" u="none" cap="none" strike="noStrike">
           <a:solidFill>
             <a:srgbClr val="000000"/>
           </a:solidFill>
@@ -13365,7 +13465,7 @@
           <a:srgbClr val="000000"/>
         </a:buClr>
         <a:buFont typeface="Arial"/>
-        <a:defRPr b="0" i="0" sz="1400" u="none" cap="none" strike="noStrike">
+        <a:defRPr b="0" i="0" spc="0" sz="1400" u="none" cap="none" strike="noStrike">
           <a:solidFill>
             <a:srgbClr val="000000"/>
           </a:solidFill>
@@ -13389,7 +13489,7 @@
           <a:srgbClr val="000000"/>
         </a:buClr>
         <a:buFont typeface="Arial"/>
-        <a:defRPr b="0" i="0" sz="1400" u="none" cap="none" strike="noStrike">
+        <a:defRPr b="0" i="0" spc="0" sz="1400" u="none" cap="none" strike="noStrike">
           <a:solidFill>
             <a:srgbClr val="000000"/>
           </a:solidFill>
@@ -13413,7 +13513,7 @@
           <a:srgbClr val="000000"/>
         </a:buClr>
         <a:buFont typeface="Arial"/>
-        <a:defRPr b="0" i="0" sz="1400" u="none" cap="none" strike="noStrike">
+        <a:defRPr b="0" i="0" spc="0" sz="1400" u="none" cap="none" strike="noStrike">
           <a:solidFill>
             <a:srgbClr val="000000"/>
           </a:solidFill>
@@ -13437,7 +13537,7 @@
           <a:srgbClr val="000000"/>
         </a:buClr>
         <a:buFont typeface="Arial"/>
-        <a:defRPr b="0" i="0" sz="1400" u="none" cap="none" strike="noStrike">
+        <a:defRPr b="0" i="0" spc="0" sz="1400" u="none" cap="none" strike="noStrike">
           <a:solidFill>
             <a:srgbClr val="000000"/>
           </a:solidFill>
@@ -13586,7 +13686,7 @@
   <p:cSld>
     <p:spTree>
       <p:nvGrpSpPr>
-        <p:cNvPr id="182" name="Shape 182"/>
+        <p:cNvPr id="176" name="Shape 176"/>
         <p:cNvGrpSpPr/>
         <p:nvPr/>
       </p:nvGrpSpPr>
@@ -13598,26 +13698,56 @@
           <a:chExt cx="0" cy="0"/>
         </a:xfrm>
       </p:grpSpPr>
+      <p:pic>
+        <p:nvPicPr>
+          <p:cNvPr id="177" name="Google Shape;177;p9"/>
+          <p:cNvPicPr preferRelativeResize="0"/>
+          <p:nvPr/>
+        </p:nvPicPr>
+        <p:blipFill>
+          <a:blip r:embed="rId3">
+            <a:alphaModFix/>
+          </a:blip>
+          <a:stretch>
+            <a:fillRect/>
+          </a:stretch>
+        </p:blipFill>
+        <p:spPr>
+          <a:xfrm>
+            <a:off x="2226951" y="1301663"/>
+            <a:ext cx="4256770" cy="3141525"/>
+          </a:xfrm>
+          <a:prstGeom prst="rect">
+            <a:avLst/>
+          </a:prstGeom>
+          <a:noFill/>
+          <a:ln>
+            <a:noFill/>
+          </a:ln>
+        </p:spPr>
+      </p:pic>
       <p:sp>
         <p:nvSpPr>
-          <p:cNvPr id="183" name="Google Shape;183;p10"/>
+          <p:cNvPr id="178" name="Google Shape;178;p9"/>
           <p:cNvSpPr/>
           <p:nvPr/>
         </p:nvSpPr>
         <p:spPr>
           <a:xfrm>
-            <a:off x="2365300" y="1796950"/>
-            <a:ext cx="952200" cy="623700"/>
+            <a:off x="2845400" y="731650"/>
+            <a:ext cx="1324200" cy="623700"/>
           </a:xfrm>
-          <a:prstGeom prst="rect">
-            <a:avLst/>
+          <a:prstGeom prst="roundRect">
+            <a:avLst>
+              <a:gd fmla="val 16667" name="adj"/>
+            </a:avLst>
           </a:prstGeom>
           <a:solidFill>
-            <a:schemeClr val="lt2"/>
+            <a:srgbClr val="F2DDE2"/>
           </a:solidFill>
           <a:ln cap="flat" cmpd="sng" w="9525">
             <a:solidFill>
-              <a:schemeClr val="dk2"/>
+              <a:schemeClr val="lt1"/>
             </a:solidFill>
             <a:prstDash val="solid"/>
             <a:round/>
@@ -13644,12 +13774,12 @@
               <a:buClr>
                 <a:srgbClr val="000000"/>
               </a:buClr>
-              <a:buSzPts val="1400"/>
+              <a:buSzPts val="1300"/>
               <a:buFont typeface="Arial"/>
               <a:buNone/>
             </a:pPr>
             <a:r>
-              <a:rPr b="0" i="0" lang="es-419" sz="1400" u="none" cap="none" strike="noStrike">
+              <a:rPr b="0" i="0" lang="es-419" sz="1300" u="none" cap="none" strike="noStrike">
                 <a:solidFill>
                   <a:srgbClr val="000000"/>
                 </a:solidFill>
@@ -13658,9 +13788,9 @@
                 <a:cs typeface="Arial"/>
                 <a:sym typeface="Arial"/>
               </a:rPr>
-              <a:t>Datos</a:t>
+              <a:t>Pensar como humanos</a:t>
             </a:r>
-            <a:endParaRPr b="0" i="0" sz="1400" u="none" cap="none" strike="noStrike">
+            <a:endParaRPr b="0" i="0" sz="1300" u="none" cap="none" strike="noStrike">
               <a:solidFill>
                 <a:srgbClr val="000000"/>
               </a:solidFill>
@@ -13674,24 +13804,26 @@
       </p:sp>
       <p:sp>
         <p:nvSpPr>
-          <p:cNvPr id="184" name="Google Shape;184;p10"/>
+          <p:cNvPr id="179" name="Google Shape;179;p9"/>
           <p:cNvSpPr/>
           <p:nvPr/>
         </p:nvSpPr>
         <p:spPr>
           <a:xfrm>
-            <a:off x="3644900" y="1796950"/>
-            <a:ext cx="1259400" cy="623700"/>
+            <a:off x="517150" y="854025"/>
+            <a:ext cx="1324200" cy="623700"/>
           </a:xfrm>
-          <a:prstGeom prst="rect">
-            <a:avLst/>
+          <a:prstGeom prst="roundRect">
+            <a:avLst>
+              <a:gd fmla="val 16667" name="adj"/>
+            </a:avLst>
           </a:prstGeom>
           <a:solidFill>
-            <a:schemeClr val="lt2"/>
+            <a:srgbClr val="F2DDE2"/>
           </a:solidFill>
           <a:ln cap="flat" cmpd="sng" w="9525">
             <a:solidFill>
-              <a:schemeClr val="dk2"/>
+              <a:schemeClr val="lt1"/>
             </a:solidFill>
             <a:prstDash val="solid"/>
             <a:round/>
@@ -13718,12 +13850,12 @@
               <a:buClr>
                 <a:srgbClr val="000000"/>
               </a:buClr>
-              <a:buSzPts val="1400"/>
+              <a:buSzPts val="1300"/>
               <a:buFont typeface="Arial"/>
               <a:buNone/>
             </a:pPr>
             <a:r>
-              <a:rPr b="0" i="0" lang="es-419" sz="1400" u="none" cap="none" strike="noStrike">
+              <a:rPr b="0" i="0" lang="es-419" sz="1300" u="none" cap="none" strike="noStrike">
                 <a:solidFill>
                   <a:srgbClr val="000000"/>
                 </a:solidFill>
@@ -13732,9 +13864,9 @@
                 <a:cs typeface="Arial"/>
                 <a:sym typeface="Arial"/>
               </a:rPr>
-              <a:t>Reglas</a:t>
+              <a:t>Actuar como humanos</a:t>
             </a:r>
-            <a:endParaRPr b="0" i="0" sz="1400" u="none" cap="none" strike="noStrike">
+            <a:endParaRPr b="0" i="0" sz="1300" u="none" cap="none" strike="noStrike">
               <a:solidFill>
                 <a:srgbClr val="000000"/>
               </a:solidFill>
@@ -13748,24 +13880,26 @@
       </p:sp>
       <p:sp>
         <p:nvSpPr>
-          <p:cNvPr id="185" name="Google Shape;185;p10"/>
+          <p:cNvPr id="180" name="Google Shape;180;p9"/>
           <p:cNvSpPr/>
           <p:nvPr/>
         </p:nvSpPr>
         <p:spPr>
           <a:xfrm>
-            <a:off x="5519275" y="1796950"/>
-            <a:ext cx="1259400" cy="623700"/>
+            <a:off x="434675" y="1831513"/>
+            <a:ext cx="1324200" cy="623700"/>
           </a:xfrm>
-          <a:prstGeom prst="rect">
-            <a:avLst/>
+          <a:prstGeom prst="roundRect">
+            <a:avLst>
+              <a:gd fmla="val 16667" name="adj"/>
+            </a:avLst>
           </a:prstGeom>
           <a:solidFill>
-            <a:schemeClr val="lt2"/>
+            <a:srgbClr val="F2DDE2"/>
           </a:solidFill>
           <a:ln cap="flat" cmpd="sng" w="9525">
             <a:solidFill>
-              <a:schemeClr val="dk2"/>
+              <a:schemeClr val="lt1"/>
             </a:solidFill>
             <a:prstDash val="solid"/>
             <a:round/>
@@ -13792,12 +13926,12 @@
               <a:buClr>
                 <a:srgbClr val="000000"/>
               </a:buClr>
-              <a:buSzPts val="1400"/>
+              <a:buSzPts val="1300"/>
               <a:buFont typeface="Arial"/>
               <a:buNone/>
             </a:pPr>
             <a:r>
-              <a:rPr b="0" i="0" lang="es-419" sz="1400" u="none" cap="none" strike="noStrike">
+              <a:rPr b="0" i="0" lang="es-419" sz="1300" u="none" cap="none" strike="noStrike">
                 <a:solidFill>
                   <a:srgbClr val="000000"/>
                 </a:solidFill>
@@ -13806,9 +13940,9 @@
                 <a:cs typeface="Arial"/>
                 <a:sym typeface="Arial"/>
               </a:rPr>
-              <a:t>Resultados</a:t>
+              <a:t>Pensar racionalmente</a:t>
             </a:r>
-            <a:endParaRPr b="0" i="0" sz="1400" u="none" cap="none" strike="noStrike">
+            <a:endParaRPr b="0" i="0" sz="1300" u="none" cap="none" strike="noStrike">
               <a:solidFill>
                 <a:srgbClr val="000000"/>
               </a:solidFill>
@@ -13822,24 +13956,26 @@
       </p:sp>
       <p:sp>
         <p:nvSpPr>
-          <p:cNvPr id="186" name="Google Shape;186;p10"/>
+          <p:cNvPr id="181" name="Google Shape;181;p9"/>
           <p:cNvSpPr/>
           <p:nvPr/>
         </p:nvSpPr>
         <p:spPr>
           <a:xfrm>
-            <a:off x="2365300" y="3132075"/>
-            <a:ext cx="952200" cy="623700"/>
+            <a:off x="295500" y="2809025"/>
+            <a:ext cx="1324200" cy="623700"/>
           </a:xfrm>
-          <a:prstGeom prst="rect">
-            <a:avLst/>
+          <a:prstGeom prst="roundRect">
+            <a:avLst>
+              <a:gd fmla="val 16667" name="adj"/>
+            </a:avLst>
           </a:prstGeom>
           <a:solidFill>
-            <a:schemeClr val="lt2"/>
+            <a:srgbClr val="F2DDE2"/>
           </a:solidFill>
           <a:ln cap="flat" cmpd="sng" w="9525">
             <a:solidFill>
-              <a:schemeClr val="dk2"/>
+              <a:schemeClr val="lt1"/>
             </a:solidFill>
             <a:prstDash val="solid"/>
             <a:round/>
@@ -13866,12 +14002,12 @@
               <a:buClr>
                 <a:srgbClr val="000000"/>
               </a:buClr>
-              <a:buSzPts val="1400"/>
+              <a:buSzPts val="1300"/>
               <a:buFont typeface="Arial"/>
               <a:buNone/>
             </a:pPr>
             <a:r>
-              <a:rPr b="0" i="0" lang="es-419" sz="1400" u="none" cap="none" strike="noStrike">
+              <a:rPr b="0" i="0" lang="es-419" sz="1300" u="none" cap="none" strike="noStrike">
                 <a:solidFill>
                   <a:srgbClr val="000000"/>
                 </a:solidFill>
@@ -13880,9 +14016,9 @@
                 <a:cs typeface="Arial"/>
                 <a:sym typeface="Arial"/>
               </a:rPr>
-              <a:t>Datos</a:t>
+              <a:t>Actuar racionalmente</a:t>
             </a:r>
-            <a:endParaRPr b="0" i="0" sz="1400" u="none" cap="none" strike="noStrike">
+            <a:endParaRPr b="0" i="0" sz="1300" u="none" cap="none" strike="noStrike">
               <a:solidFill>
                 <a:srgbClr val="000000"/>
               </a:solidFill>
@@ -13894,23 +14030,23 @@
           </a:p>
         </p:txBody>
       </p:sp>
-      <p:sp>
-        <p:nvSpPr>
-          <p:cNvPr id="187" name="Google Shape;187;p10"/>
-          <p:cNvSpPr/>
+      <p:cxnSp>
+        <p:nvCxnSpPr>
+          <p:cNvPr id="182" name="Google Shape;182;p9"/>
+          <p:cNvCxnSpPr>
+            <a:stCxn id="178" idx="2"/>
+          </p:cNvCxnSpPr>
           <p:nvPr/>
-        </p:nvSpPr>
+        </p:nvCxnSpPr>
         <p:spPr>
           <a:xfrm>
-            <a:off x="5519275" y="3132075"/>
-            <a:ext cx="1259400" cy="623700"/>
+            <a:off x="3507500" y="1355350"/>
+            <a:ext cx="134400" cy="330900"/>
           </a:xfrm>
-          <a:prstGeom prst="rect">
+          <a:prstGeom prst="straightConnector1">
             <a:avLst/>
           </a:prstGeom>
-          <a:solidFill>
-            <a:schemeClr val="lt2"/>
-          </a:solidFill>
+          <a:noFill/>
           <a:ln cap="flat" cmpd="sng" w="9525">
             <a:solidFill>
               <a:schemeClr val="dk2"/>
@@ -13918,73 +14054,27 @@
             <a:prstDash val="solid"/>
             <a:round/>
             <a:headEnd len="sm" w="sm" type="none"/>
-            <a:tailEnd len="sm" w="sm" type="none"/>
+            <a:tailEnd len="med" w="med" type="triangle"/>
           </a:ln>
         </p:spPr>
-        <p:txBody>
-          <a:bodyPr anchorCtr="0" anchor="ctr" bIns="91425" lIns="91425" spcFirstLastPara="1" rIns="91425" wrap="square" tIns="91425">
-            <a:noAutofit/>
-          </a:bodyPr>
-          <a:lstStyle/>
-          <a:p>
-            <a:pPr indent="0" lvl="0" marL="0" marR="0" rtl="0" algn="ctr">
-              <a:lnSpc>
-                <a:spcPct val="100000"/>
-              </a:lnSpc>
-              <a:spcBef>
-                <a:spcPts val="0"/>
-              </a:spcBef>
-              <a:spcAft>
-                <a:spcPts val="0"/>
-              </a:spcAft>
-              <a:buClr>
-                <a:srgbClr val="000000"/>
-              </a:buClr>
-              <a:buSzPts val="1400"/>
-              <a:buFont typeface="Arial"/>
-              <a:buNone/>
-            </a:pPr>
-            <a:r>
-              <a:rPr b="0" i="0" lang="es-419" sz="1400" u="none" cap="none" strike="noStrike">
-                <a:solidFill>
-                  <a:srgbClr val="000000"/>
-                </a:solidFill>
-                <a:latin typeface="Arial"/>
-                <a:ea typeface="Arial"/>
-                <a:cs typeface="Arial"/>
-                <a:sym typeface="Arial"/>
-              </a:rPr>
-              <a:t>Reglas</a:t>
-            </a:r>
-            <a:endParaRPr b="0" i="0" sz="1400" u="none" cap="none" strike="noStrike">
-              <a:solidFill>
-                <a:srgbClr val="000000"/>
-              </a:solidFill>
-              <a:latin typeface="Arial"/>
-              <a:ea typeface="Arial"/>
-              <a:cs typeface="Arial"/>
-              <a:sym typeface="Arial"/>
-            </a:endParaRPr>
-          </a:p>
-        </p:txBody>
-      </p:sp>
-      <p:sp>
-        <p:nvSpPr>
-          <p:cNvPr id="188" name="Google Shape;188;p10"/>
-          <p:cNvSpPr/>
+      </p:cxnSp>
+      <p:cxnSp>
+        <p:nvCxnSpPr>
+          <p:cNvPr id="183" name="Google Shape;183;p9"/>
+          <p:cNvCxnSpPr>
+            <a:stCxn id="179" idx="3"/>
+          </p:cNvCxnSpPr>
           <p:nvPr/>
-        </p:nvSpPr>
+        </p:nvCxnSpPr>
         <p:spPr>
           <a:xfrm>
-            <a:off x="3644900" y="3132075"/>
-            <a:ext cx="1259400" cy="623700"/>
+            <a:off x="1841350" y="1165875"/>
+            <a:ext cx="1384800" cy="951600"/>
           </a:xfrm>
-          <a:prstGeom prst="rect">
+          <a:prstGeom prst="straightConnector1">
             <a:avLst/>
           </a:prstGeom>
-          <a:solidFill>
-            <a:schemeClr val="lt2"/>
-          </a:solidFill>
+          <a:noFill/>
           <a:ln cap="flat" cmpd="sng" w="9525">
             <a:solidFill>
               <a:schemeClr val="dk2"/>
@@ -13992,75 +14082,27 @@
             <a:prstDash val="solid"/>
             <a:round/>
             <a:headEnd len="sm" w="sm" type="none"/>
-            <a:tailEnd len="sm" w="sm" type="none"/>
+            <a:tailEnd len="med" w="med" type="triangle"/>
           </a:ln>
         </p:spPr>
-        <p:txBody>
-          <a:bodyPr anchorCtr="0" anchor="ctr" bIns="91425" lIns="91425" spcFirstLastPara="1" rIns="91425" wrap="square" tIns="91425">
-            <a:noAutofit/>
-          </a:bodyPr>
-          <a:lstStyle/>
-          <a:p>
-            <a:pPr indent="0" lvl="0" marL="0" marR="0" rtl="0" algn="ctr">
-              <a:lnSpc>
-                <a:spcPct val="100000"/>
-              </a:lnSpc>
-              <a:spcBef>
-                <a:spcPts val="0"/>
-              </a:spcBef>
-              <a:spcAft>
-                <a:spcPts val="0"/>
-              </a:spcAft>
-              <a:buClr>
-                <a:srgbClr val="000000"/>
-              </a:buClr>
-              <a:buSzPts val="1400"/>
-              <a:buFont typeface="Arial"/>
-              <a:buNone/>
-            </a:pPr>
-            <a:r>
-              <a:rPr b="0" i="0" lang="es-419" sz="1400" u="none" cap="none" strike="noStrike">
-                <a:solidFill>
-                  <a:srgbClr val="000000"/>
-                </a:solidFill>
-                <a:latin typeface="Arial"/>
-                <a:ea typeface="Arial"/>
-                <a:cs typeface="Arial"/>
-                <a:sym typeface="Arial"/>
-              </a:rPr>
-              <a:t>Resultados</a:t>
-            </a:r>
-            <a:endParaRPr b="0" i="0" sz="1400" u="none" cap="none" strike="noStrike">
-              <a:solidFill>
-                <a:srgbClr val="000000"/>
-              </a:solidFill>
-              <a:latin typeface="Arial"/>
-              <a:ea typeface="Arial"/>
-              <a:cs typeface="Arial"/>
-              <a:sym typeface="Arial"/>
-            </a:endParaRPr>
-          </a:p>
-        </p:txBody>
-      </p:sp>
-      <p:sp>
-        <p:nvSpPr>
-          <p:cNvPr id="189" name="Google Shape;189;p10"/>
-          <p:cNvSpPr/>
+      </p:cxnSp>
+      <p:cxnSp>
+        <p:nvCxnSpPr>
+          <p:cNvPr id="184" name="Google Shape;184;p9"/>
+          <p:cNvCxnSpPr>
+            <a:stCxn id="180" idx="3"/>
+          </p:cNvCxnSpPr>
           <p:nvPr/>
-        </p:nvSpPr>
+        </p:nvCxnSpPr>
         <p:spPr>
           <a:xfrm>
-            <a:off x="3393600" y="1993900"/>
-            <a:ext cx="175200" cy="229800"/>
+            <a:off x="1758875" y="2143363"/>
+            <a:ext cx="1275000" cy="436200"/>
           </a:xfrm>
-          <a:prstGeom prst="mathPlus">
-            <a:avLst>
-              <a:gd fmla="val 23520" name="adj1"/>
-            </a:avLst>
+          <a:prstGeom prst="straightConnector1">
+            <a:avLst/>
           </a:prstGeom>
-          <a:solidFill>
-            <a:schemeClr val="dk2"/>
-          </a:solidFill>
+          <a:noFill/>
           <a:ln cap="flat" cmpd="sng" w="9525">
             <a:solidFill>
               <a:schemeClr val="dk2"/>
@@ -14068,130 +14110,22 @@
             <a:prstDash val="solid"/>
             <a:round/>
             <a:headEnd len="sm" w="sm" type="none"/>
-            <a:tailEnd len="sm" w="sm" type="none"/>
+            <a:tailEnd len="med" w="med" type="triangle"/>
           </a:ln>
         </p:spPr>
-        <p:txBody>
-          <a:bodyPr anchorCtr="0" anchor="ctr" bIns="91425" lIns="91425" spcFirstLastPara="1" rIns="91425" wrap="square" tIns="91425">
-            <a:noAutofit/>
-          </a:bodyPr>
-          <a:lstStyle/>
-          <a:p>
-            <a:pPr indent="0" lvl="0" marL="0" marR="0" rtl="0" algn="l">
-              <a:lnSpc>
-                <a:spcPct val="100000"/>
-              </a:lnSpc>
-              <a:spcBef>
-                <a:spcPts val="0"/>
-              </a:spcBef>
-              <a:spcAft>
-                <a:spcPts val="0"/>
-              </a:spcAft>
-              <a:buClr>
-                <a:srgbClr val="000000"/>
-              </a:buClr>
-              <a:buSzPts val="1400"/>
-              <a:buFont typeface="Arial"/>
-              <a:buNone/>
-            </a:pPr>
-            <a:r>
-              <a:t/>
-            </a:r>
-            <a:endParaRPr b="0" i="0" sz="1400" u="none" cap="none" strike="noStrike">
-              <a:solidFill>
-                <a:srgbClr val="000000"/>
-              </a:solidFill>
-              <a:highlight>
-                <a:schemeClr val="dk2"/>
-              </a:highlight>
-              <a:latin typeface="Arial"/>
-              <a:ea typeface="Arial"/>
-              <a:cs typeface="Arial"/>
-              <a:sym typeface="Arial"/>
-            </a:endParaRPr>
-          </a:p>
-        </p:txBody>
-      </p:sp>
-      <p:sp>
-        <p:nvSpPr>
-          <p:cNvPr id="190" name="Google Shape;190;p10"/>
-          <p:cNvSpPr/>
-          <p:nvPr/>
-        </p:nvSpPr>
-        <p:spPr>
-          <a:xfrm>
-            <a:off x="3393600" y="3329025"/>
-            <a:ext cx="175200" cy="229800"/>
-          </a:xfrm>
-          <a:prstGeom prst="mathPlus">
-            <a:avLst>
-              <a:gd fmla="val 23520" name="adj1"/>
-            </a:avLst>
-          </a:prstGeom>
-          <a:solidFill>
-            <a:schemeClr val="dk2"/>
-          </a:solidFill>
-          <a:ln cap="flat" cmpd="sng" w="9525">
-            <a:solidFill>
-              <a:schemeClr val="dk2"/>
-            </a:solidFill>
-            <a:prstDash val="solid"/>
-            <a:round/>
-            <a:headEnd len="sm" w="sm" type="none"/>
-            <a:tailEnd len="sm" w="sm" type="none"/>
-          </a:ln>
-        </p:spPr>
-        <p:txBody>
-          <a:bodyPr anchorCtr="0" anchor="ctr" bIns="91425" lIns="91425" spcFirstLastPara="1" rIns="91425" wrap="square" tIns="91425">
-            <a:noAutofit/>
-          </a:bodyPr>
-          <a:lstStyle/>
-          <a:p>
-            <a:pPr indent="0" lvl="0" marL="0" marR="0" rtl="0" algn="l">
-              <a:lnSpc>
-                <a:spcPct val="100000"/>
-              </a:lnSpc>
-              <a:spcBef>
-                <a:spcPts val="0"/>
-              </a:spcBef>
-              <a:spcAft>
-                <a:spcPts val="0"/>
-              </a:spcAft>
-              <a:buClr>
-                <a:srgbClr val="000000"/>
-              </a:buClr>
-              <a:buSzPts val="1400"/>
-              <a:buFont typeface="Arial"/>
-              <a:buNone/>
-            </a:pPr>
-            <a:r>
-              <a:t/>
-            </a:r>
-            <a:endParaRPr b="0" i="0" sz="1400" u="none" cap="none" strike="noStrike">
-              <a:solidFill>
-                <a:srgbClr val="000000"/>
-              </a:solidFill>
-              <a:highlight>
-                <a:schemeClr val="dk2"/>
-              </a:highlight>
-              <a:latin typeface="Arial"/>
-              <a:ea typeface="Arial"/>
-              <a:cs typeface="Arial"/>
-              <a:sym typeface="Arial"/>
-            </a:endParaRPr>
-          </a:p>
-        </p:txBody>
-      </p:sp>
+      </p:cxnSp>
       <p:cxnSp>
         <p:nvCxnSpPr>
-          <p:cNvPr id="191" name="Google Shape;191;p10"/>
-          <p:cNvCxnSpPr/>
+          <p:cNvPr id="185" name="Google Shape;185;p9"/>
+          <p:cNvCxnSpPr>
+            <a:stCxn id="181" idx="3"/>
+          </p:cNvCxnSpPr>
           <p:nvPr/>
         </p:nvCxnSpPr>
         <p:spPr>
           <a:xfrm flipH="1" rot="10800000">
-            <a:off x="5007488" y="2106100"/>
-            <a:ext cx="408600" cy="5400"/>
+            <a:off x="1619700" y="2995175"/>
+            <a:ext cx="1391100" cy="125700"/>
           </a:xfrm>
           <a:prstGeom prst="straightConnector1">
             <a:avLst/>
@@ -14210,146 +14144,400 @@
       </p:cxnSp>
       <p:sp>
         <p:nvSpPr>
-          <p:cNvPr id="192" name="Google Shape;192;p10"/>
-          <p:cNvSpPr txBox="1"/>
+          <p:cNvPr id="186" name="Google Shape;186;p9"/>
+          <p:cNvSpPr/>
           <p:nvPr/>
         </p:nvSpPr>
         <p:spPr>
           <a:xfrm>
-            <a:off x="475075" y="1396750"/>
-            <a:ext cx="6303600" cy="400200"/>
+            <a:off x="5513575" y="894425"/>
+            <a:ext cx="1783800" cy="713700"/>
           </a:xfrm>
-          <a:prstGeom prst="rect">
-            <a:avLst/>
+          <a:prstGeom prst="roundRect">
+            <a:avLst>
+              <a:gd fmla="val 16667" name="adj"/>
+            </a:avLst>
           </a:prstGeom>
-          <a:noFill/>
-          <a:ln>
-            <a:noFill/>
+          <a:solidFill>
+            <a:srgbClr val="E1EAE9"/>
+          </a:solidFill>
+          <a:ln cap="flat" cmpd="sng" w="9525">
+            <a:solidFill>
+              <a:schemeClr val="lt1"/>
+            </a:solidFill>
+            <a:prstDash val="solid"/>
+            <a:round/>
+            <a:headEnd len="sm" w="sm" type="none"/>
+            <a:tailEnd len="sm" w="sm" type="none"/>
           </a:ln>
         </p:spPr>
         <p:txBody>
-          <a:bodyPr anchorCtr="0" anchor="t" bIns="91425" lIns="91425" spcFirstLastPara="1" rIns="91425" wrap="square" tIns="91425">
-            <a:spAutoFit/>
+          <a:bodyPr anchorCtr="0" anchor="ctr" bIns="91425" lIns="91425" spcFirstLastPara="1" rIns="91425" wrap="square" tIns="91425">
+            <a:noAutofit/>
           </a:bodyPr>
           <a:lstStyle/>
           <a:p>
-            <a:pPr indent="0" lvl="0" marL="0" marR="0" rtl="0" algn="l">
-              <a:lnSpc>
-                <a:spcPct val="100000"/>
-              </a:lnSpc>
-              <a:spcBef>
-                <a:spcPts val="0"/>
-              </a:spcBef>
-              <a:spcAft>
-                <a:spcPts val="0"/>
+            <a:pPr indent="0" lvl="0" marL="0" marR="0" rtl="0" algn="ctr">
+              <a:lnSpc>
+                <a:spcPct val="107916"/>
+              </a:lnSpc>
+              <a:spcBef>
+                <a:spcPts val="0"/>
+              </a:spcBef>
+              <a:spcAft>
+                <a:spcPts val="800"/>
               </a:spcAft>
               <a:buClr>
                 <a:srgbClr val="000000"/>
               </a:buClr>
-              <a:buSzPts val="1400"/>
+              <a:buSzPts val="1200"/>
               <a:buFont typeface="Arial"/>
               <a:buNone/>
             </a:pPr>
             <a:r>
-              <a:rPr b="0" i="0" lang="es-419" sz="1400" u="none" cap="none" strike="noStrike">
-                <a:solidFill>
-                  <a:srgbClr val="000000"/>
-                </a:solidFill>
-                <a:latin typeface="Lato"/>
-                <a:ea typeface="Lato"/>
-                <a:cs typeface="Lato"/>
-                <a:sym typeface="Lato"/>
+              <a:rPr b="0" i="0" lang="es-419" sz="1200" u="none" cap="none" strike="noStrike">
+                <a:solidFill>
+                  <a:srgbClr val="374151"/>
+                </a:solidFill>
+                <a:latin typeface="Arial"/>
+                <a:ea typeface="Arial"/>
+                <a:cs typeface="Arial"/>
+                <a:sym typeface="Arial"/>
               </a:rPr>
-              <a:t>Enfoque tradicional</a:t>
+              <a:t>Aprender y mejorar automáticamente a partir de los datos</a:t>
             </a:r>
-            <a:endParaRPr b="0" i="0" sz="1400" u="none" cap="none" strike="noStrike">
+            <a:endParaRPr b="0" i="0" sz="1300" u="none" cap="none" strike="noStrike">
               <a:solidFill>
                 <a:srgbClr val="000000"/>
               </a:solidFill>
-              <a:latin typeface="Lato"/>
-              <a:ea typeface="Lato"/>
-              <a:cs typeface="Lato"/>
-              <a:sym typeface="Lato"/>
+              <a:latin typeface="Arial"/>
+              <a:ea typeface="Arial"/>
+              <a:cs typeface="Arial"/>
+              <a:sym typeface="Arial"/>
             </a:endParaRPr>
           </a:p>
         </p:txBody>
       </p:sp>
       <p:sp>
         <p:nvSpPr>
-          <p:cNvPr id="193" name="Google Shape;193;p10"/>
-          <p:cNvSpPr txBox="1"/>
+          <p:cNvPr id="187" name="Google Shape;187;p9"/>
+          <p:cNvSpPr/>
           <p:nvPr/>
         </p:nvSpPr>
         <p:spPr>
           <a:xfrm>
-            <a:off x="475075" y="2674738"/>
-            <a:ext cx="6303600" cy="400200"/>
+            <a:off x="7137725" y="2262675"/>
+            <a:ext cx="1783800" cy="1219500"/>
           </a:xfrm>
-          <a:prstGeom prst="rect">
-            <a:avLst/>
+          <a:prstGeom prst="roundRect">
+            <a:avLst>
+              <a:gd fmla="val 16667" name="adj"/>
+            </a:avLst>
           </a:prstGeom>
-          <a:noFill/>
-          <a:ln>
-            <a:noFill/>
+          <a:solidFill>
+            <a:srgbClr val="E1EAE9"/>
+          </a:solidFill>
+          <a:ln cap="flat" cmpd="sng" w="9525">
+            <a:solidFill>
+              <a:schemeClr val="lt1"/>
+            </a:solidFill>
+            <a:prstDash val="solid"/>
+            <a:round/>
+            <a:headEnd len="sm" w="sm" type="none"/>
+            <a:tailEnd len="sm" w="sm" type="none"/>
           </a:ln>
         </p:spPr>
         <p:txBody>
-          <a:bodyPr anchorCtr="0" anchor="t" bIns="91425" lIns="91425" spcFirstLastPara="1" rIns="91425" wrap="square" tIns="91425">
-            <a:spAutoFit/>
+          <a:bodyPr anchorCtr="0" anchor="ctr" bIns="91425" lIns="91425" spcFirstLastPara="1" rIns="91425" wrap="square" tIns="91425">
+            <a:noAutofit/>
           </a:bodyPr>
           <a:lstStyle/>
           <a:p>
-            <a:pPr indent="0" lvl="0" marL="0" marR="0" rtl="0" algn="l">
-              <a:lnSpc>
-                <a:spcPct val="100000"/>
-              </a:lnSpc>
-              <a:spcBef>
-                <a:spcPts val="0"/>
-              </a:spcBef>
-              <a:spcAft>
-                <a:spcPts val="0"/>
+            <a:pPr indent="0" lvl="0" marL="0" marR="0" rtl="0" algn="ctr">
+              <a:lnSpc>
+                <a:spcPct val="107916"/>
+              </a:lnSpc>
+              <a:spcBef>
+                <a:spcPts val="0"/>
+              </a:spcBef>
+              <a:spcAft>
+                <a:spcPts val="800"/>
               </a:spcAft>
               <a:buClr>
                 <a:srgbClr val="000000"/>
               </a:buClr>
-              <a:buSzPts val="1400"/>
+              <a:buSzPts val="1200"/>
               <a:buFont typeface="Arial"/>
               <a:buNone/>
             </a:pPr>
             <a:r>
-              <a:rPr b="0" i="0" lang="es-419" sz="1400" u="none" cap="none" strike="noStrike">
-                <a:solidFill>
-                  <a:srgbClr val="000000"/>
-                </a:solidFill>
-                <a:latin typeface="Lato"/>
-                <a:ea typeface="Lato"/>
-                <a:cs typeface="Lato"/>
-                <a:sym typeface="Lato"/>
+              <a:rPr b="0" i="0" lang="es-419" sz="1200" u="none" cap="none" strike="noStrike">
+                <a:solidFill>
+                  <a:srgbClr val="374151"/>
+                </a:solidFill>
+                <a:latin typeface="Arial"/>
+                <a:ea typeface="Arial"/>
+                <a:cs typeface="Arial"/>
+                <a:sym typeface="Arial"/>
               </a:rPr>
-              <a:t>Enfoque aprendizaje automático</a:t>
+              <a:t>Capacidad de automatizar tareas complejas y tomar decisiones basadas en datos.</a:t>
             </a:r>
-            <a:endParaRPr b="0" i="0" sz="1400" u="none" cap="none" strike="noStrike">
+            <a:endParaRPr b="0" i="0" sz="1300" u="none" cap="none" strike="noStrike">
               <a:solidFill>
                 <a:srgbClr val="000000"/>
               </a:solidFill>
-              <a:latin typeface="Lato"/>
-              <a:ea typeface="Lato"/>
-              <a:cs typeface="Lato"/>
-              <a:sym typeface="Lato"/>
+              <a:latin typeface="Arial"/>
+              <a:ea typeface="Arial"/>
+              <a:cs typeface="Arial"/>
+              <a:sym typeface="Arial"/>
+            </a:endParaRPr>
+          </a:p>
+        </p:txBody>
+      </p:sp>
+      <p:sp>
+        <p:nvSpPr>
+          <p:cNvPr id="188" name="Google Shape;188;p9"/>
+          <p:cNvSpPr/>
+          <p:nvPr/>
+        </p:nvSpPr>
+        <p:spPr>
+          <a:xfrm>
+            <a:off x="6869325" y="1540063"/>
+            <a:ext cx="1783800" cy="582900"/>
+          </a:xfrm>
+          <a:prstGeom prst="roundRect">
+            <a:avLst>
+              <a:gd fmla="val 16667" name="adj"/>
+            </a:avLst>
+          </a:prstGeom>
+          <a:solidFill>
+            <a:srgbClr val="E1EAE9"/>
+          </a:solidFill>
+          <a:ln cap="flat" cmpd="sng" w="9525">
+            <a:solidFill>
+              <a:schemeClr val="lt1"/>
+            </a:solidFill>
+            <a:prstDash val="solid"/>
+            <a:round/>
+            <a:headEnd len="sm" w="sm" type="none"/>
+            <a:tailEnd len="sm" w="sm" type="none"/>
+          </a:ln>
+        </p:spPr>
+        <p:txBody>
+          <a:bodyPr anchorCtr="0" anchor="ctr" bIns="91425" lIns="91425" spcFirstLastPara="1" rIns="91425" wrap="square" tIns="91425">
+            <a:noAutofit/>
+          </a:bodyPr>
+          <a:lstStyle/>
+          <a:p>
+            <a:pPr indent="0" lvl="0" marL="0" marR="0" rtl="0" algn="ctr">
+              <a:lnSpc>
+                <a:spcPct val="107916"/>
+              </a:lnSpc>
+              <a:spcBef>
+                <a:spcPts val="0"/>
+              </a:spcBef>
+              <a:spcAft>
+                <a:spcPts val="800"/>
+              </a:spcAft>
+              <a:buClr>
+                <a:srgbClr val="000000"/>
+              </a:buClr>
+              <a:buSzPts val="1200"/>
+              <a:buFont typeface="Arial"/>
+              <a:buNone/>
+            </a:pPr>
+            <a:r>
+              <a:rPr b="0" i="0" lang="es-419" sz="1200" u="none" cap="none" strike="noStrike">
+                <a:solidFill>
+                  <a:srgbClr val="374151"/>
+                </a:solidFill>
+                <a:latin typeface="Arial"/>
+                <a:ea typeface="Arial"/>
+                <a:cs typeface="Arial"/>
+                <a:sym typeface="Arial"/>
+              </a:rPr>
+              <a:t>Modelos y algoritmos</a:t>
+            </a:r>
+            <a:endParaRPr b="0" i="0" sz="1300" u="none" cap="none" strike="noStrike">
+              <a:solidFill>
+                <a:srgbClr val="000000"/>
+              </a:solidFill>
+              <a:latin typeface="Arial"/>
+              <a:ea typeface="Arial"/>
+              <a:cs typeface="Arial"/>
+              <a:sym typeface="Arial"/>
+            </a:endParaRPr>
+          </a:p>
+        </p:txBody>
+      </p:sp>
+      <p:sp>
+        <p:nvSpPr>
+          <p:cNvPr id="189" name="Google Shape;189;p9"/>
+          <p:cNvSpPr/>
+          <p:nvPr/>
+        </p:nvSpPr>
+        <p:spPr>
+          <a:xfrm>
+            <a:off x="5830525" y="3727100"/>
+            <a:ext cx="2911800" cy="1274100"/>
+          </a:xfrm>
+          <a:prstGeom prst="roundRect">
+            <a:avLst>
+              <a:gd fmla="val 16667" name="adj"/>
+            </a:avLst>
+          </a:prstGeom>
+          <a:solidFill>
+            <a:srgbClr val="E7DEC1"/>
+          </a:solidFill>
+          <a:ln cap="flat" cmpd="sng" w="9525">
+            <a:solidFill>
+              <a:schemeClr val="lt1"/>
+            </a:solidFill>
+            <a:prstDash val="solid"/>
+            <a:round/>
+            <a:headEnd len="sm" w="sm" type="none"/>
+            <a:tailEnd len="sm" w="sm" type="none"/>
+          </a:ln>
+        </p:spPr>
+        <p:txBody>
+          <a:bodyPr anchorCtr="0" anchor="ctr" bIns="91425" lIns="91425" spcFirstLastPara="1" rIns="91425" wrap="square" tIns="91425">
+            <a:noAutofit/>
+          </a:bodyPr>
+          <a:lstStyle/>
+          <a:p>
+            <a:pPr indent="0" lvl="0" marL="0" marR="0" rtl="0" algn="ctr">
+              <a:lnSpc>
+                <a:spcPct val="107916"/>
+              </a:lnSpc>
+              <a:spcBef>
+                <a:spcPts val="0"/>
+              </a:spcBef>
+              <a:spcAft>
+                <a:spcPts val="800"/>
+              </a:spcAft>
+              <a:buClr>
+                <a:srgbClr val="000000"/>
+              </a:buClr>
+              <a:buSzPts val="1200"/>
+              <a:buFont typeface="Arial"/>
+              <a:buNone/>
+            </a:pPr>
+            <a:r>
+              <a:rPr b="0" i="0" lang="es-419" sz="1200" u="none" cap="none" strike="noStrike">
+                <a:solidFill>
+                  <a:srgbClr val="374151"/>
+                </a:solidFill>
+                <a:latin typeface="Arial"/>
+                <a:ea typeface="Arial"/>
+                <a:cs typeface="Arial"/>
+                <a:sym typeface="Arial"/>
+              </a:rPr>
+              <a:t>Estructuración de algoritmos para toma inteligente de decisiones - Agrega capas y parámetros para aprender complejos mapeos con modelos no lineales.</a:t>
+            </a:r>
+            <a:endParaRPr b="0" i="0" sz="1300" u="none" cap="none" strike="noStrike">
+              <a:solidFill>
+                <a:srgbClr val="000000"/>
+              </a:solidFill>
+              <a:latin typeface="Arial"/>
+              <a:ea typeface="Arial"/>
+              <a:cs typeface="Arial"/>
+              <a:sym typeface="Arial"/>
             </a:endParaRPr>
           </a:p>
         </p:txBody>
       </p:sp>
       <p:cxnSp>
         <p:nvCxnSpPr>
-          <p:cNvPr id="194" name="Google Shape;194;p10"/>
+          <p:cNvPr id="190" name="Google Shape;190;p9"/>
           <p:cNvCxnSpPr/>
           <p:nvPr/>
         </p:nvCxnSpPr>
         <p:spPr>
-          <a:xfrm flipH="1" rot="10800000">
-            <a:off x="5007475" y="3441225"/>
-            <a:ext cx="408600" cy="5400"/>
+          <a:xfrm flipH="1">
+            <a:off x="4851000" y="1593875"/>
+            <a:ext cx="708300" cy="771900"/>
+          </a:xfrm>
+          <a:prstGeom prst="straightConnector1">
+            <a:avLst/>
+          </a:prstGeom>
+          <a:noFill/>
+          <a:ln cap="flat" cmpd="sng" w="9525">
+            <a:solidFill>
+              <a:schemeClr val="dk2"/>
+            </a:solidFill>
+            <a:prstDash val="solid"/>
+            <a:round/>
+            <a:headEnd len="sm" w="sm" type="none"/>
+            <a:tailEnd len="med" w="med" type="triangle"/>
+          </a:ln>
+        </p:spPr>
+      </p:cxnSp>
+      <p:cxnSp>
+        <p:nvCxnSpPr>
+          <p:cNvPr id="191" name="Google Shape;191;p9"/>
+          <p:cNvCxnSpPr>
+            <a:stCxn id="188" idx="1"/>
+          </p:cNvCxnSpPr>
+          <p:nvPr/>
+        </p:nvCxnSpPr>
+        <p:spPr>
+          <a:xfrm flipH="1">
+            <a:off x="5205225" y="1831513"/>
+            <a:ext cx="1664100" cy="825000"/>
+          </a:xfrm>
+          <a:prstGeom prst="straightConnector1">
+            <a:avLst/>
+          </a:prstGeom>
+          <a:noFill/>
+          <a:ln cap="flat" cmpd="sng" w="9525">
+            <a:solidFill>
+              <a:schemeClr val="dk2"/>
+            </a:solidFill>
+            <a:prstDash val="solid"/>
+            <a:round/>
+            <a:headEnd len="sm" w="sm" type="none"/>
+            <a:tailEnd len="med" w="med" type="triangle"/>
+          </a:ln>
+        </p:spPr>
+      </p:cxnSp>
+      <p:cxnSp>
+        <p:nvCxnSpPr>
+          <p:cNvPr id="192" name="Google Shape;192;p9"/>
+          <p:cNvCxnSpPr>
+            <a:stCxn id="187" idx="1"/>
+          </p:cNvCxnSpPr>
+          <p:nvPr/>
+        </p:nvCxnSpPr>
+        <p:spPr>
+          <a:xfrm rot="10800000">
+            <a:off x="5320625" y="2849025"/>
+            <a:ext cx="1817100" cy="23400"/>
+          </a:xfrm>
+          <a:prstGeom prst="straightConnector1">
+            <a:avLst/>
+          </a:prstGeom>
+          <a:noFill/>
+          <a:ln cap="flat" cmpd="sng" w="9525">
+            <a:solidFill>
+              <a:schemeClr val="dk2"/>
+            </a:solidFill>
+            <a:prstDash val="solid"/>
+            <a:round/>
+            <a:headEnd len="sm" w="sm" type="none"/>
+            <a:tailEnd len="med" w="med" type="triangle"/>
+          </a:ln>
+        </p:spPr>
+      </p:cxnSp>
+      <p:cxnSp>
+        <p:nvCxnSpPr>
+          <p:cNvPr id="193" name="Google Shape;193;p9"/>
+          <p:cNvCxnSpPr/>
+          <p:nvPr/>
+        </p:nvCxnSpPr>
+        <p:spPr>
+          <a:xfrm rot="10800000">
+            <a:off x="4981775" y="3665025"/>
+            <a:ext cx="900900" cy="146400"/>
           </a:xfrm>
           <a:prstGeom prst="straightConnector1">
             <a:avLst/>
@@ -14368,14 +14556,14 @@
       </p:cxnSp>
       <p:sp>
         <p:nvSpPr>
-          <p:cNvPr id="195" name="Google Shape;195;p10"/>
+          <p:cNvPr id="194" name="Google Shape;194;p9"/>
           <p:cNvSpPr txBox="1"/>
           <p:nvPr/>
         </p:nvSpPr>
         <p:spPr>
           <a:xfrm>
-            <a:off x="5007475" y="4095125"/>
-            <a:ext cx="2429400" cy="831300"/>
+            <a:off x="59500" y="3579200"/>
+            <a:ext cx="2239500" cy="1477500"/>
           </a:xfrm>
           <a:prstGeom prst="rect">
             <a:avLst/>
@@ -14409,16 +14597,25 @@
               <a:buNone/>
             </a:pPr>
             <a:r>
-              <a:rPr b="0" i="0" lang="es-419" sz="1400" u="none" cap="none" strike="noStrike">
-                <a:solidFill>
-                  <a:srgbClr val="000000"/>
-                </a:solidFill>
+              <a:rPr lang="es-419">
                 <a:latin typeface="Lato"/>
                 <a:ea typeface="Lato"/>
                 <a:cs typeface="Lato"/>
                 <a:sym typeface="Lato"/>
               </a:rPr>
-              <a:t>Y después si las usamos para obtener resultados a partir de nuevos datos.</a:t>
+              <a:t>IA: </a:t>
+            </a:r>
+            <a:r>
+              <a:rPr b="0" i="0" lang="es-419" sz="1400" u="none" cap="none" strike="noStrike">
+                <a:solidFill>
+                  <a:srgbClr val="000000"/>
+                </a:solidFill>
+                <a:latin typeface="Lato"/>
+                <a:ea typeface="Lato"/>
+                <a:cs typeface="Lato"/>
+                <a:sym typeface="Lato"/>
+              </a:rPr>
+              <a:t>Es la capacidad de una máquina de ser asociada con el pensamiento humano y emular sus capacidades para resolver problemas y aprender.</a:t>
             </a:r>
             <a:endParaRPr b="0" i="0" sz="1400" u="none" cap="none" strike="noStrike">
               <a:solidFill>
@@ -14458,7 +14655,7 @@
                             </p:stCondLst>
                             <p:childTnLst>
                               <p:par>
-                                <p:cTn fill="hold" nodeType="clickEffect" presetClass="entr" presetID="10" presetSubtype="0">
+                                <p:cTn fill="hold" nodeType="clickEffect" presetClass="entr" presetID="1" presetSubtype="0">
                                   <p:stCondLst>
                                     <p:cond delay="0"/>
                                   </p:stCondLst>
@@ -14471,7 +14668,7 @@
                                           </p:stCondLst>
                                         </p:cTn>
                                         <p:tgtEl>
-                                          <p:spTgt spid="192"/>
+                                          <p:spTgt spid="194"/>
                                         </p:tgtEl>
                                         <p:attrNameLst>
                                           <p:attrName>style.visibility</p:attrName>
@@ -14481,14 +14678,6 @@
                                         <p:strVal val="visible"/>
                                       </p:to>
                                     </p:set>
-                                    <p:animEffect filter="fade" transition="in">
-                                      <p:cBhvr>
-                                        <p:cTn dur="1000"/>
-                                        <p:tgtEl>
-                                          <p:spTgt spid="192"/>
-                                        </p:tgtEl>
-                                      </p:cBhvr>
-                                    </p:animEffect>
                                   </p:childTnLst>
                                 </p:cTn>
                               </p:par>
@@ -14524,42 +14713,7 @@
                                           </p:stCondLst>
                                         </p:cTn>
                                         <p:tgtEl>
-                                          <p:spTgt spid="183"/>
-                                        </p:tgtEl>
-                                        <p:attrNameLst>
-                                          <p:attrName>style.visibility</p:attrName>
-                                        </p:attrNameLst>
-                                      </p:cBhvr>
-                                      <p:to>
-                                        <p:strVal val="visible"/>
-                                      </p:to>
-                                    </p:set>
-                                    <p:animEffect filter="fade" transition="in">
-                                      <p:cBhvr>
-                                        <p:cTn dur="1"/>
-                                        <p:tgtEl>
-                                          <p:spTgt spid="183"/>
-                                        </p:tgtEl>
-                                      </p:cBhvr>
-                                    </p:animEffect>
-                                  </p:childTnLst>
-                                </p:cTn>
-                              </p:par>
-                              <p:par>
-                                <p:cTn fill="hold" nodeType="withEffect" presetClass="entr" presetID="10" presetSubtype="0">
-                                  <p:stCondLst>
-                                    <p:cond delay="0"/>
-                                  </p:stCondLst>
-                                  <p:childTnLst>
-                                    <p:set>
-                                      <p:cBhvr>
-                                        <p:cTn dur="1" fill="hold">
-                                          <p:stCondLst>
-                                            <p:cond delay="0"/>
-                                          </p:stCondLst>
-                                        </p:cTn>
-                                        <p:tgtEl>
-                                          <p:spTgt spid="184"/>
+                                          <p:spTgt spid="178"/>
                                         </p:tgtEl>
                                         <p:attrNameLst>
                                           <p:attrName>style.visibility</p:attrName>
@@ -14573,7 +14727,7 @@
                                       <p:cBhvr>
                                         <p:cTn dur="1000"/>
                                         <p:tgtEl>
-                                          <p:spTgt spid="184"/>
+                                          <p:spTgt spid="178"/>
                                         </p:tgtEl>
                                       </p:cBhvr>
                                     </p:animEffect>
@@ -14581,7 +14735,7 @@
                                 </p:cTn>
                               </p:par>
                               <p:par>
-                                <p:cTn fill="hold" nodeType="withEffect" presetClass="entr" presetID="10" presetSubtype="0">
+                                <p:cTn fill="hold" nodeType="withEffect" presetClass="entr" presetID="1" presetSubtype="0">
                                   <p:stCondLst>
                                     <p:cond delay="0"/>
                                   </p:stCondLst>
@@ -14594,7 +14748,7 @@
                                           </p:stCondLst>
                                         </p:cTn>
                                         <p:tgtEl>
-                                          <p:spTgt spid="189"/>
+                                          <p:spTgt spid="182"/>
                                         </p:tgtEl>
                                         <p:attrNameLst>
                                           <p:attrName>style.visibility</p:attrName>
@@ -14604,84 +14758,6 @@
                                         <p:strVal val="visible"/>
                                       </p:to>
                                     </p:set>
-                                    <p:animEffect filter="fade" transition="in">
-                                      <p:cBhvr>
-                                        <p:cTn dur="1000"/>
-                                        <p:tgtEl>
-                                          <p:spTgt spid="189"/>
-                                        </p:tgtEl>
-                                      </p:cBhvr>
-                                    </p:animEffect>
-                                  </p:childTnLst>
-                                </p:cTn>
-                              </p:par>
-                              <p:par>
-                                <p:cTn fill="hold" nodeType="withEffect" presetClass="entr" presetID="10" presetSubtype="0">
-                                  <p:stCondLst>
-                                    <p:cond delay="0"/>
-                                  </p:stCondLst>
-                                  <p:childTnLst>
-                                    <p:set>
-                                      <p:cBhvr>
-                                        <p:cTn dur="1" fill="hold">
-                                          <p:stCondLst>
-                                            <p:cond delay="0"/>
-                                          </p:stCondLst>
-                                        </p:cTn>
-                                        <p:tgtEl>
-                                          <p:spTgt spid="191"/>
-                                        </p:tgtEl>
-                                        <p:attrNameLst>
-                                          <p:attrName>style.visibility</p:attrName>
-                                        </p:attrNameLst>
-                                      </p:cBhvr>
-                                      <p:to>
-                                        <p:strVal val="visible"/>
-                                      </p:to>
-                                    </p:set>
-                                    <p:animEffect filter="fade" transition="in">
-                                      <p:cBhvr>
-                                        <p:cTn dur="1000"/>
-                                        <p:tgtEl>
-                                          <p:spTgt spid="191"/>
-                                        </p:tgtEl>
-                                      </p:cBhvr>
-                                    </p:animEffect>
-                                  </p:childTnLst>
-                                </p:cTn>
-                              </p:par>
-                              <p:par>
-                                <p:cTn fill="hold" nodeType="withEffect" presetClass="entr" presetID="10" presetSubtype="0">
-                                  <p:stCondLst>
-                                    <p:cond delay="0"/>
-                                  </p:stCondLst>
-                                  <p:childTnLst>
-                                    <p:set>
-                                      <p:cBhvr>
-                                        <p:cTn dur="1" fill="hold">
-                                          <p:stCondLst>
-                                            <p:cond delay="0"/>
-                                          </p:stCondLst>
-                                        </p:cTn>
-                                        <p:tgtEl>
-                                          <p:spTgt spid="185"/>
-                                        </p:tgtEl>
-                                        <p:attrNameLst>
-                                          <p:attrName>style.visibility</p:attrName>
-                                        </p:attrNameLst>
-                                      </p:cBhvr>
-                                      <p:to>
-                                        <p:strVal val="visible"/>
-                                      </p:to>
-                                    </p:set>
-                                    <p:animEffect filter="fade" transition="in">
-                                      <p:cBhvr>
-                                        <p:cTn dur="1000"/>
-                                        <p:tgtEl>
-                                          <p:spTgt spid="185"/>
-                                        </p:tgtEl>
-                                      </p:cBhvr>
-                                    </p:animEffect>
                                   </p:childTnLst>
                                 </p:cTn>
                               </p:par>
@@ -14717,7 +14793,7 @@
                                           </p:stCondLst>
                                         </p:cTn>
                                         <p:tgtEl>
-                                          <p:spTgt spid="193"/>
+                                          <p:spTgt spid="179"/>
                                         </p:tgtEl>
                                         <p:attrNameLst>
                                           <p:attrName>style.visibility</p:attrName>
@@ -14731,10 +14807,197 @@
                                       <p:cBhvr>
                                         <p:cTn dur="1000"/>
                                         <p:tgtEl>
-                                          <p:spTgt spid="193"/>
+                                          <p:spTgt spid="179"/>
                                         </p:tgtEl>
                                       </p:cBhvr>
                                     </p:animEffect>
+                                  </p:childTnLst>
+                                </p:cTn>
+                              </p:par>
+                              <p:par>
+                                <p:cTn fill="hold" nodeType="withEffect" presetClass="entr" presetID="1" presetSubtype="0">
+                                  <p:stCondLst>
+                                    <p:cond delay="0"/>
+                                  </p:stCondLst>
+                                  <p:childTnLst>
+                                    <p:set>
+                                      <p:cBhvr>
+                                        <p:cTn dur="1" fill="hold">
+                                          <p:stCondLst>
+                                            <p:cond delay="0"/>
+                                          </p:stCondLst>
+                                        </p:cTn>
+                                        <p:tgtEl>
+                                          <p:spTgt spid="183"/>
+                                        </p:tgtEl>
+                                        <p:attrNameLst>
+                                          <p:attrName>style.visibility</p:attrName>
+                                        </p:attrNameLst>
+                                      </p:cBhvr>
+                                      <p:to>
+                                        <p:strVal val="visible"/>
+                                      </p:to>
+                                    </p:set>
+                                  </p:childTnLst>
+                                </p:cTn>
+                              </p:par>
+                            </p:childTnLst>
+                          </p:cTn>
+                        </p:par>
+                      </p:childTnLst>
+                    </p:cTn>
+                  </p:par>
+                  <p:par>
+                    <p:cTn fill="hold">
+                      <p:stCondLst>
+                        <p:cond delay="indefinite"/>
+                      </p:stCondLst>
+                      <p:childTnLst>
+                        <p:par>
+                          <p:cTn fill="hold">
+                            <p:stCondLst>
+                              <p:cond delay="0"/>
+                            </p:stCondLst>
+                            <p:childTnLst>
+                              <p:par>
+                                <p:cTn fill="hold" nodeType="clickEffect" presetClass="entr" presetID="10" presetSubtype="0">
+                                  <p:stCondLst>
+                                    <p:cond delay="0"/>
+                                  </p:stCondLst>
+                                  <p:childTnLst>
+                                    <p:set>
+                                      <p:cBhvr>
+                                        <p:cTn dur="1" fill="hold">
+                                          <p:stCondLst>
+                                            <p:cond delay="0"/>
+                                          </p:stCondLst>
+                                        </p:cTn>
+                                        <p:tgtEl>
+                                          <p:spTgt spid="180"/>
+                                        </p:tgtEl>
+                                        <p:attrNameLst>
+                                          <p:attrName>style.visibility</p:attrName>
+                                        </p:attrNameLst>
+                                      </p:cBhvr>
+                                      <p:to>
+                                        <p:strVal val="visible"/>
+                                      </p:to>
+                                    </p:set>
+                                    <p:animEffect filter="fade" transition="in">
+                                      <p:cBhvr>
+                                        <p:cTn dur="1000"/>
+                                        <p:tgtEl>
+                                          <p:spTgt spid="180"/>
+                                        </p:tgtEl>
+                                      </p:cBhvr>
+                                    </p:animEffect>
+                                  </p:childTnLst>
+                                </p:cTn>
+                              </p:par>
+                              <p:par>
+                                <p:cTn fill="hold" nodeType="withEffect" presetClass="entr" presetID="1" presetSubtype="0">
+                                  <p:stCondLst>
+                                    <p:cond delay="0"/>
+                                  </p:stCondLst>
+                                  <p:childTnLst>
+                                    <p:set>
+                                      <p:cBhvr>
+                                        <p:cTn dur="1" fill="hold">
+                                          <p:stCondLst>
+                                            <p:cond delay="0"/>
+                                          </p:stCondLst>
+                                        </p:cTn>
+                                        <p:tgtEl>
+                                          <p:spTgt spid="184"/>
+                                        </p:tgtEl>
+                                        <p:attrNameLst>
+                                          <p:attrName>style.visibility</p:attrName>
+                                        </p:attrNameLst>
+                                      </p:cBhvr>
+                                      <p:to>
+                                        <p:strVal val="visible"/>
+                                      </p:to>
+                                    </p:set>
+                                  </p:childTnLst>
+                                </p:cTn>
+                              </p:par>
+                            </p:childTnLst>
+                          </p:cTn>
+                        </p:par>
+                      </p:childTnLst>
+                    </p:cTn>
+                  </p:par>
+                  <p:par>
+                    <p:cTn fill="hold">
+                      <p:stCondLst>
+                        <p:cond delay="indefinite"/>
+                      </p:stCondLst>
+                      <p:childTnLst>
+                        <p:par>
+                          <p:cTn fill="hold">
+                            <p:stCondLst>
+                              <p:cond delay="0"/>
+                            </p:stCondLst>
+                            <p:childTnLst>
+                              <p:par>
+                                <p:cTn fill="hold" nodeType="clickEffect" presetClass="entr" presetID="10" presetSubtype="0">
+                                  <p:stCondLst>
+                                    <p:cond delay="0"/>
+                                  </p:stCondLst>
+                                  <p:childTnLst>
+                                    <p:set>
+                                      <p:cBhvr>
+                                        <p:cTn dur="1" fill="hold">
+                                          <p:stCondLst>
+                                            <p:cond delay="0"/>
+                                          </p:stCondLst>
+                                        </p:cTn>
+                                        <p:tgtEl>
+                                          <p:spTgt spid="181"/>
+                                        </p:tgtEl>
+                                        <p:attrNameLst>
+                                          <p:attrName>style.visibility</p:attrName>
+                                        </p:attrNameLst>
+                                      </p:cBhvr>
+                                      <p:to>
+                                        <p:strVal val="visible"/>
+                                      </p:to>
+                                    </p:set>
+                                    <p:animEffect filter="fade" transition="in">
+                                      <p:cBhvr>
+                                        <p:cTn dur="1000"/>
+                                        <p:tgtEl>
+                                          <p:spTgt spid="181"/>
+                                        </p:tgtEl>
+                                      </p:cBhvr>
+                                    </p:animEffect>
+                                  </p:childTnLst>
+                                </p:cTn>
+                              </p:par>
+                              <p:par>
+                                <p:cTn fill="hold" nodeType="withEffect" presetClass="entr" presetID="1" presetSubtype="0">
+                                  <p:stCondLst>
+                                    <p:cond delay="0"/>
+                                  </p:stCondLst>
+                                  <p:childTnLst>
+                                    <p:set>
+                                      <p:cBhvr>
+                                        <p:cTn dur="1" fill="hold">
+                                          <p:stCondLst>
+                                            <p:cond delay="0"/>
+                                          </p:stCondLst>
+                                        </p:cTn>
+                                        <p:tgtEl>
+                                          <p:spTgt spid="185"/>
+                                        </p:tgtEl>
+                                        <p:attrNameLst>
+                                          <p:attrName>style.visibility</p:attrName>
+                                        </p:attrNameLst>
+                                      </p:cBhvr>
+                                      <p:to>
+                                        <p:strVal val="visible"/>
+                                      </p:to>
+                                    </p:set>
                                   </p:childTnLst>
                                 </p:cTn>
                               </p:par>
@@ -14792,77 +15055,7 @@
                                 </p:cTn>
                               </p:par>
                               <p:par>
-                                <p:cTn fill="hold" nodeType="withEffect" presetClass="entr" presetID="10" presetSubtype="0">
-                                  <p:stCondLst>
-                                    <p:cond delay="0"/>
-                                  </p:stCondLst>
-                                  <p:childTnLst>
-                                    <p:set>
-                                      <p:cBhvr>
-                                        <p:cTn dur="1" fill="hold">
-                                          <p:stCondLst>
-                                            <p:cond delay="0"/>
-                                          </p:stCondLst>
-                                        </p:cTn>
-                                        <p:tgtEl>
-                                          <p:spTgt spid="187"/>
-                                        </p:tgtEl>
-                                        <p:attrNameLst>
-                                          <p:attrName>style.visibility</p:attrName>
-                                        </p:attrNameLst>
-                                      </p:cBhvr>
-                                      <p:to>
-                                        <p:strVal val="visible"/>
-                                      </p:to>
-                                    </p:set>
-                                    <p:animEffect filter="fade" transition="in">
-                                      <p:cBhvr>
-                                        <p:cTn dur="1000"/>
-                                        <p:tgtEl>
-                                          <p:spTgt spid="187"/>
-                                        </p:tgtEl>
-                                      </p:cBhvr>
-                                    </p:animEffect>
-                                  </p:childTnLst>
-                                </p:cTn>
-                              </p:par>
-                              <p:par>
-                                <p:cTn fill="hold" nodeType="withEffect" presetClass="entr" presetID="10" presetSubtype="0">
-                                  <p:stCondLst>
-                                    <p:cond delay="0"/>
-                                  </p:stCondLst>
-                                  <p:childTnLst>
-                                    <p:set>
-                                      <p:cBhvr>
-                                        <p:cTn dur="1" fill="hold">
-                                          <p:stCondLst>
-                                            <p:cond delay="0"/>
-                                          </p:stCondLst>
-                                        </p:cTn>
-                                        <p:tgtEl>
-                                          <p:spTgt spid="188"/>
-                                        </p:tgtEl>
-                                        <p:attrNameLst>
-                                          <p:attrName>style.visibility</p:attrName>
-                                        </p:attrNameLst>
-                                      </p:cBhvr>
-                                      <p:to>
-                                        <p:strVal val="visible"/>
-                                      </p:to>
-                                    </p:set>
-                                    <p:animEffect filter="fade" transition="in">
-                                      <p:cBhvr>
-                                        <p:cTn dur="1000"/>
-                                        <p:tgtEl>
-                                          <p:spTgt spid="188"/>
-                                        </p:tgtEl>
-                                      </p:cBhvr>
-                                    </p:animEffect>
-                                  </p:childTnLst>
-                                </p:cTn>
-                              </p:par>
-                              <p:par>
-                                <p:cTn fill="hold" nodeType="withEffect" presetClass="entr" presetID="10" presetSubtype="0">
+                                <p:cTn fill="hold" nodeType="withEffect" presetClass="entr" presetID="1" presetSubtype="0">
                                   <p:stCondLst>
                                     <p:cond delay="0"/>
                                   </p:stCondLst>
@@ -14885,49 +15078,6 @@
                                         <p:strVal val="visible"/>
                                       </p:to>
                                     </p:set>
-                                    <p:animEffect filter="fade" transition="in">
-                                      <p:cBhvr>
-                                        <p:cTn dur="1000"/>
-                                        <p:tgtEl>
-                                          <p:spTgt spid="190"/>
-                                        </p:tgtEl>
-                                      </p:cBhvr>
-                                    </p:animEffect>
-                                  </p:childTnLst>
-                                </p:cTn>
-                              </p:par>
-                              <p:par>
-                                <p:cTn fill="hold" nodeType="withEffect" presetClass="entr" presetID="10" presetSubtype="0">
-                                  <p:stCondLst>
-                                    <p:cond delay="0"/>
-                                  </p:stCondLst>
-                                  <p:childTnLst>
-                                    <p:set>
-                                      <p:cBhvr>
-                                        <p:cTn dur="1" fill="hold">
-                                          <p:stCondLst>
-                                            <p:cond delay="0"/>
-                                          </p:stCondLst>
-                                        </p:cTn>
-                                        <p:tgtEl>
-                                          <p:spTgt spid="194"/>
-                                        </p:tgtEl>
-                                        <p:attrNameLst>
-                                          <p:attrName>style.visibility</p:attrName>
-                                        </p:attrNameLst>
-                                      </p:cBhvr>
-                                      <p:to>
-                                        <p:strVal val="visible"/>
-                                      </p:to>
-                                    </p:set>
-                                    <p:animEffect filter="fade" transition="in">
-                                      <p:cBhvr>
-                                        <p:cTn dur="1000"/>
-                                        <p:tgtEl>
-                                          <p:spTgt spid="194"/>
-                                        </p:tgtEl>
-                                      </p:cBhvr>
-                                    </p:animEffect>
                                   </p:childTnLst>
                                 </p:cTn>
                               </p:par>
@@ -14963,7 +15113,7 @@
                                           </p:stCondLst>
                                         </p:cTn>
                                         <p:tgtEl>
-                                          <p:spTgt spid="195"/>
+                                          <p:spTgt spid="188"/>
                                         </p:tgtEl>
                                         <p:attrNameLst>
                                           <p:attrName>style.visibility</p:attrName>
@@ -14975,12 +15125,39 @@
                                     </p:set>
                                     <p:animEffect filter="fade" transition="in">
                                       <p:cBhvr>
-                                        <p:cTn dur="1"/>
+                                        <p:cTn dur="1000"/>
                                         <p:tgtEl>
-                                          <p:spTgt spid="195"/>
+                                          <p:spTgt spid="188"/>
                                         </p:tgtEl>
                                       </p:cBhvr>
                                     </p:animEffect>
+                                  </p:childTnLst>
+                                </p:cTn>
+                              </p:par>
+                              <p:par>
+                                <p:cTn fill="hold" nodeType="withEffect" presetClass="entr" presetID="1" presetSubtype="0">
+                                  <p:stCondLst>
+                                    <p:cond delay="0"/>
+                                  </p:stCondLst>
+                                  <p:childTnLst>
+                                    <p:set>
+                                      <p:cBhvr>
+                                        <p:cTn dur="1" fill="hold">
+                                          <p:stCondLst>
+                                            <p:cond delay="0"/>
+                                          </p:stCondLst>
+                                        </p:cTn>
+                                        <p:tgtEl>
+                                          <p:spTgt spid="191"/>
+                                        </p:tgtEl>
+                                        <p:attrNameLst>
+                                          <p:attrName>style.visibility</p:attrName>
+                                        </p:attrNameLst>
+                                      </p:cBhvr>
+                                      <p:to>
+                                        <p:strVal val="visible"/>
+                                      </p:to>
+                                    </p:set>
                                   </p:childTnLst>
                                 </p:cTn>
                               </p:par>
@@ -14990,151 +15167,6 @@
                       </p:childTnLst>
                     </p:cTn>
                   </p:par>
-                </p:childTnLst>
-              </p:cTn>
-              <p:prevCondLst>
-                <p:cond evt="onPrev">
-                  <p:tgtEl>
-                    <p:sldTgt/>
-                  </p:tgtEl>
-                </p:cond>
-              </p:prevCondLst>
-              <p:nextCondLst>
-                <p:cond evt="onNext">
-                  <p:tgtEl>
-                    <p:sldTgt/>
-                  </p:tgtEl>
-                </p:cond>
-              </p:nextCondLst>
-            </p:seq>
-          </p:childTnLst>
-        </p:cTn>
-      </p:par>
-    </p:tnLst>
-  </p:timing>
-</p:sld>
-</file>
-
-<file path=ppt/slides/slide11.xml><?xml version="1.0" encoding="utf-8"?>
-<p:sld xmlns:a="http://schemas.openxmlformats.org/drawingml/2006/main" xmlns:r="http://schemas.openxmlformats.org/officeDocument/2006/relationships" xmlns:mc="http://schemas.openxmlformats.org/markup-compatibility/2006" xmlns:mv="urn:schemas-microsoft-com:mac:vml" xmlns:p="http://schemas.openxmlformats.org/presentationml/2006/main" xmlns:c="http://schemas.openxmlformats.org/drawingml/2006/chart" xmlns:dgm="http://schemas.openxmlformats.org/drawingml/2006/diagram" xmlns:o="urn:schemas-microsoft-com:office:office" xmlns:v="urn:schemas-microsoft-com:vml" xmlns:pvml="urn:schemas-microsoft-com:office:powerpoint" xmlns:com="http://schemas.openxmlformats.org/drawingml/2006/compatibility" xmlns:p14="http://schemas.microsoft.com/office/powerpoint/2010/main" xmlns:p15="http://schemas.microsoft.com/office/powerpoint/2012/main" xmlns:ahyp="http://schemas.microsoft.com/office/drawing/2018/hyperlinkcolor">
-  <p:cSld>
-    <p:spTree>
-      <p:nvGrpSpPr>
-        <p:cNvPr id="199" name="Shape 199"/>
-        <p:cNvGrpSpPr/>
-        <p:nvPr/>
-      </p:nvGrpSpPr>
-      <p:grpSpPr>
-        <a:xfrm>
-          <a:off x="0" y="0"/>
-          <a:ext cx="0" cy="0"/>
-          <a:chOff x="0" y="0"/>
-          <a:chExt cx="0" cy="0"/>
-        </a:xfrm>
-      </p:grpSpPr>
-      <p:pic>
-        <p:nvPicPr>
-          <p:cNvPr id="200" name="Google Shape;200;p11"/>
-          <p:cNvPicPr preferRelativeResize="0"/>
-          <p:nvPr/>
-        </p:nvPicPr>
-        <p:blipFill rotWithShape="1">
-          <a:blip r:embed="rId3">
-            <a:alphaModFix/>
-          </a:blip>
-          <a:srcRect b="0" l="0" r="0" t="0"/>
-          <a:stretch/>
-        </p:blipFill>
-        <p:spPr>
-          <a:xfrm>
-            <a:off x="1543050" y="917175"/>
-            <a:ext cx="6057900" cy="3943350"/>
-          </a:xfrm>
-          <a:prstGeom prst="rect">
-            <a:avLst/>
-          </a:prstGeom>
-          <a:noFill/>
-          <a:ln>
-            <a:noFill/>
-          </a:ln>
-        </p:spPr>
-      </p:pic>
-      <p:sp>
-        <p:nvSpPr>
-          <p:cNvPr id="201" name="Google Shape;201;p11"/>
-          <p:cNvSpPr/>
-          <p:nvPr/>
-        </p:nvSpPr>
-        <p:spPr>
-          <a:xfrm>
-            <a:off x="3606450" y="3756400"/>
-            <a:ext cx="2211900" cy="1004700"/>
-          </a:xfrm>
-          <a:prstGeom prst="rect">
-            <a:avLst/>
-          </a:prstGeom>
-          <a:noFill/>
-          <a:ln cap="flat" cmpd="sng" w="38100">
-            <a:solidFill>
-              <a:srgbClr val="00FF00"/>
-            </a:solidFill>
-            <a:prstDash val="solid"/>
-            <a:round/>
-            <a:headEnd len="sm" w="sm" type="none"/>
-            <a:tailEnd len="sm" w="sm" type="none"/>
-          </a:ln>
-        </p:spPr>
-        <p:txBody>
-          <a:bodyPr anchorCtr="0" anchor="ctr" bIns="91425" lIns="91425" spcFirstLastPara="1" rIns="91425" wrap="square" tIns="91425">
-            <a:noAutofit/>
-          </a:bodyPr>
-          <a:lstStyle/>
-          <a:p>
-            <a:pPr indent="0" lvl="0" marL="0" marR="0" rtl="0" algn="ctr">
-              <a:lnSpc>
-                <a:spcPct val="100000"/>
-              </a:lnSpc>
-              <a:spcBef>
-                <a:spcPts val="0"/>
-              </a:spcBef>
-              <a:spcAft>
-                <a:spcPts val="0"/>
-              </a:spcAft>
-              <a:buClr>
-                <a:srgbClr val="000000"/>
-              </a:buClr>
-              <a:buSzPts val="1400"/>
-              <a:buFont typeface="Arial"/>
-              <a:buNone/>
-            </a:pPr>
-            <a:r>
-              <a:t/>
-            </a:r>
-            <a:endParaRPr b="0" i="0" sz="1400" u="none" cap="none" strike="noStrike">
-              <a:solidFill>
-                <a:srgbClr val="000000"/>
-              </a:solidFill>
-              <a:latin typeface="Lato"/>
-              <a:ea typeface="Lato"/>
-              <a:cs typeface="Lato"/>
-              <a:sym typeface="Lato"/>
-            </a:endParaRPr>
-          </a:p>
-        </p:txBody>
-      </p:sp>
-    </p:spTree>
-  </p:cSld>
-  <p:clrMapOvr>
-    <a:masterClrMapping/>
-  </p:clrMapOvr>
-  <p:timing>
-    <p:tnLst>
-      <p:par>
-        <p:cTn dur="indefinite" nodeType="tmRoot" restart="never">
-          <p:childTnLst>
-            <p:seq concurrent="1" nextAc="seek">
-              <p:cTn dur="indefinite" id="2" nodeType="mainSeq">
-                <p:childTnLst>
                   <p:par>
                     <p:cTn fill="hold">
                       <p:stCondLst>
@@ -15148,7 +15180,7 @@
                             </p:stCondLst>
                             <p:childTnLst>
                               <p:par>
-                                <p:cTn fill="hold" nodeType="clickEffect" presetClass="entr" presetID="1" presetSubtype="0">
+                                <p:cTn fill="hold" nodeType="clickEffect" presetClass="entr" presetID="10" presetSubtype="0">
                                   <p:stCondLst>
                                     <p:cond delay="0"/>
                                   </p:stCondLst>
@@ -15161,7 +15193,122 @@
                                           </p:stCondLst>
                                         </p:cTn>
                                         <p:tgtEl>
-                                          <p:spTgt spid="201"/>
+                                          <p:spTgt spid="187"/>
+                                        </p:tgtEl>
+                                        <p:attrNameLst>
+                                          <p:attrName>style.visibility</p:attrName>
+                                        </p:attrNameLst>
+                                      </p:cBhvr>
+                                      <p:to>
+                                        <p:strVal val="visible"/>
+                                      </p:to>
+                                    </p:set>
+                                    <p:animEffect filter="fade" transition="in">
+                                      <p:cBhvr>
+                                        <p:cTn dur="1000"/>
+                                        <p:tgtEl>
+                                          <p:spTgt spid="187"/>
+                                        </p:tgtEl>
+                                      </p:cBhvr>
+                                    </p:animEffect>
+                                  </p:childTnLst>
+                                </p:cTn>
+                              </p:par>
+                              <p:par>
+                                <p:cTn fill="hold" nodeType="withEffect" presetClass="entr" presetID="1" presetSubtype="0">
+                                  <p:stCondLst>
+                                    <p:cond delay="0"/>
+                                  </p:stCondLst>
+                                  <p:childTnLst>
+                                    <p:set>
+                                      <p:cBhvr>
+                                        <p:cTn dur="1" fill="hold">
+                                          <p:stCondLst>
+                                            <p:cond delay="0"/>
+                                          </p:stCondLst>
+                                        </p:cTn>
+                                        <p:tgtEl>
+                                          <p:spTgt spid="192"/>
+                                        </p:tgtEl>
+                                        <p:attrNameLst>
+                                          <p:attrName>style.visibility</p:attrName>
+                                        </p:attrNameLst>
+                                      </p:cBhvr>
+                                      <p:to>
+                                        <p:strVal val="visible"/>
+                                      </p:to>
+                                    </p:set>
+                                  </p:childTnLst>
+                                </p:cTn>
+                              </p:par>
+                            </p:childTnLst>
+                          </p:cTn>
+                        </p:par>
+                      </p:childTnLst>
+                    </p:cTn>
+                  </p:par>
+                  <p:par>
+                    <p:cTn fill="hold">
+                      <p:stCondLst>
+                        <p:cond delay="indefinite"/>
+                      </p:stCondLst>
+                      <p:childTnLst>
+                        <p:par>
+                          <p:cTn fill="hold">
+                            <p:stCondLst>
+                              <p:cond delay="0"/>
+                            </p:stCondLst>
+                            <p:childTnLst>
+                              <p:par>
+                                <p:cTn fill="hold" nodeType="clickEffect" presetClass="entr" presetID="10" presetSubtype="0">
+                                  <p:stCondLst>
+                                    <p:cond delay="0"/>
+                                  </p:stCondLst>
+                                  <p:childTnLst>
+                                    <p:set>
+                                      <p:cBhvr>
+                                        <p:cTn dur="1" fill="hold">
+                                          <p:stCondLst>
+                                            <p:cond delay="0"/>
+                                          </p:stCondLst>
+                                        </p:cTn>
+                                        <p:tgtEl>
+                                          <p:spTgt spid="189"/>
+                                        </p:tgtEl>
+                                        <p:attrNameLst>
+                                          <p:attrName>style.visibility</p:attrName>
+                                        </p:attrNameLst>
+                                      </p:cBhvr>
+                                      <p:to>
+                                        <p:strVal val="visible"/>
+                                      </p:to>
+                                    </p:set>
+                                    <p:animEffect filter="fade" transition="in">
+                                      <p:cBhvr>
+                                        <p:cTn dur="1000"/>
+                                        <p:tgtEl>
+                                          <p:spTgt spid="189"/>
+                                        </p:tgtEl>
+                                      </p:cBhvr>
+                                    </p:animEffect>
+                                  </p:childTnLst>
+                                </p:cTn>
+                              </p:par>
+                              <p:par>
+                                <p:cTn fill="hold" nodeType="withEffect" presetClass="entr" presetID="1" presetSubtype="0">
+                                  <p:stCondLst>
+                                    <p:cond delay="0"/>
+                                  </p:stCondLst>
+                                  <p:childTnLst>
+                                    <p:set>
+                                      <p:cBhvr>
+                                        <p:cTn dur="1" fill="hold">
+                                          <p:stCondLst>
+                                            <p:cond delay="0"/>
+                                          </p:stCondLst>
+                                        </p:cTn>
+                                        <p:tgtEl>
+                                          <p:spTgt spid="193"/>
                                         </p:tgtEl>
                                         <p:attrNameLst>
                                           <p:attrName>style.visibility</p:attrName>
@@ -15205,12 +15352,65 @@
 </p:sld>
 </file>
 
+<file path=ppt/slides/slide11.xml><?xml version="1.0" encoding="utf-8"?>
+<p:sld xmlns:a="http://schemas.openxmlformats.org/drawingml/2006/main" xmlns:r="http://schemas.openxmlformats.org/officeDocument/2006/relationships" xmlns:mc="http://schemas.openxmlformats.org/markup-compatibility/2006" xmlns:mv="urn:schemas-microsoft-com:mac:vml" xmlns:p="http://schemas.openxmlformats.org/presentationml/2006/main" xmlns:c="http://schemas.openxmlformats.org/drawingml/2006/chart" xmlns:dgm="http://schemas.openxmlformats.org/drawingml/2006/diagram" xmlns:o="urn:schemas-microsoft-com:office:office" xmlns:v="urn:schemas-microsoft-com:vml" xmlns:pvml="urn:schemas-microsoft-com:office:powerpoint" xmlns:com="http://schemas.openxmlformats.org/drawingml/2006/compatibility" xmlns:p14="http://schemas.microsoft.com/office/powerpoint/2010/main" xmlns:p15="http://schemas.microsoft.com/office/powerpoint/2012/main" xmlns:ahyp="http://schemas.microsoft.com/office/drawing/2018/hyperlinkcolor">
+  <p:cSld>
+    <p:spTree>
+      <p:nvGrpSpPr>
+        <p:cNvPr id="198" name="Shape 198"/>
+        <p:cNvGrpSpPr/>
+        <p:nvPr/>
+      </p:nvGrpSpPr>
+      <p:grpSpPr>
+        <a:xfrm>
+          <a:off x="0" y="0"/>
+          <a:ext cx="0" cy="0"/>
+          <a:chOff x="0" y="0"/>
+          <a:chExt cx="0" cy="0"/>
+        </a:xfrm>
+      </p:grpSpPr>
+      <p:pic>
+        <p:nvPicPr>
+          <p:cNvPr id="199" name="Google Shape;199;g3f77e98ea1e_1_2"/>
+          <p:cNvPicPr preferRelativeResize="0"/>
+          <p:nvPr/>
+        </p:nvPicPr>
+        <p:blipFill>
+          <a:blip r:embed="rId3">
+            <a:alphaModFix/>
+          </a:blip>
+          <a:stretch>
+            <a:fillRect/>
+          </a:stretch>
+        </p:blipFill>
+        <p:spPr>
+          <a:xfrm>
+            <a:off x="2092613" y="1015563"/>
+            <a:ext cx="4958776" cy="3558925"/>
+          </a:xfrm>
+          <a:prstGeom prst="rect">
+            <a:avLst/>
+          </a:prstGeom>
+          <a:noFill/>
+          <a:ln>
+            <a:noFill/>
+          </a:ln>
+        </p:spPr>
+      </p:pic>
+    </p:spTree>
+  </p:cSld>
+  <p:clrMapOvr>
+    <a:masterClrMapping/>
+  </p:clrMapOvr>
+</p:sld>
+</file>
+
 <file path=ppt/slides/slide12.xml><?xml version="1.0" encoding="utf-8"?>
 <p:sld xmlns:a="http://schemas.openxmlformats.org/drawingml/2006/main" xmlns:r="http://schemas.openxmlformats.org/officeDocument/2006/relationships" xmlns:mc="http://schemas.openxmlformats.org/markup-compatibility/2006" xmlns:mv="urn:schemas-microsoft-com:mac:vml" xmlns:p="http://schemas.openxmlformats.org/presentationml/2006/main" xmlns:c="http://schemas.openxmlformats.org/drawingml/2006/chart" xmlns:dgm="http://schemas.openxmlformats.org/drawingml/2006/diagram" xmlns:o="urn:schemas-microsoft-com:office:office" xmlns:v="urn:schemas-microsoft-com:vml" xmlns:pvml="urn:schemas-microsoft-com:office:powerpoint" xmlns:com="http://schemas.openxmlformats.org/drawingml/2006/compatibility" xmlns:p14="http://schemas.microsoft.com/office/powerpoint/2010/main" xmlns:p15="http://schemas.microsoft.com/office/powerpoint/2012/main" xmlns:ahyp="http://schemas.microsoft.com/office/drawing/2018/hyperlinkcolor">
   <p:cSld>
     <p:spTree>
       <p:nvGrpSpPr>
-        <p:cNvPr id="205" name="Shape 205"/>
+        <p:cNvPr id="203" name="Shape 203"/>
         <p:cNvGrpSpPr/>
         <p:nvPr/>
       </p:nvGrpSpPr>
@@ -15224,7 +15424,7 @@
       </p:grpSpPr>
       <p:sp>
         <p:nvSpPr>
-          <p:cNvPr id="206" name="Google Shape;206;p12"/>
+          <p:cNvPr id="204" name="Google Shape;204;p12"/>
           <p:cNvSpPr txBox="1"/>
           <p:nvPr>
             <p:ph type="title"/>
@@ -15322,7 +15522,7 @@
   <p:cSld>
     <p:spTree>
       <p:nvGrpSpPr>
-        <p:cNvPr id="210" name="Shape 210"/>
+        <p:cNvPr id="208" name="Shape 208"/>
         <p:cNvGrpSpPr/>
         <p:nvPr/>
       </p:nvGrpSpPr>
@@ -15336,7 +15536,7 @@
       </p:grpSpPr>
       <p:sp>
         <p:nvSpPr>
-          <p:cNvPr id="211" name="Google Shape;211;p13"/>
+          <p:cNvPr id="209" name="Google Shape;209;p13"/>
           <p:cNvSpPr txBox="1"/>
           <p:nvPr>
             <p:ph type="title"/>
@@ -15384,7 +15584,7 @@
       </p:sp>
       <p:sp>
         <p:nvSpPr>
-          <p:cNvPr id="212" name="Google Shape;212;p13"/>
+          <p:cNvPr id="210" name="Google Shape;210;p13"/>
           <p:cNvSpPr txBox="1"/>
           <p:nvPr>
             <p:ph idx="2" type="body"/>
@@ -15503,7 +15703,7 @@
       </p:sp>
       <p:pic>
         <p:nvPicPr>
-          <p:cNvPr id="213" name="Google Shape;213;p13"/>
+          <p:cNvPr id="211" name="Google Shape;211;p13"/>
           <p:cNvPicPr preferRelativeResize="0"/>
           <p:nvPr/>
         </p:nvPicPr>
@@ -15541,7 +15741,7 @@
   <p:cSld>
     <p:spTree>
       <p:nvGrpSpPr>
-        <p:cNvPr id="217" name="Shape 217"/>
+        <p:cNvPr id="215" name="Shape 215"/>
         <p:cNvGrpSpPr/>
         <p:nvPr/>
       </p:nvGrpSpPr>
@@ -15555,7 +15755,7 @@
       </p:grpSpPr>
       <p:sp>
         <p:nvSpPr>
-          <p:cNvPr id="218" name="Google Shape;218;p14"/>
+          <p:cNvPr id="216" name="Google Shape;216;p14"/>
           <p:cNvSpPr txBox="1"/>
           <p:nvPr>
             <p:ph type="title"/>
@@ -15603,7 +15803,7 @@
       </p:sp>
       <p:sp>
         <p:nvSpPr>
-          <p:cNvPr id="219" name="Google Shape;219;p14"/>
+          <p:cNvPr id="217" name="Google Shape;217;p14"/>
           <p:cNvSpPr txBox="1"/>
           <p:nvPr>
             <p:ph idx="2" type="body"/>
@@ -15784,7 +15984,7 @@
       </p:sp>
       <p:pic>
         <p:nvPicPr>
-          <p:cNvPr id="220" name="Google Shape;220;p14"/>
+          <p:cNvPr id="218" name="Google Shape;218;p14"/>
           <p:cNvPicPr preferRelativeResize="0"/>
           <p:nvPr/>
         </p:nvPicPr>
@@ -15811,7 +16011,7 @@
       </p:pic>
       <p:pic>
         <p:nvPicPr>
-          <p:cNvPr id="221" name="Google Shape;221;p14"/>
+          <p:cNvPr id="219" name="Google Shape;219;p14"/>
           <p:cNvPicPr preferRelativeResize="0"/>
           <p:nvPr/>
         </p:nvPicPr>
@@ -15849,7 +16049,7 @@
   <p:cSld>
     <p:spTree>
       <p:nvGrpSpPr>
-        <p:cNvPr id="225" name="Shape 225"/>
+        <p:cNvPr id="223" name="Shape 223"/>
         <p:cNvGrpSpPr/>
         <p:nvPr/>
       </p:nvGrpSpPr>
@@ -15863,7 +16063,7 @@
       </p:grpSpPr>
       <p:sp>
         <p:nvSpPr>
-          <p:cNvPr id="226" name="Google Shape;226;p15"/>
+          <p:cNvPr id="224" name="Google Shape;224;p15"/>
           <p:cNvSpPr txBox="1"/>
           <p:nvPr>
             <p:ph type="title"/>
@@ -15911,7 +16111,7 @@
       </p:sp>
       <p:sp>
         <p:nvSpPr>
-          <p:cNvPr id="227" name="Google Shape;227;p15"/>
+          <p:cNvPr id="225" name="Google Shape;225;p15"/>
           <p:cNvSpPr txBox="1"/>
           <p:nvPr>
             <p:ph idx="2" type="body"/>
@@ -16069,7 +16269,7 @@
       </p:sp>
       <p:pic>
         <p:nvPicPr>
-          <p:cNvPr id="228" name="Google Shape;228;p15">
+          <p:cNvPr id="226" name="Google Shape;226;p15">
             <a:hlinkClick r:id="rId3"/>
           </p:cNvPr>
           <p:cNvPicPr preferRelativeResize="0"/>
@@ -16098,7 +16298,7 @@
       </p:pic>
       <p:pic>
         <p:nvPicPr>
-          <p:cNvPr id="229" name="Google Shape;229;p15"/>
+          <p:cNvPr id="227" name="Google Shape;227;p15"/>
           <p:cNvPicPr preferRelativeResize="0"/>
           <p:nvPr/>
         </p:nvPicPr>
@@ -16136,7 +16336,7 @@
   <p:cSld>
     <p:spTree>
       <p:nvGrpSpPr>
-        <p:cNvPr id="233" name="Shape 233"/>
+        <p:cNvPr id="231" name="Shape 231"/>
         <p:cNvGrpSpPr/>
         <p:nvPr/>
       </p:nvGrpSpPr>
@@ -16150,7 +16350,7 @@
       </p:grpSpPr>
       <p:sp>
         <p:nvSpPr>
-          <p:cNvPr id="234" name="Google Shape;234;p16"/>
+          <p:cNvPr id="232" name="Google Shape;232;p16"/>
           <p:cNvSpPr txBox="1"/>
           <p:nvPr>
             <p:ph type="title"/>
@@ -16248,7 +16448,7 @@
   <p:cSld>
     <p:spTree>
       <p:nvGrpSpPr>
-        <p:cNvPr id="238" name="Shape 238"/>
+        <p:cNvPr id="236" name="Shape 236"/>
         <p:cNvGrpSpPr/>
         <p:nvPr/>
       </p:nvGrpSpPr>
@@ -16262,7 +16462,7 @@
       </p:grpSpPr>
       <p:sp>
         <p:nvSpPr>
-          <p:cNvPr id="239" name="Google Shape;239;p17"/>
+          <p:cNvPr id="237" name="Google Shape;237;p17"/>
           <p:cNvSpPr txBox="1"/>
           <p:nvPr>
             <p:ph type="title"/>
@@ -16310,7 +16510,7 @@
       </p:sp>
       <p:sp>
         <p:nvSpPr>
-          <p:cNvPr id="240" name="Google Shape;240;p17"/>
+          <p:cNvPr id="238" name="Google Shape;238;p17"/>
           <p:cNvSpPr txBox="1"/>
           <p:nvPr>
             <p:ph idx="1" type="body"/>
@@ -16721,7 +16921,7 @@
   <p:cSld>
     <p:spTree>
       <p:nvGrpSpPr>
-        <p:cNvPr id="244" name="Shape 244"/>
+        <p:cNvPr id="242" name="Shape 242"/>
         <p:cNvGrpSpPr/>
         <p:nvPr/>
       </p:nvGrpSpPr>
@@ -16735,7 +16935,7 @@
       </p:grpSpPr>
       <p:sp>
         <p:nvSpPr>
-          <p:cNvPr id="245" name="Google Shape;245;p18"/>
+          <p:cNvPr id="243" name="Google Shape;243;p18"/>
           <p:cNvSpPr txBox="1"/>
           <p:nvPr>
             <p:ph type="title"/>
@@ -16783,7 +16983,7 @@
       </p:sp>
       <p:sp>
         <p:nvSpPr>
-          <p:cNvPr id="246" name="Google Shape;246;p18"/>
+          <p:cNvPr id="244" name="Google Shape;244;p18"/>
           <p:cNvSpPr txBox="1"/>
           <p:nvPr>
             <p:ph idx="1" type="body"/>
@@ -16831,19 +17031,7 @@
                 <a:cs typeface="Arial"/>
                 <a:sym typeface="Arial"/>
               </a:rPr>
-              <a:t>La regresión se utiliza para predecir un valor numérico continuo </a:t>
-            </a:r>
-            <a:r>
-              <a:rPr lang="es-419" sz="1400">
-                <a:solidFill>
-                  <a:srgbClr val="374151"/>
-                </a:solidFill>
-                <a:latin typeface="Arial"/>
-                <a:ea typeface="Arial"/>
-                <a:cs typeface="Arial"/>
-                <a:sym typeface="Arial"/>
-              </a:rPr>
-              <a:t>a partir de un conjunto de características. </a:t>
+              <a:t>La regresión se utiliza para predecir un valor numérico continuo a partir de un conjunto de características. </a:t>
             </a:r>
             <a:endParaRPr sz="1400"/>
           </a:p>
@@ -17095,7 +17283,7 @@
   <p:cSld>
     <p:spTree>
       <p:nvGrpSpPr>
-        <p:cNvPr id="250" name="Shape 250"/>
+        <p:cNvPr id="248" name="Shape 248"/>
         <p:cNvGrpSpPr/>
         <p:nvPr/>
       </p:nvGrpSpPr>
@@ -17109,7 +17297,7 @@
       </p:grpSpPr>
       <p:pic>
         <p:nvPicPr>
-          <p:cNvPr id="251" name="Google Shape;251;p19"/>
+          <p:cNvPr id="249" name="Google Shape;249;p19"/>
           <p:cNvPicPr preferRelativeResize="0"/>
           <p:nvPr/>
         </p:nvPicPr>
@@ -17136,7 +17324,7 @@
       </p:pic>
       <p:sp>
         <p:nvSpPr>
-          <p:cNvPr id="252" name="Google Shape;252;p19"/>
+          <p:cNvPr id="250" name="Google Shape;250;p19"/>
           <p:cNvSpPr txBox="1"/>
           <p:nvPr/>
         </p:nvSpPr>
@@ -17202,7 +17390,7 @@
       </p:sp>
       <p:sp>
         <p:nvSpPr>
-          <p:cNvPr id="253" name="Google Shape;253;p19"/>
+          <p:cNvPr id="251" name="Google Shape;251;p19"/>
           <p:cNvSpPr txBox="1"/>
           <p:nvPr/>
         </p:nvSpPr>
@@ -17401,7 +17589,27 @@
             </a:pPr>
             <a:r>
               <a:rPr lang="es-419"/>
-              <a:t>Joel Spak</a:t>
+              <a:t>Tomas Avecilla</a:t>
+            </a:r>
+            <a:endParaRPr/>
+          </a:p>
+          <a:p>
+            <a:pPr indent="-311150" lvl="0" marL="457200" rtl="0" algn="l">
+              <a:lnSpc>
+                <a:spcPct val="115000"/>
+              </a:lnSpc>
+              <a:spcBef>
+                <a:spcPts val="0"/>
+              </a:spcBef>
+              <a:spcAft>
+                <a:spcPts val="0"/>
+              </a:spcAft>
+              <a:buSzPts val="1300"/>
+              <a:buChar char="-"/>
+            </a:pPr>
+            <a:r>
+              <a:rPr lang="es-419"/>
+              <a:t>Agustin Alsop</a:t>
             </a:r>
             <a:endParaRPr/>
           </a:p>
@@ -17420,7 +17628,7 @@
   <p:cSld>
     <p:spTree>
       <p:nvGrpSpPr>
-        <p:cNvPr id="257" name="Shape 257"/>
+        <p:cNvPr id="255" name="Shape 255"/>
         <p:cNvGrpSpPr/>
         <p:nvPr/>
       </p:nvGrpSpPr>
@@ -17434,7 +17642,7 @@
       </p:grpSpPr>
       <p:pic>
         <p:nvPicPr>
-          <p:cNvPr id="258" name="Google Shape;258;p20"/>
+          <p:cNvPr id="256" name="Google Shape;256;p20"/>
           <p:cNvPicPr preferRelativeResize="0"/>
           <p:nvPr/>
         </p:nvPicPr>
@@ -17461,7 +17669,7 @@
       </p:pic>
       <p:pic>
         <p:nvPicPr>
-          <p:cNvPr id="259" name="Google Shape;259;p20"/>
+          <p:cNvPr id="257" name="Google Shape;257;p20"/>
           <p:cNvPicPr preferRelativeResize="0"/>
           <p:nvPr/>
         </p:nvPicPr>
@@ -17488,7 +17696,7 @@
       </p:pic>
       <p:pic>
         <p:nvPicPr>
-          <p:cNvPr id="260" name="Google Shape;260;p20" title="Ph.D. thesis - Matthias Scholz - Max Planck Institute of Molecular ..."/>
+          <p:cNvPr id="258" name="Google Shape;258;p20" title="Ph.D. thesis - Matthias Scholz - Max Planck Institute of Molecular ..."/>
           <p:cNvPicPr preferRelativeResize="0"/>
           <p:nvPr/>
         </p:nvPicPr>
@@ -17515,7 +17723,7 @@
       </p:pic>
       <p:sp>
         <p:nvSpPr>
-          <p:cNvPr id="261" name="Google Shape;261;p20"/>
+          <p:cNvPr id="259" name="Google Shape;259;p20"/>
           <p:cNvSpPr txBox="1"/>
           <p:nvPr/>
         </p:nvSpPr>
@@ -17592,7 +17800,7 @@
   <p:cSld>
     <p:spTree>
       <p:nvGrpSpPr>
-        <p:cNvPr id="265" name="Shape 265"/>
+        <p:cNvPr id="263" name="Shape 263"/>
         <p:cNvGrpSpPr/>
         <p:nvPr/>
       </p:nvGrpSpPr>
@@ -17606,7 +17814,7 @@
       </p:grpSpPr>
       <p:sp>
         <p:nvSpPr>
-          <p:cNvPr id="266" name="Google Shape;266;p21"/>
+          <p:cNvPr id="264" name="Google Shape;264;p21"/>
           <p:cNvSpPr txBox="1"/>
           <p:nvPr>
             <p:ph type="title"/>
@@ -17653,7 +17861,7 @@
       </p:sp>
       <p:pic>
         <p:nvPicPr>
-          <p:cNvPr id="267" name="Google Shape;267;p21"/>
+          <p:cNvPr id="265" name="Google Shape;265;p21"/>
           <p:cNvPicPr preferRelativeResize="0"/>
           <p:nvPr/>
         </p:nvPicPr>
@@ -17691,7 +17899,7 @@
   <p:cSld>
     <p:spTree>
       <p:nvGrpSpPr>
-        <p:cNvPr id="271" name="Shape 271"/>
+        <p:cNvPr id="269" name="Shape 269"/>
         <p:cNvGrpSpPr/>
         <p:nvPr/>
       </p:nvGrpSpPr>
@@ -17705,7 +17913,7 @@
       </p:grpSpPr>
       <p:sp>
         <p:nvSpPr>
-          <p:cNvPr id="272" name="Google Shape;272;p22"/>
+          <p:cNvPr id="270" name="Google Shape;270;p22"/>
           <p:cNvSpPr txBox="1"/>
           <p:nvPr>
             <p:ph type="title"/>
@@ -17764,7 +17972,7 @@
   <p:cSld>
     <p:spTree>
       <p:nvGrpSpPr>
-        <p:cNvPr id="276" name="Shape 276"/>
+        <p:cNvPr id="274" name="Shape 274"/>
         <p:cNvGrpSpPr/>
         <p:nvPr/>
       </p:nvGrpSpPr>
@@ -17778,7 +17986,7 @@
       </p:grpSpPr>
       <p:sp>
         <p:nvSpPr>
-          <p:cNvPr id="277" name="Google Shape;277;p23"/>
+          <p:cNvPr id="275" name="Google Shape;275;p23"/>
           <p:cNvSpPr/>
           <p:nvPr/>
         </p:nvSpPr>
@@ -17839,7 +18047,7 @@
       </p:sp>
       <p:sp>
         <p:nvSpPr>
-          <p:cNvPr id="278" name="Google Shape;278;p23"/>
+          <p:cNvPr id="276" name="Google Shape;276;p23"/>
           <p:cNvSpPr/>
           <p:nvPr/>
         </p:nvSpPr>
@@ -17900,7 +18108,7 @@
       </p:sp>
       <p:sp>
         <p:nvSpPr>
-          <p:cNvPr id="279" name="Google Shape;279;p23"/>
+          <p:cNvPr id="277" name="Google Shape;277;p23"/>
           <p:cNvSpPr/>
           <p:nvPr/>
         </p:nvSpPr>
@@ -17961,7 +18169,7 @@
       </p:sp>
       <p:sp>
         <p:nvSpPr>
-          <p:cNvPr id="280" name="Google Shape;280;p23"/>
+          <p:cNvPr id="278" name="Google Shape;278;p23"/>
           <p:cNvSpPr/>
           <p:nvPr/>
         </p:nvSpPr>
@@ -18022,7 +18230,7 @@
       </p:sp>
       <p:sp>
         <p:nvSpPr>
-          <p:cNvPr id="281" name="Google Shape;281;p23"/>
+          <p:cNvPr id="279" name="Google Shape;279;p23"/>
           <p:cNvSpPr/>
           <p:nvPr/>
         </p:nvSpPr>
@@ -18083,7 +18291,7 @@
       </p:sp>
       <p:grpSp>
         <p:nvGrpSpPr>
-          <p:cNvPr id="282" name="Google Shape;282;p23"/>
+          <p:cNvPr id="280" name="Google Shape;280;p23"/>
           <p:cNvGrpSpPr/>
           <p:nvPr/>
         </p:nvGrpSpPr>
@@ -18097,7 +18305,7 @@
         </p:grpSpPr>
         <p:sp>
           <p:nvSpPr>
-            <p:cNvPr id="283" name="Google Shape;283;p23"/>
+            <p:cNvPr id="281" name="Google Shape;281;p23"/>
             <p:cNvSpPr/>
             <p:nvPr/>
           </p:nvSpPr>
@@ -18162,7 +18370,7 @@
         </p:sp>
         <p:sp>
           <p:nvSpPr>
-            <p:cNvPr id="284" name="Google Shape;284;p23"/>
+            <p:cNvPr id="282" name="Google Shape;282;p23"/>
             <p:cNvSpPr/>
             <p:nvPr/>
           </p:nvSpPr>
@@ -18409,7 +18617,7 @@
         </p:sp>
         <p:sp>
           <p:nvSpPr>
-            <p:cNvPr id="285" name="Google Shape;285;p23"/>
+            <p:cNvPr id="283" name="Google Shape;283;p23"/>
             <p:cNvSpPr txBox="1"/>
             <p:nvPr/>
           </p:nvSpPr>
@@ -18508,7 +18716,7 @@
         </p:sp>
         <p:sp>
           <p:nvSpPr>
-            <p:cNvPr id="286" name="Google Shape;286;p23"/>
+            <p:cNvPr id="284" name="Google Shape;284;p23"/>
             <p:cNvSpPr/>
             <p:nvPr/>
           </p:nvSpPr>
@@ -18570,7 +18778,7 @@
       </p:grpSp>
       <p:grpSp>
         <p:nvGrpSpPr>
-          <p:cNvPr id="287" name="Google Shape;287;p23"/>
+          <p:cNvPr id="285" name="Google Shape;285;p23"/>
           <p:cNvGrpSpPr/>
           <p:nvPr/>
         </p:nvGrpSpPr>
@@ -18584,7 +18792,7 @@
         </p:grpSpPr>
         <p:sp>
           <p:nvSpPr>
-            <p:cNvPr id="288" name="Google Shape;288;p23"/>
+            <p:cNvPr id="286" name="Google Shape;286;p23"/>
             <p:cNvSpPr/>
             <p:nvPr/>
           </p:nvSpPr>
@@ -18649,7 +18857,7 @@
         </p:sp>
         <p:sp>
           <p:nvSpPr>
-            <p:cNvPr id="289" name="Google Shape;289;p23"/>
+            <p:cNvPr id="287" name="Google Shape;287;p23"/>
             <p:cNvSpPr/>
             <p:nvPr/>
           </p:nvSpPr>
@@ -18896,7 +19104,7 @@
         </p:sp>
         <p:sp>
           <p:nvSpPr>
-            <p:cNvPr id="290" name="Google Shape;290;p23"/>
+            <p:cNvPr id="288" name="Google Shape;288;p23"/>
             <p:cNvSpPr txBox="1"/>
             <p:nvPr/>
           </p:nvSpPr>
@@ -18964,7 +19172,7 @@
         </p:sp>
         <p:sp>
           <p:nvSpPr>
-            <p:cNvPr id="291" name="Google Shape;291;p23"/>
+            <p:cNvPr id="289" name="Google Shape;289;p23"/>
             <p:cNvSpPr/>
             <p:nvPr/>
           </p:nvSpPr>
@@ -19026,7 +19234,7 @@
       </p:grpSp>
       <p:grpSp>
         <p:nvGrpSpPr>
-          <p:cNvPr id="292" name="Google Shape;292;p23"/>
+          <p:cNvPr id="290" name="Google Shape;290;p23"/>
           <p:cNvGrpSpPr/>
           <p:nvPr/>
         </p:nvGrpSpPr>
@@ -19040,7 +19248,7 @@
         </p:grpSpPr>
         <p:sp>
           <p:nvSpPr>
-            <p:cNvPr id="293" name="Google Shape;293;p23"/>
+            <p:cNvPr id="291" name="Google Shape;291;p23"/>
             <p:cNvSpPr/>
             <p:nvPr/>
           </p:nvSpPr>
@@ -19287,7 +19495,7 @@
         </p:sp>
         <p:sp>
           <p:nvSpPr>
-            <p:cNvPr id="294" name="Google Shape;294;p23"/>
+            <p:cNvPr id="292" name="Google Shape;292;p23"/>
             <p:cNvSpPr/>
             <p:nvPr/>
           </p:nvSpPr>
@@ -19348,7 +19556,7 @@
         </p:sp>
         <p:sp>
           <p:nvSpPr>
-            <p:cNvPr id="295" name="Google Shape;295;p23"/>
+            <p:cNvPr id="293" name="Google Shape;293;p23"/>
             <p:cNvSpPr txBox="1"/>
             <p:nvPr/>
           </p:nvSpPr>
@@ -19416,7 +19624,7 @@
         </p:sp>
         <p:sp>
           <p:nvSpPr>
-            <p:cNvPr id="296" name="Google Shape;296;p23"/>
+            <p:cNvPr id="294" name="Google Shape;294;p23"/>
             <p:cNvSpPr/>
             <p:nvPr/>
           </p:nvSpPr>
@@ -19482,7 +19690,7 @@
       </p:grpSp>
       <p:grpSp>
         <p:nvGrpSpPr>
-          <p:cNvPr id="297" name="Google Shape;297;p23"/>
+          <p:cNvPr id="295" name="Google Shape;295;p23"/>
           <p:cNvGrpSpPr/>
           <p:nvPr/>
         </p:nvGrpSpPr>
@@ -19496,7 +19704,7 @@
         </p:grpSpPr>
         <p:sp>
           <p:nvSpPr>
-            <p:cNvPr id="298" name="Google Shape;298;p23"/>
+            <p:cNvPr id="296" name="Google Shape;296;p23"/>
             <p:cNvSpPr/>
             <p:nvPr/>
           </p:nvSpPr>
@@ -19743,7 +19951,7 @@
         </p:sp>
         <p:sp>
           <p:nvSpPr>
-            <p:cNvPr id="299" name="Google Shape;299;p23"/>
+            <p:cNvPr id="297" name="Google Shape;297;p23"/>
             <p:cNvSpPr/>
             <p:nvPr/>
           </p:nvSpPr>
@@ -19804,7 +20012,7 @@
         </p:sp>
         <p:sp>
           <p:nvSpPr>
-            <p:cNvPr id="300" name="Google Shape;300;p23"/>
+            <p:cNvPr id="298" name="Google Shape;298;p23"/>
             <p:cNvSpPr txBox="1"/>
             <p:nvPr/>
           </p:nvSpPr>
@@ -19873,7 +20081,7 @@
       </p:grpSp>
       <p:grpSp>
         <p:nvGrpSpPr>
-          <p:cNvPr id="301" name="Google Shape;301;p23"/>
+          <p:cNvPr id="299" name="Google Shape;299;p23"/>
           <p:cNvGrpSpPr/>
           <p:nvPr/>
         </p:nvGrpSpPr>
@@ -19887,7 +20095,7 @@
         </p:grpSpPr>
         <p:sp>
           <p:nvSpPr>
-            <p:cNvPr id="302" name="Google Shape;302;p23"/>
+            <p:cNvPr id="300" name="Google Shape;300;p23"/>
             <p:cNvSpPr/>
             <p:nvPr/>
           </p:nvSpPr>
@@ -19952,7 +20160,7 @@
         </p:sp>
         <p:sp>
           <p:nvSpPr>
-            <p:cNvPr id="303" name="Google Shape;303;p23"/>
+            <p:cNvPr id="301" name="Google Shape;301;p23"/>
             <p:cNvSpPr/>
             <p:nvPr/>
           </p:nvSpPr>
@@ -20199,7 +20407,7 @@
         </p:sp>
         <p:sp>
           <p:nvSpPr>
-            <p:cNvPr id="304" name="Google Shape;304;p23"/>
+            <p:cNvPr id="302" name="Google Shape;302;p23"/>
             <p:cNvSpPr/>
             <p:nvPr/>
           </p:nvSpPr>
@@ -20260,7 +20468,7 @@
         </p:sp>
         <p:sp>
           <p:nvSpPr>
-            <p:cNvPr id="305" name="Google Shape;305;p23"/>
+            <p:cNvPr id="303" name="Google Shape;303;p23"/>
             <p:cNvSpPr txBox="1"/>
             <p:nvPr/>
           </p:nvSpPr>
@@ -20312,31 +20520,7 @@
                   <a:cs typeface="Lato"/>
                   <a:sym typeface="Lato"/>
                 </a:rPr>
-                <a:t>Despliegue: </a:t>
-              </a:r>
-              <a:r>
-                <a:rPr lang="es-419" sz="1300">
-                  <a:solidFill>
-                    <a:srgbClr val="5E5E5E"/>
-                  </a:solidFill>
-                  <a:latin typeface="Lato"/>
-                  <a:ea typeface="Lato"/>
-                  <a:cs typeface="Lato"/>
-                  <a:sym typeface="Lato"/>
-                </a:rPr>
-                <a:t>p</a:t>
-              </a:r>
-              <a:r>
-                <a:rPr b="0" i="0" lang="es-419" sz="1300" u="none" cap="none" strike="noStrike">
-                  <a:solidFill>
-                    <a:srgbClr val="5E5E5E"/>
-                  </a:solidFill>
-                  <a:latin typeface="Lato"/>
-                  <a:ea typeface="Lato"/>
-                  <a:cs typeface="Lato"/>
-                  <a:sym typeface="Lato"/>
-                </a:rPr>
-                <a:t>uesta en Producción</a:t>
+                <a:t>Despliegue: puesta en Producción</a:t>
               </a:r>
               <a:endParaRPr b="0" i="0" sz="1300" u="none" cap="none" strike="noStrike">
                 <a:solidFill>
@@ -20353,7 +20537,7 @@
       </p:grpSp>
       <p:grpSp>
         <p:nvGrpSpPr>
-          <p:cNvPr id="306" name="Google Shape;306;p23"/>
+          <p:cNvPr id="304" name="Google Shape;304;p23"/>
           <p:cNvGrpSpPr/>
           <p:nvPr/>
         </p:nvGrpSpPr>
@@ -20367,7 +20551,7 @@
         </p:grpSpPr>
         <p:sp>
           <p:nvSpPr>
-            <p:cNvPr id="307" name="Google Shape;307;p23"/>
+            <p:cNvPr id="305" name="Google Shape;305;p23"/>
             <p:cNvSpPr/>
             <p:nvPr/>
           </p:nvSpPr>
@@ -20432,7 +20616,7 @@
         </p:sp>
         <p:sp>
           <p:nvSpPr>
-            <p:cNvPr id="308" name="Google Shape;308;p23"/>
+            <p:cNvPr id="306" name="Google Shape;306;p23"/>
             <p:cNvSpPr/>
             <p:nvPr/>
           </p:nvSpPr>
@@ -20679,7 +20863,7 @@
         </p:sp>
         <p:sp>
           <p:nvSpPr>
-            <p:cNvPr id="309" name="Google Shape;309;p23"/>
+            <p:cNvPr id="307" name="Google Shape;307;p23"/>
             <p:cNvSpPr txBox="1"/>
             <p:nvPr/>
           </p:nvSpPr>
@@ -20747,7 +20931,7 @@
         </p:sp>
         <p:sp>
           <p:nvSpPr>
-            <p:cNvPr id="310" name="Google Shape;310;p23"/>
+            <p:cNvPr id="308" name="Google Shape;308;p23"/>
             <p:cNvSpPr/>
             <p:nvPr/>
           </p:nvSpPr>
@@ -20809,10 +20993,10 @@
       </p:grpSp>
       <p:cxnSp>
         <p:nvCxnSpPr>
-          <p:cNvPr id="311" name="Google Shape;311;p23"/>
+          <p:cNvPr id="309" name="Google Shape;309;p23"/>
           <p:cNvCxnSpPr>
-            <a:stCxn id="307" idx="5"/>
-            <a:endCxn id="300" idx="0"/>
+            <a:stCxn id="305" idx="5"/>
+            <a:endCxn id="298" idx="0"/>
           </p:cNvCxnSpPr>
           <p:nvPr/>
         </p:nvCxnSpPr>
@@ -20842,7 +21026,7 @@
       </p:cxnSp>
       <p:sp>
         <p:nvSpPr>
-          <p:cNvPr id="312" name="Google Shape;312;p23"/>
+          <p:cNvPr id="310" name="Google Shape;310;p23"/>
           <p:cNvSpPr/>
           <p:nvPr/>
         </p:nvSpPr>
@@ -20907,7 +21091,7 @@
       </p:sp>
       <p:sp>
         <p:nvSpPr>
-          <p:cNvPr id="313" name="Google Shape;313;p23"/>
+          <p:cNvPr id="311" name="Google Shape;311;p23"/>
           <p:cNvSpPr txBox="1"/>
           <p:nvPr/>
         </p:nvSpPr>
@@ -20973,7 +21157,7 @@
       </p:sp>
       <p:sp>
         <p:nvSpPr>
-          <p:cNvPr id="314" name="Google Shape;314;p23"/>
+          <p:cNvPr id="312" name="Google Shape;312;p23"/>
           <p:cNvSpPr txBox="1"/>
           <p:nvPr/>
         </p:nvSpPr>
@@ -21039,7 +21223,7 @@
       </p:sp>
       <p:sp>
         <p:nvSpPr>
-          <p:cNvPr id="315" name="Google Shape;315;p23"/>
+          <p:cNvPr id="313" name="Google Shape;313;p23"/>
           <p:cNvSpPr txBox="1"/>
           <p:nvPr/>
         </p:nvSpPr>
@@ -21105,7 +21289,7 @@
       </p:sp>
       <p:sp>
         <p:nvSpPr>
-          <p:cNvPr id="316" name="Google Shape;316;p23"/>
+          <p:cNvPr id="314" name="Google Shape;314;p23"/>
           <p:cNvSpPr txBox="1"/>
           <p:nvPr/>
         </p:nvSpPr>
@@ -21171,7 +21355,7 @@
       </p:sp>
       <p:sp>
         <p:nvSpPr>
-          <p:cNvPr id="317" name="Google Shape;317;p23"/>
+          <p:cNvPr id="315" name="Google Shape;315;p23"/>
           <p:cNvSpPr txBox="1"/>
           <p:nvPr/>
         </p:nvSpPr>
@@ -21277,7 +21461,7 @@
       </p:sp>
       <p:sp>
         <p:nvSpPr>
-          <p:cNvPr id="318" name="Google Shape;318;p23"/>
+          <p:cNvPr id="316" name="Google Shape;316;p23"/>
           <p:cNvSpPr txBox="1"/>
           <p:nvPr/>
         </p:nvSpPr>
@@ -21343,7 +21527,7 @@
       </p:sp>
       <p:sp>
         <p:nvSpPr>
-          <p:cNvPr id="319" name="Google Shape;319;p23"/>
+          <p:cNvPr id="317" name="Google Shape;317;p23"/>
           <p:cNvSpPr txBox="1"/>
           <p:nvPr/>
         </p:nvSpPr>
@@ -21409,7 +21593,7 @@
       </p:sp>
       <p:sp>
         <p:nvSpPr>
-          <p:cNvPr id="320" name="Google Shape;320;p23"/>
+          <p:cNvPr id="318" name="Google Shape;318;p23"/>
           <p:cNvSpPr txBox="1"/>
           <p:nvPr/>
         </p:nvSpPr>
@@ -21512,7 +21696,7 @@
                                           </p:stCondLst>
                                         </p:cTn>
                                         <p:tgtEl>
-                                          <p:spTgt spid="313"/>
+                                          <p:spTgt spid="311"/>
                                         </p:tgtEl>
                                         <p:attrNameLst>
                                           <p:attrName>style.visibility</p:attrName>
@@ -21527,6 +21711,78 @@
                               </p:par>
                               <p:par>
                                 <p:cTn fill="hold" nodeType="withEffect" presetClass="entr" presetID="1" presetSubtype="0">
+                                  <p:stCondLst>
+                                    <p:cond delay="0"/>
+                                  </p:stCondLst>
+                                  <p:childTnLst>
+                                    <p:set>
+                                      <p:cBhvr>
+                                        <p:cTn dur="1" fill="hold">
+                                          <p:stCondLst>
+                                            <p:cond delay="0"/>
+                                          </p:stCondLst>
+                                        </p:cTn>
+                                        <p:tgtEl>
+                                          <p:spTgt spid="312"/>
+                                        </p:tgtEl>
+                                        <p:attrNameLst>
+                                          <p:attrName>style.visibility</p:attrName>
+                                        </p:attrNameLst>
+                                      </p:cBhvr>
+                                      <p:to>
+                                        <p:strVal val="visible"/>
+                                      </p:to>
+                                    </p:set>
+                                  </p:childTnLst>
+                                </p:cTn>
+                              </p:par>
+                              <p:par>
+                                <p:cTn fill="hold" nodeType="withEffect" presetClass="entr" presetID="1" presetSubtype="0">
+                                  <p:stCondLst>
+                                    <p:cond delay="0"/>
+                                  </p:stCondLst>
+                                  <p:childTnLst>
+                                    <p:set>
+                                      <p:cBhvr>
+                                        <p:cTn dur="1" fill="hold">
+                                          <p:stCondLst>
+                                            <p:cond delay="0"/>
+                                          </p:stCondLst>
+                                        </p:cTn>
+                                        <p:tgtEl>
+                                          <p:spTgt spid="313"/>
+                                        </p:tgtEl>
+                                        <p:attrNameLst>
+                                          <p:attrName>style.visibility</p:attrName>
+                                        </p:attrNameLst>
+                                      </p:cBhvr>
+                                      <p:to>
+                                        <p:strVal val="visible"/>
+                                      </p:to>
+                                    </p:set>
+                                  </p:childTnLst>
+                                </p:cTn>
+                              </p:par>
+                            </p:childTnLst>
+                          </p:cTn>
+                        </p:par>
+                      </p:childTnLst>
+                    </p:cTn>
+                  </p:par>
+                  <p:par>
+                    <p:cTn fill="hold">
+                      <p:stCondLst>
+                        <p:cond delay="indefinite"/>
+                      </p:stCondLst>
+                      <p:childTnLst>
+                        <p:par>
+                          <p:cTn fill="hold">
+                            <p:stCondLst>
+                              <p:cond delay="0"/>
+                            </p:stCondLst>
+                            <p:childTnLst>
+                              <p:par>
+                                <p:cTn fill="hold" nodeType="clickEffect" presetClass="entr" presetID="1" presetSubtype="0">
                                   <p:stCondLst>
                                     <p:cond delay="0"/>
                                   </p:stCondLst>
@@ -21579,26 +21835,8 @@
                                   </p:childTnLst>
                                 </p:cTn>
                               </p:par>
-                            </p:childTnLst>
-                          </p:cTn>
-                        </p:par>
-                      </p:childTnLst>
-                    </p:cTn>
-                  </p:par>
-                  <p:par>
-                    <p:cTn fill="hold">
-                      <p:stCondLst>
-                        <p:cond delay="indefinite"/>
-                      </p:stCondLst>
-                      <p:childTnLst>
-                        <p:par>
-                          <p:cTn fill="hold">
-                            <p:stCondLst>
-                              <p:cond delay="0"/>
-                            </p:stCondLst>
-                            <p:childTnLst>
                               <p:par>
-                                <p:cTn fill="hold" nodeType="clickEffect" presetClass="entr" presetID="1" presetSubtype="0">
+                                <p:cTn fill="hold" nodeType="withEffect" presetClass="entr" presetID="1" presetSubtype="0">
                                   <p:stCondLst>
                                     <p:cond delay="0"/>
                                   </p:stCondLst>
@@ -21678,60 +21916,6 @@
                                   </p:childTnLst>
                                 </p:cTn>
                               </p:par>
-                              <p:par>
-                                <p:cTn fill="hold" nodeType="withEffect" presetClass="entr" presetID="1" presetSubtype="0">
-                                  <p:stCondLst>
-                                    <p:cond delay="0"/>
-                                  </p:stCondLst>
-                                  <p:childTnLst>
-                                    <p:set>
-                                      <p:cBhvr>
-                                        <p:cTn dur="1" fill="hold">
-                                          <p:stCondLst>
-                                            <p:cond delay="0"/>
-                                          </p:stCondLst>
-                                        </p:cTn>
-                                        <p:tgtEl>
-                                          <p:spTgt spid="319"/>
-                                        </p:tgtEl>
-                                        <p:attrNameLst>
-                                          <p:attrName>style.visibility</p:attrName>
-                                        </p:attrNameLst>
-                                      </p:cBhvr>
-                                      <p:to>
-                                        <p:strVal val="visible"/>
-                                      </p:to>
-                                    </p:set>
-                                  </p:childTnLst>
-                                </p:cTn>
-                              </p:par>
-                              <p:par>
-                                <p:cTn fill="hold" nodeType="withEffect" presetClass="entr" presetID="1" presetSubtype="0">
-                                  <p:stCondLst>
-                                    <p:cond delay="0"/>
-                                  </p:stCondLst>
-                                  <p:childTnLst>
-                                    <p:set>
-                                      <p:cBhvr>
-                                        <p:cTn dur="1" fill="hold">
-                                          <p:stCondLst>
-                                            <p:cond delay="0"/>
-                                          </p:stCondLst>
-                                        </p:cTn>
-                                        <p:tgtEl>
-                                          <p:spTgt spid="320"/>
-                                        </p:tgtEl>
-                                        <p:attrNameLst>
-                                          <p:attrName>style.visibility</p:attrName>
-                                        </p:attrNameLst>
-                                      </p:cBhvr>
-                                      <p:to>
-                                        <p:strVal val="visible"/>
-                                      </p:to>
-                                    </p:set>
-                                  </p:childTnLst>
-                                </p:cTn>
-                              </p:par>
                             </p:childTnLst>
                           </p:cTn>
                         </p:par>
@@ -21768,7 +21952,7 @@
   <p:cSld>
     <p:spTree>
       <p:nvGrpSpPr>
-        <p:cNvPr id="324" name="Shape 324"/>
+        <p:cNvPr id="322" name="Shape 322"/>
         <p:cNvGrpSpPr/>
         <p:nvPr/>
       </p:nvGrpSpPr>
@@ -21782,7 +21966,7 @@
       </p:grpSpPr>
       <p:sp>
         <p:nvSpPr>
-          <p:cNvPr id="325" name="Google Shape;325;p24"/>
+          <p:cNvPr id="323" name="Google Shape;323;p24"/>
           <p:cNvSpPr txBox="1"/>
           <p:nvPr>
             <p:ph type="title"/>
@@ -21830,7 +22014,7 @@
       </p:sp>
       <p:pic>
         <p:nvPicPr>
-          <p:cNvPr id="326" name="Google Shape;326;p24"/>
+          <p:cNvPr id="324" name="Google Shape;324;p24"/>
           <p:cNvPicPr preferRelativeResize="0"/>
           <p:nvPr/>
         </p:nvPicPr>
@@ -21857,7 +22041,7 @@
       </p:pic>
       <p:sp>
         <p:nvSpPr>
-          <p:cNvPr id="327" name="Google Shape;327;p24"/>
+          <p:cNvPr id="325" name="Google Shape;325;p24"/>
           <p:cNvSpPr txBox="1"/>
           <p:nvPr/>
         </p:nvSpPr>
@@ -21898,17 +22082,25 @@
               <a:buNone/>
             </a:pPr>
             <a:r>
-              <a:rPr i="0" lang="es-419" sz="1600" u="none" cap="none" strike="noStrike">
+              <a:rPr b="0" i="0" lang="es-419" sz="1600" u="none" cap="none" strike="noStrike">
                 <a:solidFill>
                   <a:srgbClr val="000000"/>
                 </a:solidFill>
+                <a:latin typeface="Arial"/>
+                <a:ea typeface="Arial"/>
+                <a:cs typeface="Arial"/>
+                <a:sym typeface="Arial"/>
               </a:rPr>
               <a:t>Análisis Exploratorio de Datos (EDA)</a:t>
             </a:r>
-            <a:endParaRPr i="0" sz="1600" u="none" cap="none" strike="noStrike">
+            <a:endParaRPr b="0" i="0" sz="1600" u="none" cap="none" strike="noStrike">
               <a:solidFill>
                 <a:srgbClr val="000000"/>
               </a:solidFill>
+              <a:latin typeface="Arial"/>
+              <a:ea typeface="Arial"/>
+              <a:cs typeface="Arial"/>
+              <a:sym typeface="Arial"/>
             </a:endParaRPr>
           </a:p>
         </p:txBody>
@@ -21926,7 +22118,7 @@
   <p:cSld>
     <p:spTree>
       <p:nvGrpSpPr>
-        <p:cNvPr id="331" name="Shape 331"/>
+        <p:cNvPr id="329" name="Shape 329"/>
         <p:cNvGrpSpPr/>
         <p:nvPr/>
       </p:nvGrpSpPr>
@@ -21940,7 +22132,7 @@
       </p:grpSpPr>
       <p:pic>
         <p:nvPicPr>
-          <p:cNvPr id="332" name="Google Shape;332;p25"/>
+          <p:cNvPr id="330" name="Google Shape;330;p25"/>
           <p:cNvPicPr preferRelativeResize="0"/>
           <p:nvPr/>
         </p:nvPicPr>
@@ -21967,7 +22159,7 @@
       </p:pic>
       <p:sp>
         <p:nvSpPr>
-          <p:cNvPr id="333" name="Google Shape;333;p25"/>
+          <p:cNvPr id="331" name="Google Shape;331;p25"/>
           <p:cNvSpPr txBox="1"/>
           <p:nvPr/>
         </p:nvSpPr>
@@ -22033,7 +22225,7 @@
       </p:sp>
       <p:sp>
         <p:nvSpPr>
-          <p:cNvPr id="334" name="Google Shape;334;p25"/>
+          <p:cNvPr id="332" name="Google Shape;332;p25"/>
           <p:cNvSpPr txBox="1"/>
           <p:nvPr/>
         </p:nvSpPr>
@@ -22111,7 +22303,7 @@
       </p:sp>
       <p:sp>
         <p:nvSpPr>
-          <p:cNvPr id="335" name="Google Shape;335;p25"/>
+          <p:cNvPr id="333" name="Google Shape;333;p25"/>
           <p:cNvSpPr txBox="1"/>
           <p:nvPr/>
         </p:nvSpPr>
@@ -22188,7 +22380,7 @@
   <p:cSld>
     <p:spTree>
       <p:nvGrpSpPr>
-        <p:cNvPr id="339" name="Shape 339"/>
+        <p:cNvPr id="337" name="Shape 337"/>
         <p:cNvGrpSpPr/>
         <p:nvPr/>
       </p:nvGrpSpPr>
@@ -22202,7 +22394,7 @@
       </p:grpSpPr>
       <p:sp>
         <p:nvSpPr>
-          <p:cNvPr id="340" name="Google Shape;340;p26"/>
+          <p:cNvPr id="338" name="Google Shape;338;p26"/>
           <p:cNvSpPr txBox="1"/>
           <p:nvPr>
             <p:ph type="title"/>
@@ -22250,7 +22442,7 @@
       </p:sp>
       <p:pic>
         <p:nvPicPr>
-          <p:cNvPr id="341" name="Google Shape;341;p26"/>
+          <p:cNvPr id="339" name="Google Shape;339;p26"/>
           <p:cNvPicPr preferRelativeResize="0"/>
           <p:nvPr/>
         </p:nvPicPr>
@@ -22288,7 +22480,7 @@
   <p:cSld>
     <p:spTree>
       <p:nvGrpSpPr>
-        <p:cNvPr id="345" name="Shape 345"/>
+        <p:cNvPr id="343" name="Shape 343"/>
         <p:cNvGrpSpPr/>
         <p:nvPr/>
       </p:nvGrpSpPr>
@@ -22302,7 +22494,7 @@
       </p:grpSpPr>
       <p:sp>
         <p:nvSpPr>
-          <p:cNvPr id="346" name="Google Shape;346;p27"/>
+          <p:cNvPr id="344" name="Google Shape;344;p27"/>
           <p:cNvSpPr/>
           <p:nvPr/>
         </p:nvSpPr>
@@ -22347,7 +22539,7 @@
               <a:buNone/>
             </a:pPr>
             <a:r>
-              <a:rPr b="0" i="0" lang="es-419" sz="1600" u="none" cap="none" strike="noStrike">
+              <a:rPr lang="es-419" sz="1600">
                 <a:solidFill>
                   <a:srgbClr val="FFFFFF"/>
                 </a:solidFill>
@@ -22356,7 +22548,7 @@
                 <a:cs typeface="Roboto"/>
                 <a:sym typeface="Roboto"/>
               </a:rPr>
-              <a:t>Algoritmo ML</a:t>
+              <a:t>Entrenamiento de un modelo de ML</a:t>
             </a:r>
             <a:endParaRPr b="0" i="0" sz="1600" u="none" cap="none" strike="noStrike">
               <a:solidFill>
@@ -22372,7 +22564,7 @@
       </p:sp>
       <p:sp>
         <p:nvSpPr>
-          <p:cNvPr id="347" name="Google Shape;347;p27"/>
+          <p:cNvPr id="345" name="Google Shape;345;p27"/>
           <p:cNvSpPr/>
           <p:nvPr/>
         </p:nvSpPr>
@@ -22442,7 +22634,7 @@
       </p:sp>
       <p:sp>
         <p:nvSpPr>
-          <p:cNvPr id="348" name="Google Shape;348;p27"/>
+          <p:cNvPr id="346" name="Google Shape;346;p27"/>
           <p:cNvSpPr/>
           <p:nvPr/>
         </p:nvSpPr>
@@ -22512,7 +22704,7 @@
       </p:sp>
       <p:sp>
         <p:nvSpPr>
-          <p:cNvPr id="349" name="Google Shape;349;p27"/>
+          <p:cNvPr id="347" name="Google Shape;347;p27"/>
           <p:cNvSpPr/>
           <p:nvPr/>
         </p:nvSpPr>
@@ -22582,7 +22774,7 @@
       </p:sp>
       <p:sp>
         <p:nvSpPr>
-          <p:cNvPr id="350" name="Google Shape;350;p27"/>
+          <p:cNvPr id="348" name="Google Shape;348;p27"/>
           <p:cNvSpPr/>
           <p:nvPr/>
         </p:nvSpPr>
@@ -22732,7 +22924,7 @@
       </p:sp>
       <p:sp>
         <p:nvSpPr>
-          <p:cNvPr id="351" name="Google Shape;351;p27"/>
+          <p:cNvPr id="349" name="Google Shape;349;p27"/>
           <p:cNvSpPr/>
           <p:nvPr/>
         </p:nvSpPr>
@@ -22802,7 +22994,7 @@
       </p:sp>
       <p:sp>
         <p:nvSpPr>
-          <p:cNvPr id="352" name="Google Shape;352;p27"/>
+          <p:cNvPr id="350" name="Google Shape;350;p27"/>
           <p:cNvSpPr/>
           <p:nvPr/>
         </p:nvSpPr>
@@ -22896,10 +23088,10 @@
       </p:sp>
       <p:cxnSp>
         <p:nvCxnSpPr>
-          <p:cNvPr id="353" name="Google Shape;353;p27"/>
+          <p:cNvPr id="351" name="Google Shape;351;p27"/>
           <p:cNvCxnSpPr>
-            <a:stCxn id="346" idx="2"/>
-            <a:endCxn id="347" idx="0"/>
+            <a:stCxn id="344" idx="2"/>
+            <a:endCxn id="345" idx="0"/>
           </p:cNvCxnSpPr>
           <p:nvPr/>
         </p:nvCxnSpPr>
@@ -22927,10 +23119,10 @@
       </p:cxnSp>
       <p:cxnSp>
         <p:nvCxnSpPr>
-          <p:cNvPr id="354" name="Google Shape;354;p27"/>
+          <p:cNvPr id="352" name="Google Shape;352;p27"/>
           <p:cNvCxnSpPr>
-            <a:stCxn id="348" idx="0"/>
-            <a:endCxn id="346" idx="2"/>
+            <a:stCxn id="346" idx="0"/>
+            <a:endCxn id="344" idx="2"/>
           </p:cNvCxnSpPr>
           <p:nvPr/>
         </p:nvCxnSpPr>
@@ -22958,10 +23150,10 @@
       </p:cxnSp>
       <p:cxnSp>
         <p:nvCxnSpPr>
-          <p:cNvPr id="355" name="Google Shape;355;p27"/>
+          <p:cNvPr id="353" name="Google Shape;353;p27"/>
           <p:cNvCxnSpPr>
-            <a:stCxn id="348" idx="2"/>
-            <a:endCxn id="350" idx="0"/>
+            <a:stCxn id="346" idx="2"/>
+            <a:endCxn id="348" idx="0"/>
           </p:cNvCxnSpPr>
           <p:nvPr/>
         </p:nvCxnSpPr>
@@ -22972,7 +23164,7 @@
           </a:xfrm>
           <a:prstGeom prst="bentConnector3">
             <a:avLst>
-              <a:gd fmla="val 50012" name="adj1"/>
+              <a:gd fmla="val 52360" name="adj1"/>
             </a:avLst>
           </a:prstGeom>
           <a:noFill/>
@@ -22989,10 +23181,10 @@
       </p:cxnSp>
       <p:cxnSp>
         <p:nvCxnSpPr>
-          <p:cNvPr id="356" name="Google Shape;356;p27"/>
+          <p:cNvPr id="354" name="Google Shape;354;p27"/>
           <p:cNvCxnSpPr>
-            <a:stCxn id="349" idx="0"/>
-            <a:endCxn id="348" idx="2"/>
+            <a:stCxn id="347" idx="0"/>
+            <a:endCxn id="346" idx="2"/>
           </p:cNvCxnSpPr>
           <p:nvPr/>
         </p:nvCxnSpPr>
@@ -23020,10 +23212,10 @@
       </p:cxnSp>
       <p:cxnSp>
         <p:nvCxnSpPr>
-          <p:cNvPr id="357" name="Google Shape;357;p27"/>
+          <p:cNvPr id="355" name="Google Shape;355;p27"/>
           <p:cNvCxnSpPr>
-            <a:stCxn id="347" idx="2"/>
-            <a:endCxn id="352" idx="0"/>
+            <a:stCxn id="345" idx="2"/>
+            <a:endCxn id="350" idx="0"/>
           </p:cNvCxnSpPr>
           <p:nvPr/>
         </p:nvCxnSpPr>
@@ -23034,7 +23226,7 @@
           </a:xfrm>
           <a:prstGeom prst="bentConnector3">
             <a:avLst>
-              <a:gd fmla="val 49993" name="adj1"/>
+              <a:gd fmla="val 40380" name="adj1"/>
             </a:avLst>
           </a:prstGeom>
           <a:noFill/>
@@ -23051,10 +23243,10 @@
       </p:cxnSp>
       <p:cxnSp>
         <p:nvCxnSpPr>
-          <p:cNvPr id="358" name="Google Shape;358;p27"/>
+          <p:cNvPr id="356" name="Google Shape;356;p27"/>
           <p:cNvCxnSpPr>
-            <a:stCxn id="351" idx="0"/>
-            <a:endCxn id="347" idx="2"/>
+            <a:stCxn id="349" idx="0"/>
+            <a:endCxn id="345" idx="2"/>
           </p:cNvCxnSpPr>
           <p:nvPr/>
         </p:nvCxnSpPr>
@@ -23082,7 +23274,7 @@
       </p:cxnSp>
       <p:sp>
         <p:nvSpPr>
-          <p:cNvPr id="359" name="Google Shape;359;p27"/>
+          <p:cNvPr id="357" name="Google Shape;357;p27"/>
           <p:cNvSpPr txBox="1"/>
           <p:nvPr/>
         </p:nvSpPr>
@@ -23148,7 +23340,7 @@
       </p:sp>
       <p:sp>
         <p:nvSpPr>
-          <p:cNvPr id="360" name="Google Shape;360;p27"/>
+          <p:cNvPr id="358" name="Google Shape;358;p27"/>
           <p:cNvSpPr txBox="1"/>
           <p:nvPr/>
         </p:nvSpPr>
@@ -23200,6 +23392,124 @@
               <a:cs typeface="Lato"/>
               <a:sym typeface="Lato"/>
             </a:endParaRPr>
+          </a:p>
+        </p:txBody>
+      </p:sp>
+    </p:spTree>
+  </p:cSld>
+  <p:clrMapOvr>
+    <a:masterClrMapping/>
+  </p:clrMapOvr>
+</p:sld>
+</file>
+
+<file path=ppt/slides/slide28.xml><?xml version="1.0" encoding="utf-8"?>
+<p:sld xmlns:a="http://schemas.openxmlformats.org/drawingml/2006/main" xmlns:r="http://schemas.openxmlformats.org/officeDocument/2006/relationships" xmlns:mc="http://schemas.openxmlformats.org/markup-compatibility/2006" xmlns:mv="urn:schemas-microsoft-com:mac:vml" xmlns:p="http://schemas.openxmlformats.org/presentationml/2006/main" xmlns:c="http://schemas.openxmlformats.org/drawingml/2006/chart" xmlns:dgm="http://schemas.openxmlformats.org/drawingml/2006/diagram" xmlns:o="urn:schemas-microsoft-com:office:office" xmlns:v="urn:schemas-microsoft-com:vml" xmlns:pvml="urn:schemas-microsoft-com:office:powerpoint" xmlns:com="http://schemas.openxmlformats.org/drawingml/2006/compatibility" xmlns:p14="http://schemas.microsoft.com/office/powerpoint/2010/main" xmlns:p15="http://schemas.microsoft.com/office/powerpoint/2012/main" xmlns:ahyp="http://schemas.microsoft.com/office/drawing/2018/hyperlinkcolor">
+  <p:cSld>
+    <p:spTree>
+      <p:nvGrpSpPr>
+        <p:cNvPr id="362" name="Shape 362"/>
+        <p:cNvGrpSpPr/>
+        <p:nvPr/>
+      </p:nvGrpSpPr>
+      <p:grpSpPr>
+        <a:xfrm>
+          <a:off x="0" y="0"/>
+          <a:ext cx="0" cy="0"/>
+          <a:chOff x="0" y="0"/>
+          <a:chExt cx="0" cy="0"/>
+        </a:xfrm>
+      </p:grpSpPr>
+      <p:sp>
+        <p:nvSpPr>
+          <p:cNvPr id="363" name="Google Shape;363;g3f77e98ea1e_1_26"/>
+          <p:cNvSpPr txBox="1"/>
+          <p:nvPr>
+            <p:ph type="title"/>
+          </p:nvPr>
+        </p:nvSpPr>
+        <p:spPr>
+          <a:xfrm>
+            <a:off x="729450" y="733950"/>
+            <a:ext cx="7688400" cy="1244700"/>
+          </a:xfrm>
+          <a:prstGeom prst="rect">
+            <a:avLst/>
+          </a:prstGeom>
+        </p:spPr>
+        <p:txBody>
+          <a:bodyPr anchorCtr="0" anchor="t" bIns="91425" lIns="91425" spcFirstLastPara="1" rIns="91425" wrap="square" tIns="91425">
+            <a:normAutofit fontScale="90000"/>
+          </a:bodyPr>
+          <a:lstStyle/>
+          <a:p>
+            <a:pPr indent="0" lvl="0" marL="0" rtl="0" algn="l">
+              <a:spcBef>
+                <a:spcPts val="0"/>
+              </a:spcBef>
+              <a:spcAft>
+                <a:spcPts val="0"/>
+              </a:spcAft>
+              <a:buNone/>
+            </a:pPr>
+            <a:r>
+              <a:rPr lang="es-419"/>
+              <a:t>Gracias</a:t>
+            </a:r>
+            <a:endParaRPr/>
+          </a:p>
+        </p:txBody>
+      </p:sp>
+      <p:sp>
+        <p:nvSpPr>
+          <p:cNvPr id="364" name="Google Shape;364;g3f77e98ea1e_1_26"/>
+          <p:cNvSpPr txBox="1"/>
+          <p:nvPr>
+            <p:ph idx="1" type="body"/>
+          </p:nvPr>
+        </p:nvSpPr>
+        <p:spPr>
+          <a:xfrm>
+            <a:off x="729450" y="2272888"/>
+            <a:ext cx="7688400" cy="1580400"/>
+          </a:xfrm>
+          <a:prstGeom prst="rect">
+            <a:avLst/>
+          </a:prstGeom>
+        </p:spPr>
+        <p:txBody>
+          <a:bodyPr anchorCtr="0" anchor="t" bIns="91425" lIns="91425" spcFirstLastPara="1" rIns="91425" wrap="square" tIns="91425">
+            <a:normAutofit/>
+          </a:bodyPr>
+          <a:lstStyle/>
+          <a:p>
+            <a:pPr indent="0" lvl="0" marL="0" rtl="0" algn="l">
+              <a:lnSpc>
+                <a:spcPct val="100000"/>
+              </a:lnSpc>
+              <a:spcBef>
+                <a:spcPts val="0"/>
+              </a:spcBef>
+              <a:spcAft>
+                <a:spcPts val="0"/>
+              </a:spcAft>
+              <a:buClr>
+                <a:srgbClr val="000000"/>
+              </a:buClr>
+              <a:buSzPts val="2560"/>
+              <a:buFont typeface="Arial"/>
+              <a:buNone/>
+            </a:pPr>
+            <a:r>
+              <a:rPr b="1" lang="es-419" sz="2300">
+                <a:latin typeface="Raleway"/>
+                <a:ea typeface="Raleway"/>
+                <a:cs typeface="Raleway"/>
+                <a:sym typeface="Raleway"/>
+              </a:rPr>
+              <a:t>Introducción al Aprendizaje Automático </a:t>
+            </a:r>
+            <a:endParaRPr sz="100"/>
           </a:p>
         </p:txBody>
       </p:sp>
@@ -25706,13 +26016,12 @@
           <p:cNvPicPr preferRelativeResize="0"/>
           <p:nvPr/>
         </p:nvPicPr>
-        <p:blipFill>
+        <p:blipFill rotWithShape="1">
           <a:blip r:embed="rId12">
             <a:alphaModFix/>
           </a:blip>
-          <a:stretch>
-            <a:fillRect/>
-          </a:stretch>
+          <a:srcRect b="0" l="0" r="0" t="0"/>
+          <a:stretch/>
         </p:blipFill>
         <p:spPr>
           <a:xfrm>
@@ -26112,55 +26421,26 @@
           <a:chExt cx="0" cy="0"/>
         </a:xfrm>
       </p:grpSpPr>
-      <p:pic>
-        <p:nvPicPr>
-          <p:cNvPr id="160" name="Google Shape;160;p9"/>
-          <p:cNvPicPr preferRelativeResize="0"/>
-          <p:nvPr/>
-        </p:nvPicPr>
-        <p:blipFill rotWithShape="1">
-          <a:blip r:embed="rId3">
-            <a:alphaModFix/>
-          </a:blip>
-          <a:srcRect b="0" l="0" r="0" t="0"/>
-          <a:stretch/>
-        </p:blipFill>
-        <p:spPr>
-          <a:xfrm>
-            <a:off x="2006288" y="1400350"/>
-            <a:ext cx="5131427" cy="2661925"/>
-          </a:xfrm>
-          <a:prstGeom prst="rect">
-            <a:avLst/>
-          </a:prstGeom>
-          <a:noFill/>
-          <a:ln>
-            <a:noFill/>
-          </a:ln>
-        </p:spPr>
-      </p:pic>
       <p:sp>
         <p:nvSpPr>
-          <p:cNvPr id="161" name="Google Shape;161;p9"/>
+          <p:cNvPr id="160" name="Google Shape;160;p10"/>
           <p:cNvSpPr/>
           <p:nvPr/>
         </p:nvSpPr>
         <p:spPr>
           <a:xfrm>
-            <a:off x="2845400" y="731650"/>
-            <a:ext cx="1324200" cy="623700"/>
+            <a:off x="2365300" y="1796950"/>
+            <a:ext cx="952200" cy="623700"/>
           </a:xfrm>
-          <a:prstGeom prst="roundRect">
-            <a:avLst>
-              <a:gd fmla="val 16667" name="adj"/>
-            </a:avLst>
+          <a:prstGeom prst="rect">
+            <a:avLst/>
           </a:prstGeom>
           <a:solidFill>
-            <a:srgbClr val="FCE5CD"/>
+            <a:schemeClr val="lt2"/>
           </a:solidFill>
           <a:ln cap="flat" cmpd="sng" w="9525">
             <a:solidFill>
-              <a:schemeClr val="lt1"/>
+              <a:schemeClr val="dk2"/>
             </a:solidFill>
             <a:prstDash val="solid"/>
             <a:round/>
@@ -26187,12 +26467,12 @@
               <a:buClr>
                 <a:srgbClr val="000000"/>
               </a:buClr>
-              <a:buSzPts val="1300"/>
+              <a:buSzPts val="1400"/>
               <a:buFont typeface="Arial"/>
               <a:buNone/>
             </a:pPr>
             <a:r>
-              <a:rPr b="0" i="0" lang="es-419" sz="1300" u="none" cap="none" strike="noStrike">
+              <a:rPr b="0" i="0" lang="es-419" sz="1400" u="none" cap="none" strike="noStrike">
                 <a:solidFill>
                   <a:srgbClr val="000000"/>
                 </a:solidFill>
@@ -26201,9 +26481,9 @@
                 <a:cs typeface="Arial"/>
                 <a:sym typeface="Arial"/>
               </a:rPr>
-              <a:t>Pensar como humanos</a:t>
+              <a:t>Datos</a:t>
             </a:r>
-            <a:endParaRPr b="0" i="0" sz="1300" u="none" cap="none" strike="noStrike">
+            <a:endParaRPr b="0" i="0" sz="1400" u="none" cap="none" strike="noStrike">
               <a:solidFill>
                 <a:srgbClr val="000000"/>
               </a:solidFill>
@@ -26217,26 +26497,24 @@
       </p:sp>
       <p:sp>
         <p:nvSpPr>
-          <p:cNvPr id="162" name="Google Shape;162;p9"/>
+          <p:cNvPr id="161" name="Google Shape;161;p10"/>
           <p:cNvSpPr/>
           <p:nvPr/>
         </p:nvSpPr>
         <p:spPr>
           <a:xfrm>
-            <a:off x="517150" y="854025"/>
-            <a:ext cx="1324200" cy="623700"/>
+            <a:off x="3644900" y="1796950"/>
+            <a:ext cx="1259400" cy="623700"/>
           </a:xfrm>
-          <a:prstGeom prst="roundRect">
-            <a:avLst>
-              <a:gd fmla="val 16667" name="adj"/>
-            </a:avLst>
+          <a:prstGeom prst="rect">
+            <a:avLst/>
           </a:prstGeom>
           <a:solidFill>
-            <a:srgbClr val="FCE5CD"/>
+            <a:schemeClr val="lt2"/>
           </a:solidFill>
           <a:ln cap="flat" cmpd="sng" w="9525">
             <a:solidFill>
-              <a:schemeClr val="lt1"/>
+              <a:schemeClr val="dk2"/>
             </a:solidFill>
             <a:prstDash val="solid"/>
             <a:round/>
@@ -26263,12 +26541,12 @@
               <a:buClr>
                 <a:srgbClr val="000000"/>
               </a:buClr>
-              <a:buSzPts val="1300"/>
+              <a:buSzPts val="1400"/>
               <a:buFont typeface="Arial"/>
               <a:buNone/>
             </a:pPr>
             <a:r>
-              <a:rPr b="0" i="0" lang="es-419" sz="1300" u="none" cap="none" strike="noStrike">
+              <a:rPr b="0" i="0" lang="es-419" sz="1400" u="none" cap="none" strike="noStrike">
                 <a:solidFill>
                   <a:srgbClr val="000000"/>
                 </a:solidFill>
@@ -26277,9 +26555,9 @@
                 <a:cs typeface="Arial"/>
                 <a:sym typeface="Arial"/>
               </a:rPr>
-              <a:t>Actuar como humanos</a:t>
+              <a:t>Reglas</a:t>
             </a:r>
-            <a:endParaRPr b="0" i="0" sz="1300" u="none" cap="none" strike="noStrike">
+            <a:endParaRPr b="0" i="0" sz="1400" u="none" cap="none" strike="noStrike">
               <a:solidFill>
                 <a:srgbClr val="000000"/>
               </a:solidFill>
@@ -26293,26 +26571,24 @@
       </p:sp>
       <p:sp>
         <p:nvSpPr>
-          <p:cNvPr id="163" name="Google Shape;163;p9"/>
+          <p:cNvPr id="162" name="Google Shape;162;p10"/>
           <p:cNvSpPr/>
           <p:nvPr/>
         </p:nvSpPr>
         <p:spPr>
           <a:xfrm>
-            <a:off x="434675" y="1831513"/>
-            <a:ext cx="1324200" cy="623700"/>
+            <a:off x="5519275" y="1796950"/>
+            <a:ext cx="1259400" cy="623700"/>
           </a:xfrm>
-          <a:prstGeom prst="roundRect">
-            <a:avLst>
-              <a:gd fmla="val 16667" name="adj"/>
-            </a:avLst>
+          <a:prstGeom prst="rect">
+            <a:avLst/>
           </a:prstGeom>
           <a:solidFill>
-            <a:srgbClr val="FCE5CD"/>
+            <a:schemeClr val="lt2"/>
           </a:solidFill>
           <a:ln cap="flat" cmpd="sng" w="9525">
             <a:solidFill>
-              <a:schemeClr val="lt1"/>
+              <a:schemeClr val="dk2"/>
             </a:solidFill>
             <a:prstDash val="solid"/>
             <a:round/>
@@ -26339,12 +26615,12 @@
               <a:buClr>
                 <a:srgbClr val="000000"/>
               </a:buClr>
-              <a:buSzPts val="1300"/>
+              <a:buSzPts val="1400"/>
               <a:buFont typeface="Arial"/>
               <a:buNone/>
             </a:pPr>
             <a:r>
-              <a:rPr b="0" i="0" lang="es-419" sz="1300" u="none" cap="none" strike="noStrike">
+              <a:rPr b="0" i="0" lang="es-419" sz="1400" u="none" cap="none" strike="noStrike">
                 <a:solidFill>
                   <a:srgbClr val="000000"/>
                 </a:solidFill>
@@ -26353,9 +26629,9 @@
                 <a:cs typeface="Arial"/>
                 <a:sym typeface="Arial"/>
               </a:rPr>
-              <a:t>Pensar racionalmente</a:t>
+              <a:t>Resultados</a:t>
             </a:r>
-            <a:endParaRPr b="0" i="0" sz="1300" u="none" cap="none" strike="noStrike">
+            <a:endParaRPr b="0" i="0" sz="1400" u="none" cap="none" strike="noStrike">
               <a:solidFill>
                 <a:srgbClr val="000000"/>
               </a:solidFill>
@@ -26369,26 +26645,24 @@
       </p:sp>
       <p:sp>
         <p:nvSpPr>
-          <p:cNvPr id="164" name="Google Shape;164;p9"/>
+          <p:cNvPr id="163" name="Google Shape;163;p10"/>
           <p:cNvSpPr/>
           <p:nvPr/>
         </p:nvSpPr>
         <p:spPr>
           <a:xfrm>
-            <a:off x="295500" y="2809025"/>
-            <a:ext cx="1324200" cy="623700"/>
+            <a:off x="2365300" y="3132075"/>
+            <a:ext cx="952200" cy="623700"/>
           </a:xfrm>
-          <a:prstGeom prst="roundRect">
-            <a:avLst>
-              <a:gd fmla="val 16667" name="adj"/>
-            </a:avLst>
+          <a:prstGeom prst="rect">
+            <a:avLst/>
           </a:prstGeom>
           <a:solidFill>
-            <a:srgbClr val="FCE5CD"/>
+            <a:schemeClr val="lt2"/>
           </a:solidFill>
           <a:ln cap="flat" cmpd="sng" w="9525">
             <a:solidFill>
-              <a:schemeClr val="lt1"/>
+              <a:schemeClr val="dk2"/>
             </a:solidFill>
             <a:prstDash val="solid"/>
             <a:round/>
@@ -26415,12 +26689,12 @@
               <a:buClr>
                 <a:srgbClr val="000000"/>
               </a:buClr>
-              <a:buSzPts val="1300"/>
+              <a:buSzPts val="1400"/>
               <a:buFont typeface="Arial"/>
               <a:buNone/>
             </a:pPr>
             <a:r>
-              <a:rPr b="0" i="0" lang="es-419" sz="1300" u="none" cap="none" strike="noStrike">
+              <a:rPr b="0" i="0" lang="es-419" sz="1400" u="none" cap="none" strike="noStrike">
                 <a:solidFill>
                   <a:srgbClr val="000000"/>
                 </a:solidFill>
@@ -26429,9 +26703,9 @@
                 <a:cs typeface="Arial"/>
                 <a:sym typeface="Arial"/>
               </a:rPr>
-              <a:t>Actuar racionalmente</a:t>
+              <a:t>Datos</a:t>
             </a:r>
-            <a:endParaRPr b="0" i="0" sz="1300" u="none" cap="none" strike="noStrike">
+            <a:endParaRPr b="0" i="0" sz="1400" u="none" cap="none" strike="noStrike">
               <a:solidFill>
                 <a:srgbClr val="000000"/>
               </a:solidFill>
@@ -26443,23 +26717,23 @@
           </a:p>
         </p:txBody>
       </p:sp>
-      <p:cxnSp>
-        <p:nvCxnSpPr>
-          <p:cNvPr id="165" name="Google Shape;165;p9"/>
-          <p:cNvCxnSpPr>
-            <a:stCxn id="161" idx="2"/>
-          </p:cNvCxnSpPr>
+      <p:sp>
+        <p:nvSpPr>
+          <p:cNvPr id="164" name="Google Shape;164;p10"/>
+          <p:cNvSpPr/>
           <p:nvPr/>
-        </p:nvCxnSpPr>
+        </p:nvSpPr>
         <p:spPr>
           <a:xfrm>
-            <a:off x="3507500" y="1355350"/>
-            <a:ext cx="596400" cy="438000"/>
+            <a:off x="5519275" y="3132075"/>
+            <a:ext cx="1259400" cy="623700"/>
           </a:xfrm>
-          <a:prstGeom prst="straightConnector1">
+          <a:prstGeom prst="rect">
             <a:avLst/>
           </a:prstGeom>
-          <a:noFill/>
+          <a:solidFill>
+            <a:schemeClr val="lt2"/>
+          </a:solidFill>
           <a:ln cap="flat" cmpd="sng" w="9525">
             <a:solidFill>
               <a:schemeClr val="dk2"/>
@@ -26467,27 +26741,73 @@
             <a:prstDash val="solid"/>
             <a:round/>
             <a:headEnd len="sm" w="sm" type="none"/>
-            <a:tailEnd len="med" w="med" type="triangle"/>
+            <a:tailEnd len="sm" w="sm" type="none"/>
           </a:ln>
         </p:spPr>
-      </p:cxnSp>
-      <p:cxnSp>
-        <p:nvCxnSpPr>
-          <p:cNvPr id="166" name="Google Shape;166;p9"/>
-          <p:cNvCxnSpPr>
-            <a:stCxn id="162" idx="3"/>
-          </p:cNvCxnSpPr>
+        <p:txBody>
+          <a:bodyPr anchorCtr="0" anchor="ctr" bIns="91425" lIns="91425" spcFirstLastPara="1" rIns="91425" wrap="square" tIns="91425">
+            <a:noAutofit/>
+          </a:bodyPr>
+          <a:lstStyle/>
+          <a:p>
+            <a:pPr indent="0" lvl="0" marL="0" marR="0" rtl="0" algn="ctr">
+              <a:lnSpc>
+                <a:spcPct val="100000"/>
+              </a:lnSpc>
+              <a:spcBef>
+                <a:spcPts val="0"/>
+              </a:spcBef>
+              <a:spcAft>
+                <a:spcPts val="0"/>
+              </a:spcAft>
+              <a:buClr>
+                <a:srgbClr val="000000"/>
+              </a:buClr>
+              <a:buSzPts val="1400"/>
+              <a:buFont typeface="Arial"/>
+              <a:buNone/>
+            </a:pPr>
+            <a:r>
+              <a:rPr b="0" i="0" lang="es-419" sz="1400" u="none" cap="none" strike="noStrike">
+                <a:solidFill>
+                  <a:srgbClr val="000000"/>
+                </a:solidFill>
+                <a:latin typeface="Arial"/>
+                <a:ea typeface="Arial"/>
+                <a:cs typeface="Arial"/>
+                <a:sym typeface="Arial"/>
+              </a:rPr>
+              <a:t>Reglas</a:t>
+            </a:r>
+            <a:endParaRPr b="0" i="0" sz="1400" u="none" cap="none" strike="noStrike">
+              <a:solidFill>
+                <a:srgbClr val="000000"/>
+              </a:solidFill>
+              <a:latin typeface="Arial"/>
+              <a:ea typeface="Arial"/>
+              <a:cs typeface="Arial"/>
+              <a:sym typeface="Arial"/>
+            </a:endParaRPr>
+          </a:p>
+        </p:txBody>
+      </p:sp>
+      <p:sp>
+        <p:nvSpPr>
+          <p:cNvPr id="165" name="Google Shape;165;p10"/>
+          <p:cNvSpPr/>
           <p:nvPr/>
-        </p:nvCxnSpPr>
+        </p:nvSpPr>
         <p:spPr>
           <a:xfrm>
-            <a:off x="1841350" y="1165875"/>
-            <a:ext cx="1217700" cy="836100"/>
+            <a:off x="3644900" y="3132075"/>
+            <a:ext cx="1259400" cy="623700"/>
           </a:xfrm>
-          <a:prstGeom prst="straightConnector1">
+          <a:prstGeom prst="rect">
             <a:avLst/>
           </a:prstGeom>
-          <a:noFill/>
+          <a:solidFill>
+            <a:schemeClr val="lt2"/>
+          </a:solidFill>
           <a:ln cap="flat" cmpd="sng" w="9525">
             <a:solidFill>
               <a:schemeClr val="dk2"/>
@@ -26495,27 +26815,75 @@
             <a:prstDash val="solid"/>
             <a:round/>
             <a:headEnd len="sm" w="sm" type="none"/>
-            <a:tailEnd len="med" w="med" type="triangle"/>
+            <a:tailEnd len="sm" w="sm" type="none"/>
           </a:ln>
         </p:spPr>
-      </p:cxnSp>
-      <p:cxnSp>
-        <p:nvCxnSpPr>
-          <p:cNvPr id="167" name="Google Shape;167;p9"/>
-          <p:cNvCxnSpPr>
-            <a:stCxn id="163" idx="3"/>
-          </p:cNvCxnSpPr>
+        <p:txBody>
+          <a:bodyPr anchorCtr="0" anchor="ctr" bIns="91425" lIns="91425" spcFirstLastPara="1" rIns="91425" wrap="square" tIns="91425">
+            <a:noAutofit/>
+          </a:bodyPr>
+          <a:lstStyle/>
+          <a:p>
+            <a:pPr indent="0" lvl="0" marL="0" marR="0" rtl="0" algn="ctr">
+              <a:lnSpc>
+                <a:spcPct val="100000"/>
+              </a:lnSpc>
+              <a:spcBef>
+                <a:spcPts val="0"/>
+              </a:spcBef>
+              <a:spcAft>
+                <a:spcPts val="0"/>
+              </a:spcAft>
+              <a:buClr>
+                <a:srgbClr val="000000"/>
+              </a:buClr>
+              <a:buSzPts val="1400"/>
+              <a:buFont typeface="Arial"/>
+              <a:buNone/>
+            </a:pPr>
+            <a:r>
+              <a:rPr b="0" i="0" lang="es-419" sz="1400" u="none" cap="none" strike="noStrike">
+                <a:solidFill>
+                  <a:srgbClr val="000000"/>
+                </a:solidFill>
+                <a:latin typeface="Arial"/>
+                <a:ea typeface="Arial"/>
+                <a:cs typeface="Arial"/>
+                <a:sym typeface="Arial"/>
+              </a:rPr>
+              <a:t>Resultados</a:t>
+            </a:r>
+            <a:endParaRPr b="0" i="0" sz="1400" u="none" cap="none" strike="noStrike">
+              <a:solidFill>
+                <a:srgbClr val="000000"/>
+              </a:solidFill>
+              <a:latin typeface="Arial"/>
+              <a:ea typeface="Arial"/>
+              <a:cs typeface="Arial"/>
+              <a:sym typeface="Arial"/>
+            </a:endParaRPr>
+          </a:p>
+        </p:txBody>
+      </p:sp>
+      <p:sp>
+        <p:nvSpPr>
+          <p:cNvPr id="166" name="Google Shape;166;p10"/>
+          <p:cNvSpPr/>
           <p:nvPr/>
-        </p:nvCxnSpPr>
+        </p:nvSpPr>
         <p:spPr>
           <a:xfrm>
-            <a:off x="1758875" y="2143363"/>
-            <a:ext cx="962700" cy="240900"/>
+            <a:off x="3393600" y="1993900"/>
+            <a:ext cx="175200" cy="229800"/>
           </a:xfrm>
-          <a:prstGeom prst="straightConnector1">
-            <a:avLst/>
+          <a:prstGeom prst="mathPlus">
+            <a:avLst>
+              <a:gd fmla="val 23520" name="adj1"/>
+            </a:avLst>
           </a:prstGeom>
-          <a:noFill/>
+          <a:solidFill>
+            <a:schemeClr val="dk2"/>
+          </a:solidFill>
           <a:ln cap="flat" cmpd="sng" w="9525">
             <a:solidFill>
               <a:schemeClr val="dk2"/>
@@ -26523,22 +26891,130 @@
             <a:prstDash val="solid"/>
             <a:round/>
             <a:headEnd len="sm" w="sm" type="none"/>
-            <a:tailEnd len="med" w="med" type="triangle"/>
+            <a:tailEnd len="sm" w="sm" type="none"/>
           </a:ln>
         </p:spPr>
-      </p:cxnSp>
+        <p:txBody>
+          <a:bodyPr anchorCtr="0" anchor="ctr" bIns="91425" lIns="91425" spcFirstLastPara="1" rIns="91425" wrap="square" tIns="91425">
+            <a:noAutofit/>
+          </a:bodyPr>
+          <a:lstStyle/>
+          <a:p>
+            <a:pPr indent="0" lvl="0" marL="0" marR="0" rtl="0" algn="l">
+              <a:lnSpc>
+                <a:spcPct val="100000"/>
+              </a:lnSpc>
+              <a:spcBef>
+                <a:spcPts val="0"/>
+              </a:spcBef>
+              <a:spcAft>
+                <a:spcPts val="0"/>
+              </a:spcAft>
+              <a:buClr>
+                <a:srgbClr val="000000"/>
+              </a:buClr>
+              <a:buSzPts val="1400"/>
+              <a:buFont typeface="Arial"/>
+              <a:buNone/>
+            </a:pPr>
+            <a:r>
+              <a:t/>
+            </a:r>
+            <a:endParaRPr b="0" i="0" sz="1400" u="none" cap="none" strike="noStrike">
+              <a:solidFill>
+                <a:srgbClr val="000000"/>
+              </a:solidFill>
+              <a:highlight>
+                <a:schemeClr val="dk2"/>
+              </a:highlight>
+              <a:latin typeface="Arial"/>
+              <a:ea typeface="Arial"/>
+              <a:cs typeface="Arial"/>
+              <a:sym typeface="Arial"/>
+            </a:endParaRPr>
+          </a:p>
+        </p:txBody>
+      </p:sp>
+      <p:sp>
+        <p:nvSpPr>
+          <p:cNvPr id="167" name="Google Shape;167;p10"/>
+          <p:cNvSpPr/>
+          <p:nvPr/>
+        </p:nvSpPr>
+        <p:spPr>
+          <a:xfrm>
+            <a:off x="3393600" y="3329025"/>
+            <a:ext cx="175200" cy="229800"/>
+          </a:xfrm>
+          <a:prstGeom prst="mathPlus">
+            <a:avLst>
+              <a:gd fmla="val 23520" name="adj1"/>
+            </a:avLst>
+          </a:prstGeom>
+          <a:solidFill>
+            <a:schemeClr val="dk2"/>
+          </a:solidFill>
+          <a:ln cap="flat" cmpd="sng" w="9525">
+            <a:solidFill>
+              <a:schemeClr val="dk2"/>
+            </a:solidFill>
+            <a:prstDash val="solid"/>
+            <a:round/>
+            <a:headEnd len="sm" w="sm" type="none"/>
+            <a:tailEnd len="sm" w="sm" type="none"/>
+          </a:ln>
+        </p:spPr>
+        <p:txBody>
+          <a:bodyPr anchorCtr="0" anchor="ctr" bIns="91425" lIns="91425" spcFirstLastPara="1" rIns="91425" wrap="square" tIns="91425">
+            <a:noAutofit/>
+          </a:bodyPr>
+          <a:lstStyle/>
+          <a:p>
+            <a:pPr indent="0" lvl="0" marL="0" marR="0" rtl="0" algn="l">
+              <a:lnSpc>
+                <a:spcPct val="100000"/>
+              </a:lnSpc>
+              <a:spcBef>
+                <a:spcPts val="0"/>
+              </a:spcBef>
+              <a:spcAft>
+                <a:spcPts val="0"/>
+              </a:spcAft>
+              <a:buClr>
+                <a:srgbClr val="000000"/>
+              </a:buClr>
+              <a:buSzPts val="1400"/>
+              <a:buFont typeface="Arial"/>
+              <a:buNone/>
+            </a:pPr>
+            <a:r>
+              <a:t/>
+            </a:r>
+            <a:endParaRPr b="0" i="0" sz="1400" u="none" cap="none" strike="noStrike">
+              <a:solidFill>
+                <a:srgbClr val="000000"/>
+              </a:solidFill>
+              <a:highlight>
+                <a:schemeClr val="dk2"/>
+              </a:highlight>
+              <a:latin typeface="Arial"/>
+              <a:ea typeface="Arial"/>
+              <a:cs typeface="Arial"/>
+              <a:sym typeface="Arial"/>
+            </a:endParaRPr>
+          </a:p>
+        </p:txBody>
+      </p:sp>
       <p:cxnSp>
         <p:nvCxnSpPr>
-          <p:cNvPr id="168" name="Google Shape;168;p9"/>
-          <p:cNvCxnSpPr>
-            <a:stCxn id="164" idx="3"/>
-          </p:cNvCxnSpPr>
+          <p:cNvPr id="168" name="Google Shape;168;p10"/>
+          <p:cNvCxnSpPr/>
           <p:nvPr/>
         </p:nvCxnSpPr>
         <p:spPr>
           <a:xfrm flipH="1" rot="10800000">
-            <a:off x="1619700" y="2927075"/>
-            <a:ext cx="1004700" cy="193800"/>
+            <a:off x="5007488" y="2106100"/>
+            <a:ext cx="408600" cy="5400"/>
           </a:xfrm>
           <a:prstGeom prst="straightConnector1">
             <a:avLst/>
@@ -26557,404 +27033,146 @@
       </p:cxnSp>
       <p:sp>
         <p:nvSpPr>
-          <p:cNvPr id="169" name="Google Shape;169;p9"/>
-          <p:cNvSpPr/>
+          <p:cNvPr id="169" name="Google Shape;169;p10"/>
+          <p:cNvSpPr txBox="1"/>
           <p:nvPr/>
         </p:nvSpPr>
         <p:spPr>
           <a:xfrm>
-            <a:off x="5513575" y="854025"/>
-            <a:ext cx="1783800" cy="713700"/>
+            <a:off x="475075" y="1396750"/>
+            <a:ext cx="6303600" cy="400200"/>
           </a:xfrm>
-          <a:prstGeom prst="roundRect">
-            <a:avLst>
-              <a:gd fmla="val 16667" name="adj"/>
-            </a:avLst>
+          <a:prstGeom prst="rect">
+            <a:avLst/>
           </a:prstGeom>
-          <a:solidFill>
-            <a:srgbClr val="F4CCCC"/>
-          </a:solidFill>
-          <a:ln cap="flat" cmpd="sng" w="9525">
-            <a:solidFill>
-              <a:schemeClr val="lt1"/>
-            </a:solidFill>
-            <a:prstDash val="solid"/>
-            <a:round/>
-            <a:headEnd len="sm" w="sm" type="none"/>
-            <a:tailEnd len="sm" w="sm" type="none"/>
+          <a:noFill/>
+          <a:ln>
+            <a:noFill/>
           </a:ln>
         </p:spPr>
         <p:txBody>
-          <a:bodyPr anchorCtr="0" anchor="ctr" bIns="91425" lIns="91425" spcFirstLastPara="1" rIns="91425" wrap="square" tIns="91425">
-            <a:noAutofit/>
+          <a:bodyPr anchorCtr="0" anchor="t" bIns="91425" lIns="91425" spcFirstLastPara="1" rIns="91425" wrap="square" tIns="91425">
+            <a:spAutoFit/>
           </a:bodyPr>
           <a:lstStyle/>
           <a:p>
-            <a:pPr indent="0" lvl="0" marL="0" marR="0" rtl="0" algn="ctr">
-              <a:lnSpc>
-                <a:spcPct val="107916"/>
-              </a:lnSpc>
-              <a:spcBef>
-                <a:spcPts val="0"/>
-              </a:spcBef>
-              <a:spcAft>
-                <a:spcPts val="800"/>
+            <a:pPr indent="0" lvl="0" marL="0" marR="0" rtl="0" algn="l">
+              <a:lnSpc>
+                <a:spcPct val="100000"/>
+              </a:lnSpc>
+              <a:spcBef>
+                <a:spcPts val="0"/>
+              </a:spcBef>
+              <a:spcAft>
+                <a:spcPts val="0"/>
               </a:spcAft>
               <a:buClr>
                 <a:srgbClr val="000000"/>
               </a:buClr>
-              <a:buSzPts val="1200"/>
+              <a:buSzPts val="1400"/>
               <a:buFont typeface="Arial"/>
               <a:buNone/>
             </a:pPr>
             <a:r>
-              <a:rPr b="0" i="0" lang="es-419" sz="1200" u="none" cap="none" strike="noStrike">
-                <a:solidFill>
-                  <a:srgbClr val="374151"/>
-                </a:solidFill>
-                <a:latin typeface="Arial"/>
-                <a:ea typeface="Arial"/>
-                <a:cs typeface="Arial"/>
-                <a:sym typeface="Arial"/>
+              <a:rPr b="0" i="0" lang="es-419" sz="1400" u="none" cap="none" strike="noStrike">
+                <a:solidFill>
+                  <a:srgbClr val="000000"/>
+                </a:solidFill>
+                <a:latin typeface="Lato"/>
+                <a:ea typeface="Lato"/>
+                <a:cs typeface="Lato"/>
+                <a:sym typeface="Lato"/>
               </a:rPr>
-              <a:t>Aprender y mejorar automáticamente a partir de los datos</a:t>
+              <a:t>Enfoque tradicional</a:t>
             </a:r>
-            <a:endParaRPr b="0" i="0" sz="1300" u="none" cap="none" strike="noStrike">
+            <a:endParaRPr b="0" i="0" sz="1400" u="none" cap="none" strike="noStrike">
               <a:solidFill>
                 <a:srgbClr val="000000"/>
               </a:solidFill>
-              <a:latin typeface="Arial"/>
-              <a:ea typeface="Arial"/>
-              <a:cs typeface="Arial"/>
-              <a:sym typeface="Arial"/>
+              <a:latin typeface="Lato"/>
+              <a:ea typeface="Lato"/>
+              <a:cs typeface="Lato"/>
+              <a:sym typeface="Lato"/>
             </a:endParaRPr>
           </a:p>
         </p:txBody>
       </p:sp>
       <p:sp>
         <p:nvSpPr>
-          <p:cNvPr id="170" name="Google Shape;170;p9"/>
-          <p:cNvSpPr/>
+          <p:cNvPr id="170" name="Google Shape;170;p10"/>
+          <p:cNvSpPr txBox="1"/>
           <p:nvPr/>
         </p:nvSpPr>
         <p:spPr>
           <a:xfrm>
-            <a:off x="7137725" y="2262675"/>
-            <a:ext cx="1783800" cy="1219500"/>
+            <a:off x="475075" y="2674726"/>
+            <a:ext cx="6303600" cy="400200"/>
           </a:xfrm>
-          <a:prstGeom prst="roundRect">
-            <a:avLst>
-              <a:gd fmla="val 16667" name="adj"/>
-            </a:avLst>
+          <a:prstGeom prst="rect">
+            <a:avLst/>
           </a:prstGeom>
-          <a:solidFill>
-            <a:srgbClr val="F4CCCC"/>
-          </a:solidFill>
-          <a:ln cap="flat" cmpd="sng" w="9525">
-            <a:solidFill>
-              <a:schemeClr val="lt1"/>
-            </a:solidFill>
-            <a:prstDash val="solid"/>
-            <a:round/>
-            <a:headEnd len="sm" w="sm" type="none"/>
-            <a:tailEnd len="sm" w="sm" type="none"/>
+          <a:noFill/>
+          <a:ln>
+            <a:noFill/>
           </a:ln>
         </p:spPr>
         <p:txBody>
-          <a:bodyPr anchorCtr="0" anchor="ctr" bIns="91425" lIns="91425" spcFirstLastPara="1" rIns="91425" wrap="square" tIns="91425">
-            <a:noAutofit/>
+          <a:bodyPr anchorCtr="0" anchor="t" bIns="91425" lIns="91425" spcFirstLastPara="1" rIns="91425" wrap="square" tIns="91425">
+            <a:spAutoFit/>
           </a:bodyPr>
           <a:lstStyle/>
           <a:p>
-            <a:pPr indent="0" lvl="0" marL="0" marR="0" rtl="0" algn="ctr">
-              <a:lnSpc>
-                <a:spcPct val="107916"/>
-              </a:lnSpc>
-              <a:spcBef>
-                <a:spcPts val="0"/>
-              </a:spcBef>
-              <a:spcAft>
-                <a:spcPts val="800"/>
+            <a:pPr indent="0" lvl="0" marL="0" marR="0" rtl="0" algn="l">
+              <a:lnSpc>
+                <a:spcPct val="100000"/>
+              </a:lnSpc>
+              <a:spcBef>
+                <a:spcPts val="0"/>
+              </a:spcBef>
+              <a:spcAft>
+                <a:spcPts val="0"/>
               </a:spcAft>
               <a:buClr>
                 <a:srgbClr val="000000"/>
               </a:buClr>
-              <a:buSzPts val="1200"/>
+              <a:buSzPts val="1400"/>
               <a:buFont typeface="Arial"/>
               <a:buNone/>
             </a:pPr>
             <a:r>
-              <a:rPr b="0" i="0" lang="es-419" sz="1200" u="none" cap="none" strike="noStrike">
-                <a:solidFill>
-                  <a:srgbClr val="374151"/>
-                </a:solidFill>
-                <a:latin typeface="Arial"/>
-                <a:ea typeface="Arial"/>
-                <a:cs typeface="Arial"/>
-                <a:sym typeface="Arial"/>
+              <a:rPr b="0" i="0" lang="es-419" sz="1400" u="none" cap="none" strike="noStrike">
+                <a:solidFill>
+                  <a:srgbClr val="000000"/>
+                </a:solidFill>
+                <a:latin typeface="Lato"/>
+                <a:ea typeface="Lato"/>
+                <a:cs typeface="Lato"/>
+                <a:sym typeface="Lato"/>
               </a:rPr>
-              <a:t>Capacidad de automatizar tareas complejas y tomar decisiones basadas en datos.</a:t>
+              <a:t>Enfoque aprendizaje automático</a:t>
             </a:r>
-            <a:endParaRPr b="0" i="0" sz="1300" u="none" cap="none" strike="noStrike">
+            <a:endParaRPr b="0" i="0" sz="1400" u="none" cap="none" strike="noStrike">
               <a:solidFill>
                 <a:srgbClr val="000000"/>
               </a:solidFill>
-              <a:latin typeface="Arial"/>
-              <a:ea typeface="Arial"/>
-              <a:cs typeface="Arial"/>
-              <a:sym typeface="Arial"/>
-            </a:endParaRPr>
-          </a:p>
-        </p:txBody>
-      </p:sp>
-      <p:sp>
-        <p:nvSpPr>
-          <p:cNvPr id="171" name="Google Shape;171;p9"/>
-          <p:cNvSpPr/>
-          <p:nvPr/>
-        </p:nvSpPr>
-        <p:spPr>
-          <a:xfrm>
-            <a:off x="6869325" y="1540063"/>
-            <a:ext cx="1783800" cy="582900"/>
-          </a:xfrm>
-          <a:prstGeom prst="roundRect">
-            <a:avLst>
-              <a:gd fmla="val 16667" name="adj"/>
-            </a:avLst>
-          </a:prstGeom>
-          <a:solidFill>
-            <a:srgbClr val="F4CCCC"/>
-          </a:solidFill>
-          <a:ln cap="flat" cmpd="sng" w="9525">
-            <a:solidFill>
-              <a:schemeClr val="lt1"/>
-            </a:solidFill>
-            <a:prstDash val="solid"/>
-            <a:round/>
-            <a:headEnd len="sm" w="sm" type="none"/>
-            <a:tailEnd len="sm" w="sm" type="none"/>
-          </a:ln>
-        </p:spPr>
-        <p:txBody>
-          <a:bodyPr anchorCtr="0" anchor="ctr" bIns="91425" lIns="91425" spcFirstLastPara="1" rIns="91425" wrap="square" tIns="91425">
-            <a:noAutofit/>
-          </a:bodyPr>
-          <a:lstStyle/>
-          <a:p>
-            <a:pPr indent="0" lvl="0" marL="0" marR="0" rtl="0" algn="ctr">
-              <a:lnSpc>
-                <a:spcPct val="107916"/>
-              </a:lnSpc>
-              <a:spcBef>
-                <a:spcPts val="0"/>
-              </a:spcBef>
-              <a:spcAft>
-                <a:spcPts val="800"/>
-              </a:spcAft>
-              <a:buClr>
-                <a:srgbClr val="000000"/>
-              </a:buClr>
-              <a:buSzPts val="1200"/>
-              <a:buFont typeface="Arial"/>
-              <a:buNone/>
-            </a:pPr>
-            <a:r>
-              <a:rPr b="0" i="0" lang="es-419" sz="1200" u="none" cap="none" strike="noStrike">
-                <a:solidFill>
-                  <a:srgbClr val="374151"/>
-                </a:solidFill>
-                <a:latin typeface="Arial"/>
-                <a:ea typeface="Arial"/>
-                <a:cs typeface="Arial"/>
-                <a:sym typeface="Arial"/>
-              </a:rPr>
-              <a:t>Modelos y algoritmos</a:t>
-            </a:r>
-            <a:endParaRPr b="0" i="0" sz="1300" u="none" cap="none" strike="noStrike">
-              <a:solidFill>
-                <a:srgbClr val="000000"/>
-              </a:solidFill>
-              <a:latin typeface="Arial"/>
-              <a:ea typeface="Arial"/>
-              <a:cs typeface="Arial"/>
-              <a:sym typeface="Arial"/>
-            </a:endParaRPr>
-          </a:p>
-        </p:txBody>
-      </p:sp>
-      <p:sp>
-        <p:nvSpPr>
-          <p:cNvPr id="172" name="Google Shape;172;p9"/>
-          <p:cNvSpPr/>
-          <p:nvPr/>
-        </p:nvSpPr>
-        <p:spPr>
-          <a:xfrm>
-            <a:off x="5830525" y="3727100"/>
-            <a:ext cx="2911800" cy="1274100"/>
-          </a:xfrm>
-          <a:prstGeom prst="roundRect">
-            <a:avLst>
-              <a:gd fmla="val 16667" name="adj"/>
-            </a:avLst>
-          </a:prstGeom>
-          <a:solidFill>
-            <a:srgbClr val="CFE2F3"/>
-          </a:solidFill>
-          <a:ln cap="flat" cmpd="sng" w="9525">
-            <a:solidFill>
-              <a:schemeClr val="lt1"/>
-            </a:solidFill>
-            <a:prstDash val="solid"/>
-            <a:round/>
-            <a:headEnd len="sm" w="sm" type="none"/>
-            <a:tailEnd len="sm" w="sm" type="none"/>
-          </a:ln>
-        </p:spPr>
-        <p:txBody>
-          <a:bodyPr anchorCtr="0" anchor="ctr" bIns="91425" lIns="91425" spcFirstLastPara="1" rIns="91425" wrap="square" tIns="91425">
-            <a:noAutofit/>
-          </a:bodyPr>
-          <a:lstStyle/>
-          <a:p>
-            <a:pPr indent="0" lvl="0" marL="0" marR="0" rtl="0" algn="ctr">
-              <a:lnSpc>
-                <a:spcPct val="107916"/>
-              </a:lnSpc>
-              <a:spcBef>
-                <a:spcPts val="0"/>
-              </a:spcBef>
-              <a:spcAft>
-                <a:spcPts val="800"/>
-              </a:spcAft>
-              <a:buClr>
-                <a:srgbClr val="000000"/>
-              </a:buClr>
-              <a:buSzPts val="1200"/>
-              <a:buFont typeface="Arial"/>
-              <a:buNone/>
-            </a:pPr>
-            <a:r>
-              <a:rPr b="0" i="0" lang="es-419" sz="1200" u="none" cap="none" strike="noStrike">
-                <a:solidFill>
-                  <a:srgbClr val="374151"/>
-                </a:solidFill>
-                <a:latin typeface="Arial"/>
-                <a:ea typeface="Arial"/>
-                <a:cs typeface="Arial"/>
-                <a:sym typeface="Arial"/>
-              </a:rPr>
-              <a:t>Estructuración de algoritmos para toma inteligente de decisiones - Agrega capas y parámetros para aprender complejos mapeos con modelos no lineales.</a:t>
-            </a:r>
-            <a:endParaRPr b="0" i="0" sz="1300" u="none" cap="none" strike="noStrike">
-              <a:solidFill>
-                <a:srgbClr val="000000"/>
-              </a:solidFill>
-              <a:latin typeface="Arial"/>
-              <a:ea typeface="Arial"/>
-              <a:cs typeface="Arial"/>
-              <a:sym typeface="Arial"/>
+              <a:latin typeface="Lato"/>
+              <a:ea typeface="Lato"/>
+              <a:cs typeface="Lato"/>
+              <a:sym typeface="Lato"/>
             </a:endParaRPr>
           </a:p>
         </p:txBody>
       </p:sp>
       <p:cxnSp>
         <p:nvCxnSpPr>
-          <p:cNvPr id="173" name="Google Shape;173;p9"/>
-          <p:cNvCxnSpPr>
-            <a:stCxn id="169" idx="1"/>
-          </p:cNvCxnSpPr>
+          <p:cNvPr id="171" name="Google Shape;171;p10"/>
+          <p:cNvCxnSpPr/>
           <p:nvPr/>
         </p:nvCxnSpPr>
         <p:spPr>
-          <a:xfrm flipH="1">
-            <a:off x="4836175" y="1210875"/>
-            <a:ext cx="677400" cy="1076100"/>
-          </a:xfrm>
-          <a:prstGeom prst="straightConnector1">
-            <a:avLst/>
-          </a:prstGeom>
-          <a:noFill/>
-          <a:ln cap="flat" cmpd="sng" w="9525">
-            <a:solidFill>
-              <a:schemeClr val="dk2"/>
-            </a:solidFill>
-            <a:prstDash val="solid"/>
-            <a:round/>
-            <a:headEnd len="sm" w="sm" type="none"/>
-            <a:tailEnd len="med" w="med" type="triangle"/>
-          </a:ln>
-        </p:spPr>
-      </p:cxnSp>
-      <p:cxnSp>
-        <p:nvCxnSpPr>
-          <p:cNvPr id="174" name="Google Shape;174;p9"/>
-          <p:cNvCxnSpPr>
-            <a:stCxn id="171" idx="1"/>
-          </p:cNvCxnSpPr>
-          <p:nvPr/>
-        </p:nvCxnSpPr>
-        <p:spPr>
-          <a:xfrm flipH="1">
-            <a:off x="5471925" y="1831513"/>
-            <a:ext cx="1397400" cy="411900"/>
-          </a:xfrm>
-          <a:prstGeom prst="straightConnector1">
-            <a:avLst/>
-          </a:prstGeom>
-          <a:noFill/>
-          <a:ln cap="flat" cmpd="sng" w="9525">
-            <a:solidFill>
-              <a:schemeClr val="dk2"/>
-            </a:solidFill>
-            <a:prstDash val="solid"/>
-            <a:round/>
-            <a:headEnd len="sm" w="sm" type="none"/>
-            <a:tailEnd len="med" w="med" type="triangle"/>
-          </a:ln>
-        </p:spPr>
-      </p:cxnSp>
-      <p:cxnSp>
-        <p:nvCxnSpPr>
-          <p:cNvPr id="175" name="Google Shape;175;p9"/>
-          <p:cNvCxnSpPr>
-            <a:stCxn id="170" idx="1"/>
-          </p:cNvCxnSpPr>
-          <p:nvPr/>
-        </p:nvCxnSpPr>
-        <p:spPr>
-          <a:xfrm rot="10800000">
-            <a:off x="6395525" y="2736825"/>
-            <a:ext cx="742200" cy="135600"/>
-          </a:xfrm>
-          <a:prstGeom prst="straightConnector1">
-            <a:avLst/>
-          </a:prstGeom>
-          <a:noFill/>
-          <a:ln cap="flat" cmpd="sng" w="9525">
-            <a:solidFill>
-              <a:schemeClr val="dk2"/>
-            </a:solidFill>
-            <a:prstDash val="solid"/>
-            <a:round/>
-            <a:headEnd len="sm" w="sm" type="none"/>
-            <a:tailEnd len="med" w="med" type="triangle"/>
-          </a:ln>
-        </p:spPr>
-      </p:cxnSp>
-      <p:cxnSp>
-        <p:nvCxnSpPr>
-          <p:cNvPr id="176" name="Google Shape;176;p9"/>
-          <p:cNvCxnSpPr>
-            <a:stCxn id="172" idx="0"/>
-          </p:cNvCxnSpPr>
-          <p:nvPr/>
-        </p:nvCxnSpPr>
-        <p:spPr>
-          <a:xfrm rot="10800000">
-            <a:off x="6044425" y="2969000"/>
-            <a:ext cx="1242000" cy="758100"/>
+          <a:xfrm flipH="1" rot="10800000">
+            <a:off x="5007475" y="3441225"/>
+            <a:ext cx="408600" cy="5400"/>
           </a:xfrm>
           <a:prstGeom prst="straightConnector1">
             <a:avLst/>
@@ -26973,14 +27191,14 @@
       </p:cxnSp>
       <p:sp>
         <p:nvSpPr>
-          <p:cNvPr id="177" name="Google Shape;177;p9"/>
+          <p:cNvPr id="172" name="Google Shape;172;p10"/>
           <p:cNvSpPr txBox="1"/>
           <p:nvPr/>
         </p:nvSpPr>
         <p:spPr>
           <a:xfrm>
-            <a:off x="517150" y="3592725"/>
-            <a:ext cx="2361900" cy="1477500"/>
+            <a:off x="5007475" y="4095125"/>
+            <a:ext cx="2429400" cy="831300"/>
           </a:xfrm>
           <a:prstGeom prst="rect">
             <a:avLst/>
@@ -27023,73 +27241,7 @@
                 <a:cs typeface="Lato"/>
                 <a:sym typeface="Lato"/>
               </a:rPr>
-              <a:t>Es la capacidad de una máquina de ser asociada con el pensamiento humano y emular sus capacidades para resolver problemas y aprender.</a:t>
-            </a:r>
-            <a:endParaRPr b="0" i="0" sz="1400" u="none" cap="none" strike="noStrike">
-              <a:solidFill>
-                <a:srgbClr val="000000"/>
-              </a:solidFill>
-              <a:latin typeface="Lato"/>
-              <a:ea typeface="Lato"/>
-              <a:cs typeface="Lato"/>
-              <a:sym typeface="Lato"/>
-            </a:endParaRPr>
-          </a:p>
-        </p:txBody>
-      </p:sp>
-      <p:sp>
-        <p:nvSpPr>
-          <p:cNvPr id="178" name="Google Shape;178;p9"/>
-          <p:cNvSpPr txBox="1"/>
-          <p:nvPr/>
-        </p:nvSpPr>
-        <p:spPr>
-          <a:xfrm>
-            <a:off x="6869325" y="310625"/>
-            <a:ext cx="2204400" cy="615600"/>
-          </a:xfrm>
-          <a:prstGeom prst="rect">
-            <a:avLst/>
-          </a:prstGeom>
-          <a:noFill/>
-          <a:ln>
-            <a:noFill/>
-          </a:ln>
-        </p:spPr>
-        <p:txBody>
-          <a:bodyPr anchorCtr="0" anchor="t" bIns="91425" lIns="91425" spcFirstLastPara="1" rIns="91425" wrap="square" tIns="91425">
-            <a:spAutoFit/>
-          </a:bodyPr>
-          <a:lstStyle/>
-          <a:p>
-            <a:pPr indent="0" lvl="0" marL="0" marR="0" rtl="0" algn="l">
-              <a:lnSpc>
-                <a:spcPct val="100000"/>
-              </a:lnSpc>
-              <a:spcBef>
-                <a:spcPts val="0"/>
-              </a:spcBef>
-              <a:spcAft>
-                <a:spcPts val="0"/>
-              </a:spcAft>
-              <a:buClr>
-                <a:srgbClr val="000000"/>
-              </a:buClr>
-              <a:buSzPts val="1400"/>
-              <a:buFont typeface="Arial"/>
-              <a:buNone/>
-            </a:pPr>
-            <a:r>
-              <a:rPr b="0" i="0" lang="es-419" sz="1400" u="none" cap="none" strike="noStrike">
-                <a:solidFill>
-                  <a:srgbClr val="000000"/>
-                </a:solidFill>
-                <a:latin typeface="Lato"/>
-                <a:ea typeface="Lato"/>
-                <a:cs typeface="Lato"/>
-                <a:sym typeface="Lato"/>
-              </a:rPr>
-              <a:t>aprendizaje a partir de observaciones.</a:t>
+              <a:t>Y después si las usamos para obtener resultados a partir de nuevos datos.</a:t>
             </a:r>
             <a:endParaRPr b="0" i="0" sz="1400" u="none" cap="none" strike="noStrike">
               <a:solidFill>
@@ -27142,7 +27294,7 @@
                                           </p:stCondLst>
                                         </p:cTn>
                                         <p:tgtEl>
-                                          <p:spTgt spid="160"/>
+                                          <p:spTgt spid="169"/>
                                         </p:tgtEl>
                                         <p:attrNameLst>
                                           <p:attrName>style.visibility</p:attrName>
@@ -27154,57 +27306,12 @@
                                     </p:set>
                                     <p:animEffect filter="fade" transition="in">
                                       <p:cBhvr>
-                                        <p:cTn dur="1500"/>
+                                        <p:cTn dur="1000"/>
                                         <p:tgtEl>
-                                          <p:spTgt spid="160"/>
+                                          <p:spTgt spid="169"/>
                                         </p:tgtEl>
                                       </p:cBhvr>
                                     </p:animEffect>
-                                  </p:childTnLst>
-                                </p:cTn>
-                              </p:par>
-                            </p:childTnLst>
-                          </p:cTn>
-                        </p:par>
-                      </p:childTnLst>
-                    </p:cTn>
-                  </p:par>
-                  <p:par>
-                    <p:cTn fill="hold">
-                      <p:stCondLst>
-                        <p:cond delay="indefinite"/>
-                      </p:stCondLst>
-                      <p:childTnLst>
-                        <p:par>
-                          <p:cTn fill="hold">
-                            <p:stCondLst>
-                              <p:cond delay="0"/>
-                            </p:stCondLst>
-                            <p:childTnLst>
-                              <p:par>
-                                <p:cTn fill="hold" nodeType="clickEffect" presetClass="entr" presetID="1" presetSubtype="0">
-                                  <p:stCondLst>
-                                    <p:cond delay="0"/>
-                                  </p:stCondLst>
-                                  <p:childTnLst>
-                                    <p:set>
-                                      <p:cBhvr>
-                                        <p:cTn dur="1" fill="hold">
-                                          <p:stCondLst>
-                                            <p:cond delay="0"/>
-                                          </p:stCondLst>
-                                        </p:cTn>
-                                        <p:tgtEl>
-                                          <p:spTgt spid="177"/>
-                                        </p:tgtEl>
-                                        <p:attrNameLst>
-                                          <p:attrName>style.visibility</p:attrName>
-                                        </p:attrNameLst>
-                                      </p:cBhvr>
-                                      <p:to>
-                                        <p:strVal val="visible"/>
-                                      </p:to>
-                                    </p:set>
                                   </p:childTnLst>
                                 </p:cTn>
                               </p:par>
@@ -27240,6 +27347,41 @@
                                           </p:stCondLst>
                                         </p:cTn>
                                         <p:tgtEl>
+                                          <p:spTgt spid="160"/>
+                                        </p:tgtEl>
+                                        <p:attrNameLst>
+                                          <p:attrName>style.visibility</p:attrName>
+                                        </p:attrNameLst>
+                                      </p:cBhvr>
+                                      <p:to>
+                                        <p:strVal val="visible"/>
+                                      </p:to>
+                                    </p:set>
+                                    <p:animEffect filter="fade" transition="in">
+                                      <p:cBhvr>
+                                        <p:cTn dur="1"/>
+                                        <p:tgtEl>
+                                          <p:spTgt spid="160"/>
+                                        </p:tgtEl>
+                                      </p:cBhvr>
+                                    </p:animEffect>
+                                  </p:childTnLst>
+                                </p:cTn>
+                              </p:par>
+                              <p:par>
+                                <p:cTn fill="hold" nodeType="withEffect" presetClass="entr" presetID="10" presetSubtype="0">
+                                  <p:stCondLst>
+                                    <p:cond delay="0"/>
+                                  </p:stCondLst>
+                                  <p:childTnLst>
+                                    <p:set>
+                                      <p:cBhvr>
+                                        <p:cTn dur="1" fill="hold">
+                                          <p:stCondLst>
+                                            <p:cond delay="0"/>
+                                          </p:stCondLst>
+                                        </p:cTn>
+                                        <p:tgtEl>
                                           <p:spTgt spid="161"/>
                                         </p:tgtEl>
                                         <p:attrNameLst>
@@ -27262,7 +27404,7 @@
                                 </p:cTn>
                               </p:par>
                               <p:par>
-                                <p:cTn fill="hold" nodeType="withEffect" presetClass="entr" presetID="1" presetSubtype="0">
+                                <p:cTn fill="hold" nodeType="withEffect" presetClass="entr" presetID="10" presetSubtype="0">
                                   <p:stCondLst>
                                     <p:cond delay="0"/>
                                   </p:stCondLst>
@@ -27275,7 +27417,7 @@
                                           </p:stCondLst>
                                         </p:cTn>
                                         <p:tgtEl>
-                                          <p:spTgt spid="165"/>
+                                          <p:spTgt spid="166"/>
                                         </p:tgtEl>
                                         <p:attrNameLst>
                                           <p:attrName>style.visibility</p:attrName>
@@ -27285,29 +27427,54 @@
                                         <p:strVal val="visible"/>
                                       </p:to>
                                     </p:set>
+                                    <p:animEffect filter="fade" transition="in">
+                                      <p:cBhvr>
+                                        <p:cTn dur="1000"/>
+                                        <p:tgtEl>
+                                          <p:spTgt spid="166"/>
+                                        </p:tgtEl>
+                                      </p:cBhvr>
+                                    </p:animEffect>
                                   </p:childTnLst>
                                 </p:cTn>
                               </p:par>
-                            </p:childTnLst>
-                          </p:cTn>
-                        </p:par>
-                      </p:childTnLst>
-                    </p:cTn>
-                  </p:par>
-                  <p:par>
-                    <p:cTn fill="hold">
-                      <p:stCondLst>
-                        <p:cond delay="indefinite"/>
-                      </p:stCondLst>
-                      <p:childTnLst>
-                        <p:par>
-                          <p:cTn fill="hold">
-                            <p:stCondLst>
-                              <p:cond delay="0"/>
-                            </p:stCondLst>
-                            <p:childTnLst>
                               <p:par>
-                                <p:cTn fill="hold" nodeType="clickEffect" presetClass="entr" presetID="10" presetSubtype="0">
+                                <p:cTn fill="hold" nodeType="withEffect" presetClass="entr" presetID="10" presetSubtype="0">
+                                  <p:stCondLst>
+                                    <p:cond delay="0"/>
+                                  </p:stCondLst>
+                                  <p:childTnLst>
+                                    <p:set>
+                                      <p:cBhvr>
+                                        <p:cTn dur="1" fill="hold">
+                                          <p:stCondLst>
+                                            <p:cond delay="0"/>
+                                          </p:stCondLst>
+                                        </p:cTn>
+                                        <p:tgtEl>
+                                          <p:spTgt spid="168"/>
+                                        </p:tgtEl>
+                                        <p:attrNameLst>
+                                          <p:attrName>style.visibility</p:attrName>
+                                        </p:attrNameLst>
+                                      </p:cBhvr>
+                                      <p:to>
+                                        <p:strVal val="visible"/>
+                                      </p:to>
+                                    </p:set>
+                                    <p:animEffect filter="fade" transition="in">
+                                      <p:cBhvr>
+                                        <p:cTn dur="1000"/>
+                                        <p:tgtEl>
+                                          <p:spTgt spid="168"/>
+                                        </p:tgtEl>
+                                      </p:cBhvr>
+                                    </p:animEffect>
+                                  </p:childTnLst>
+                                </p:cTn>
+                              </p:par>
+                              <p:par>
+                                <p:cTn fill="hold" nodeType="withEffect" presetClass="entr" presetID="10" presetSubtype="0">
                                   <p:stCondLst>
                                     <p:cond delay="0"/>
                                   </p:stCondLst>
@@ -27338,353 +27505,6 @@
                                         </p:tgtEl>
                                       </p:cBhvr>
                                     </p:animEffect>
-                                  </p:childTnLst>
-                                </p:cTn>
-                              </p:par>
-                              <p:par>
-                                <p:cTn fill="hold" nodeType="withEffect" presetClass="entr" presetID="1" presetSubtype="0">
-                                  <p:stCondLst>
-                                    <p:cond delay="0"/>
-                                  </p:stCondLst>
-                                  <p:childTnLst>
-                                    <p:set>
-                                      <p:cBhvr>
-                                        <p:cTn dur="1" fill="hold">
-                                          <p:stCondLst>
-                                            <p:cond delay="0"/>
-                                          </p:stCondLst>
-                                        </p:cTn>
-                                        <p:tgtEl>
-                                          <p:spTgt spid="166"/>
-                                        </p:tgtEl>
-                                        <p:attrNameLst>
-                                          <p:attrName>style.visibility</p:attrName>
-                                        </p:attrNameLst>
-                                      </p:cBhvr>
-                                      <p:to>
-                                        <p:strVal val="visible"/>
-                                      </p:to>
-                                    </p:set>
-                                  </p:childTnLst>
-                                </p:cTn>
-                              </p:par>
-                            </p:childTnLst>
-                          </p:cTn>
-                        </p:par>
-                      </p:childTnLst>
-                    </p:cTn>
-                  </p:par>
-                  <p:par>
-                    <p:cTn fill="hold">
-                      <p:stCondLst>
-                        <p:cond delay="indefinite"/>
-                      </p:stCondLst>
-                      <p:childTnLst>
-                        <p:par>
-                          <p:cTn fill="hold">
-                            <p:stCondLst>
-                              <p:cond delay="0"/>
-                            </p:stCondLst>
-                            <p:childTnLst>
-                              <p:par>
-                                <p:cTn fill="hold" nodeType="clickEffect" presetClass="entr" presetID="10" presetSubtype="0">
-                                  <p:stCondLst>
-                                    <p:cond delay="0"/>
-                                  </p:stCondLst>
-                                  <p:childTnLst>
-                                    <p:set>
-                                      <p:cBhvr>
-                                        <p:cTn dur="1" fill="hold">
-                                          <p:stCondLst>
-                                            <p:cond delay="0"/>
-                                          </p:stCondLst>
-                                        </p:cTn>
-                                        <p:tgtEl>
-                                          <p:spTgt spid="163"/>
-                                        </p:tgtEl>
-                                        <p:attrNameLst>
-                                          <p:attrName>style.visibility</p:attrName>
-                                        </p:attrNameLst>
-                                      </p:cBhvr>
-                                      <p:to>
-                                        <p:strVal val="visible"/>
-                                      </p:to>
-                                    </p:set>
-                                    <p:animEffect filter="fade" transition="in">
-                                      <p:cBhvr>
-                                        <p:cTn dur="1000"/>
-                                        <p:tgtEl>
-                                          <p:spTgt spid="163"/>
-                                        </p:tgtEl>
-                                      </p:cBhvr>
-                                    </p:animEffect>
-                                  </p:childTnLst>
-                                </p:cTn>
-                              </p:par>
-                              <p:par>
-                                <p:cTn fill="hold" nodeType="withEffect" presetClass="entr" presetID="1" presetSubtype="0">
-                                  <p:stCondLst>
-                                    <p:cond delay="0"/>
-                                  </p:stCondLst>
-                                  <p:childTnLst>
-                                    <p:set>
-                                      <p:cBhvr>
-                                        <p:cTn dur="1" fill="hold">
-                                          <p:stCondLst>
-                                            <p:cond delay="0"/>
-                                          </p:stCondLst>
-                                        </p:cTn>
-                                        <p:tgtEl>
-                                          <p:spTgt spid="167"/>
-                                        </p:tgtEl>
-                                        <p:attrNameLst>
-                                          <p:attrName>style.visibility</p:attrName>
-                                        </p:attrNameLst>
-                                      </p:cBhvr>
-                                      <p:to>
-                                        <p:strVal val="visible"/>
-                                      </p:to>
-                                    </p:set>
-                                  </p:childTnLst>
-                                </p:cTn>
-                              </p:par>
-                            </p:childTnLst>
-                          </p:cTn>
-                        </p:par>
-                      </p:childTnLst>
-                    </p:cTn>
-                  </p:par>
-                  <p:par>
-                    <p:cTn fill="hold">
-                      <p:stCondLst>
-                        <p:cond delay="indefinite"/>
-                      </p:stCondLst>
-                      <p:childTnLst>
-                        <p:par>
-                          <p:cTn fill="hold">
-                            <p:stCondLst>
-                              <p:cond delay="0"/>
-                            </p:stCondLst>
-                            <p:childTnLst>
-                              <p:par>
-                                <p:cTn fill="hold" nodeType="clickEffect" presetClass="entr" presetID="10" presetSubtype="0">
-                                  <p:stCondLst>
-                                    <p:cond delay="0"/>
-                                  </p:stCondLst>
-                                  <p:childTnLst>
-                                    <p:set>
-                                      <p:cBhvr>
-                                        <p:cTn dur="1" fill="hold">
-                                          <p:stCondLst>
-                                            <p:cond delay="0"/>
-                                          </p:stCondLst>
-                                        </p:cTn>
-                                        <p:tgtEl>
-                                          <p:spTgt spid="164"/>
-                                        </p:tgtEl>
-                                        <p:attrNameLst>
-                                          <p:attrName>style.visibility</p:attrName>
-                                        </p:attrNameLst>
-                                      </p:cBhvr>
-                                      <p:to>
-                                        <p:strVal val="visible"/>
-                                      </p:to>
-                                    </p:set>
-                                    <p:animEffect filter="fade" transition="in">
-                                      <p:cBhvr>
-                                        <p:cTn dur="1000"/>
-                                        <p:tgtEl>
-                                          <p:spTgt spid="164"/>
-                                        </p:tgtEl>
-                                      </p:cBhvr>
-                                    </p:animEffect>
-                                  </p:childTnLst>
-                                </p:cTn>
-                              </p:par>
-                              <p:par>
-                                <p:cTn fill="hold" nodeType="withEffect" presetClass="entr" presetID="1" presetSubtype="0">
-                                  <p:stCondLst>
-                                    <p:cond delay="0"/>
-                                  </p:stCondLst>
-                                  <p:childTnLst>
-                                    <p:set>
-                                      <p:cBhvr>
-                                        <p:cTn dur="1" fill="hold">
-                                          <p:stCondLst>
-                                            <p:cond delay="0"/>
-                                          </p:stCondLst>
-                                        </p:cTn>
-                                        <p:tgtEl>
-                                          <p:spTgt spid="168"/>
-                                        </p:tgtEl>
-                                        <p:attrNameLst>
-                                          <p:attrName>style.visibility</p:attrName>
-                                        </p:attrNameLst>
-                                      </p:cBhvr>
-                                      <p:to>
-                                        <p:strVal val="visible"/>
-                                      </p:to>
-                                    </p:set>
-                                  </p:childTnLst>
-                                </p:cTn>
-                              </p:par>
-                            </p:childTnLst>
-                          </p:cTn>
-                        </p:par>
-                      </p:childTnLst>
-                    </p:cTn>
-                  </p:par>
-                  <p:par>
-                    <p:cTn fill="hold">
-                      <p:stCondLst>
-                        <p:cond delay="indefinite"/>
-                      </p:stCondLst>
-                      <p:childTnLst>
-                        <p:par>
-                          <p:cTn fill="hold">
-                            <p:stCondLst>
-                              <p:cond delay="0"/>
-                            </p:stCondLst>
-                            <p:childTnLst>
-                              <p:par>
-                                <p:cTn fill="hold" nodeType="clickEffect" presetClass="entr" presetID="10" presetSubtype="0">
-                                  <p:stCondLst>
-                                    <p:cond delay="0"/>
-                                  </p:stCondLst>
-                                  <p:childTnLst>
-                                    <p:set>
-                                      <p:cBhvr>
-                                        <p:cTn dur="1" fill="hold">
-                                          <p:stCondLst>
-                                            <p:cond delay="0"/>
-                                          </p:stCondLst>
-                                        </p:cTn>
-                                        <p:tgtEl>
-                                          <p:spTgt spid="169"/>
-                                        </p:tgtEl>
-                                        <p:attrNameLst>
-                                          <p:attrName>style.visibility</p:attrName>
-                                        </p:attrNameLst>
-                                      </p:cBhvr>
-                                      <p:to>
-                                        <p:strVal val="visible"/>
-                                      </p:to>
-                                    </p:set>
-                                    <p:animEffect filter="fade" transition="in">
-                                      <p:cBhvr>
-                                        <p:cTn dur="1000"/>
-                                        <p:tgtEl>
-                                          <p:spTgt spid="169"/>
-                                        </p:tgtEl>
-                                      </p:cBhvr>
-                                    </p:animEffect>
-                                  </p:childTnLst>
-                                </p:cTn>
-                              </p:par>
-                              <p:par>
-                                <p:cTn fill="hold" nodeType="withEffect" presetClass="entr" presetID="1" presetSubtype="0">
-                                  <p:stCondLst>
-                                    <p:cond delay="0"/>
-                                  </p:stCondLst>
-                                  <p:childTnLst>
-                                    <p:set>
-                                      <p:cBhvr>
-                                        <p:cTn dur="1" fill="hold">
-                                          <p:stCondLst>
-                                            <p:cond delay="0"/>
-                                          </p:stCondLst>
-                                        </p:cTn>
-                                        <p:tgtEl>
-                                          <p:spTgt spid="173"/>
-                                        </p:tgtEl>
-                                        <p:attrNameLst>
-                                          <p:attrName>style.visibility</p:attrName>
-                                        </p:attrNameLst>
-                                      </p:cBhvr>
-                                      <p:to>
-                                        <p:strVal val="visible"/>
-                                      </p:to>
-                                    </p:set>
-                                  </p:childTnLst>
-                                </p:cTn>
-                              </p:par>
-                            </p:childTnLst>
-                          </p:cTn>
-                        </p:par>
-                      </p:childTnLst>
-                    </p:cTn>
-                  </p:par>
-                  <p:par>
-                    <p:cTn fill="hold">
-                      <p:stCondLst>
-                        <p:cond delay="indefinite"/>
-                      </p:stCondLst>
-                      <p:childTnLst>
-                        <p:par>
-                          <p:cTn fill="hold">
-                            <p:stCondLst>
-                              <p:cond delay="0"/>
-                            </p:stCondLst>
-                            <p:childTnLst>
-                              <p:par>
-                                <p:cTn fill="hold" nodeType="clickEffect" presetClass="entr" presetID="10" presetSubtype="0">
-                                  <p:stCondLst>
-                                    <p:cond delay="0"/>
-                                  </p:stCondLst>
-                                  <p:childTnLst>
-                                    <p:set>
-                                      <p:cBhvr>
-                                        <p:cTn dur="1" fill="hold">
-                                          <p:stCondLst>
-                                            <p:cond delay="0"/>
-                                          </p:stCondLst>
-                                        </p:cTn>
-                                        <p:tgtEl>
-                                          <p:spTgt spid="171"/>
-                                        </p:tgtEl>
-                                        <p:attrNameLst>
-                                          <p:attrName>style.visibility</p:attrName>
-                                        </p:attrNameLst>
-                                      </p:cBhvr>
-                                      <p:to>
-                                        <p:strVal val="visible"/>
-                                      </p:to>
-                                    </p:set>
-                                    <p:animEffect filter="fade" transition="in">
-                                      <p:cBhvr>
-                                        <p:cTn dur="1000"/>
-                                        <p:tgtEl>
-                                          <p:spTgt spid="171"/>
-                                        </p:tgtEl>
-                                      </p:cBhvr>
-                                    </p:animEffect>
-                                  </p:childTnLst>
-                                </p:cTn>
-                              </p:par>
-                              <p:par>
-                                <p:cTn fill="hold" nodeType="withEffect" presetClass="entr" presetID="1" presetSubtype="0">
-                                  <p:stCondLst>
-                                    <p:cond delay="0"/>
-                                  </p:stCondLst>
-                                  <p:childTnLst>
-                                    <p:set>
-                                      <p:cBhvr>
-                                        <p:cTn dur="1" fill="hold">
-                                          <p:stCondLst>
-                                            <p:cond delay="0"/>
-                                          </p:stCondLst>
-                                        </p:cTn>
-                                        <p:tgtEl>
-                                          <p:spTgt spid="174"/>
-                                        </p:tgtEl>
-                                        <p:attrNameLst>
-                                          <p:attrName>style.visibility</p:attrName>
-                                        </p:attrNameLst>
-                                      </p:cBhvr>
-                                      <p:to>
-                                        <p:strVal val="visible"/>
-                                      </p:to>
-                                    </p:set>
                                   </p:childTnLst>
                                 </p:cTn>
                               </p:par>
@@ -27760,7 +27580,7 @@
                             </p:stCondLst>
                             <p:childTnLst>
                               <p:par>
-                                <p:cTn fill="hold" nodeType="clickEffect" presetClass="entr" presetID="1" presetSubtype="0">
+                                <p:cTn fill="hold" nodeType="clickEffect" presetClass="entr" presetID="10" presetSubtype="0">
                                   <p:stCondLst>
                                     <p:cond delay="0"/>
                                   </p:stCondLst>
@@ -27773,7 +27593,7 @@
                                           </p:stCondLst>
                                         </p:cTn>
                                         <p:tgtEl>
-                                          <p:spTgt spid="178"/>
+                                          <p:spTgt spid="163"/>
                                         </p:tgtEl>
                                         <p:attrNameLst>
                                           <p:attrName>style.visibility</p:attrName>
@@ -27783,11 +27603,19 @@
                                         <p:strVal val="visible"/>
                                       </p:to>
                                     </p:set>
+                                    <p:animEffect filter="fade" transition="in">
+                                      <p:cBhvr>
+                                        <p:cTn dur="1000"/>
+                                        <p:tgtEl>
+                                          <p:spTgt spid="163"/>
+                                        </p:tgtEl>
+                                      </p:cBhvr>
+                                    </p:animEffect>
                                   </p:childTnLst>
                                 </p:cTn>
                               </p:par>
                               <p:par>
-                                <p:cTn fill="hold" nodeType="withEffect" presetClass="entr" presetID="1" presetSubtype="0">
+                                <p:cTn fill="hold" nodeType="withEffect" presetClass="entr" presetID="10" presetSubtype="0">
                                   <p:stCondLst>
                                     <p:cond delay="0"/>
                                   </p:stCondLst>
@@ -27800,7 +27628,7 @@
                                           </p:stCondLst>
                                         </p:cTn>
                                         <p:tgtEl>
-                                          <p:spTgt spid="175"/>
+                                          <p:spTgt spid="164"/>
                                         </p:tgtEl>
                                         <p:attrNameLst>
                                           <p:attrName>style.visibility</p:attrName>
@@ -27810,6 +27638,119 @@
                                         <p:strVal val="visible"/>
                                       </p:to>
                                     </p:set>
+                                    <p:animEffect filter="fade" transition="in">
+                                      <p:cBhvr>
+                                        <p:cTn dur="1000"/>
+                                        <p:tgtEl>
+                                          <p:spTgt spid="164"/>
+                                        </p:tgtEl>
+                                      </p:cBhvr>
+                                    </p:animEffect>
+                                  </p:childTnLst>
+                                </p:cTn>
+                              </p:par>
+                              <p:par>
+                                <p:cTn fill="hold" nodeType="withEffect" presetClass="entr" presetID="10" presetSubtype="0">
+                                  <p:stCondLst>
+                                    <p:cond delay="0"/>
+                                  </p:stCondLst>
+                                  <p:childTnLst>
+                                    <p:set>
+                                      <p:cBhvr>
+                                        <p:cTn dur="1" fill="hold">
+                                          <p:stCondLst>
+                                            <p:cond delay="0"/>
+                                          </p:stCondLst>
+                                        </p:cTn>
+                                        <p:tgtEl>
+                                          <p:spTgt spid="165"/>
+                                        </p:tgtEl>
+                                        <p:attrNameLst>
+                                          <p:attrName>style.visibility</p:attrName>
+                                        </p:attrNameLst>
+                                      </p:cBhvr>
+                                      <p:to>
+                                        <p:strVal val="visible"/>
+                                      </p:to>
+                                    </p:set>
+                                    <p:animEffect filter="fade" transition="in">
+                                      <p:cBhvr>
+                                        <p:cTn dur="1000"/>
+                                        <p:tgtEl>
+                                          <p:spTgt spid="165"/>
+                                        </p:tgtEl>
+                                      </p:cBhvr>
+                                    </p:animEffect>
+                                  </p:childTnLst>
+                                </p:cTn>
+                              </p:par>
+                              <p:par>
+                                <p:cTn fill="hold" nodeType="withEffect" presetClass="entr" presetID="10" presetSubtype="0">
+                                  <p:stCondLst>
+                                    <p:cond delay="0"/>
+                                  </p:stCondLst>
+                                  <p:childTnLst>
+                                    <p:set>
+                                      <p:cBhvr>
+                                        <p:cTn dur="1" fill="hold">
+                                          <p:stCondLst>
+                                            <p:cond delay="0"/>
+                                          </p:stCondLst>
+                                        </p:cTn>
+                                        <p:tgtEl>
+                                          <p:spTgt spid="167"/>
+                                        </p:tgtEl>
+                                        <p:attrNameLst>
+                                          <p:attrName>style.visibility</p:attrName>
+                                        </p:attrNameLst>
+                                      </p:cBhvr>
+                                      <p:to>
+                                        <p:strVal val="visible"/>
+                                      </p:to>
+                                    </p:set>
+                                    <p:animEffect filter="fade" transition="in">
+                                      <p:cBhvr>
+                                        <p:cTn dur="1000"/>
+                                        <p:tgtEl>
+                                          <p:spTgt spid="167"/>
+                                        </p:tgtEl>
+                                      </p:cBhvr>
+                                    </p:animEffect>
+                                  </p:childTnLst>
+                                </p:cTn>
+                              </p:par>
+                              <p:par>
+                                <p:cTn fill="hold" nodeType="withEffect" presetClass="entr" presetID="10" presetSubtype="0">
+                                  <p:stCondLst>
+                                    <p:cond delay="0"/>
+                                  </p:stCondLst>
+                                  <p:childTnLst>
+                                    <p:set>
+                                      <p:cBhvr>
+                                        <p:cTn dur="1" fill="hold">
+                                          <p:stCondLst>
+                                            <p:cond delay="0"/>
+                                          </p:stCondLst>
+                                        </p:cTn>
+                                        <p:tgtEl>
+                                          <p:spTgt spid="171"/>
+                                        </p:tgtEl>
+                                        <p:attrNameLst>
+                                          <p:attrName>style.visibility</p:attrName>
+                                        </p:attrNameLst>
+                                      </p:cBhvr>
+                                      <p:to>
+                                        <p:strVal val="visible"/>
+                                      </p:to>
+                                    </p:set>
+                                    <p:animEffect filter="fade" transition="in">
+                                      <p:cBhvr>
+                                        <p:cTn dur="1000"/>
+                                        <p:tgtEl>
+                                          <p:spTgt spid="171"/>
+                                        </p:tgtEl>
+                                      </p:cBhvr>
+                                    </p:animEffect>
                                   </p:childTnLst>
                                 </p:cTn>
                               </p:par>
@@ -27857,39 +27798,12 @@
                                     </p:set>
                                     <p:animEffect filter="fade" transition="in">
                                       <p:cBhvr>
-                                        <p:cTn dur="1000"/>
+                                        <p:cTn dur="1"/>
                                         <p:tgtEl>
                                           <p:spTgt spid="172"/>
                                         </p:tgtEl>
                                       </p:cBhvr>
                                     </p:animEffect>
-                                  </p:childTnLst>
-                                </p:cTn>
-                              </p:par>
-                              <p:par>
-                                <p:cTn fill="hold" nodeType="withEffect" presetClass="entr" presetID="1" presetSubtype="0">
-                                  <p:stCondLst>
-                                    <p:cond delay="0"/>
-                                  </p:stCondLst>
-                                  <p:childTnLst>
-                                    <p:set>
-                                      <p:cBhvr>
-                                        <p:cTn dur="1" fill="hold">
-                                          <p:stCondLst>
-                                            <p:cond delay="0"/>
-                                          </p:stCondLst>
-                                        </p:cTn>
-                                        <p:tgtEl>
-                                          <p:spTgt spid="176"/>
-                                        </p:tgtEl>
-                                        <p:attrNameLst>
-                                          <p:attrName>style.visibility</p:attrName>
-                                        </p:attrNameLst>
-                                      </p:cBhvr>
-                                      <p:to>
-                                        <p:strVal val="visible"/>
-                                      </p:to>
-                                    </p:set>
                                   </p:childTnLst>
                                 </p:cTn>
                               </p:par>
@@ -27925,6 +27839,285 @@
 </file>
 
 <file path=ppt/theme/theme1.xml><?xml version="1.0" encoding="utf-8"?>
+<a:theme xmlns:a="http://schemas.openxmlformats.org/drawingml/2006/main" xmlns:r="http://schemas.openxmlformats.org/officeDocument/2006/relationships">
+  <a:themeElements>
+    <a:clrScheme name="Default">
+      <a:dk1>
+        <a:srgbClr val="000000"/>
+      </a:dk1>
+      <a:lt1>
+        <a:srgbClr val="FFFFFF"/>
+      </a:lt1>
+      <a:dk2>
+        <a:srgbClr val="158158"/>
+      </a:dk2>
+      <a:lt2>
+        <a:srgbClr val="F3F3F3"/>
+      </a:lt2>
+      <a:accent1>
+        <a:srgbClr val="058DC7"/>
+      </a:accent1>
+      <a:accent2>
+        <a:srgbClr val="50B432"/>
+      </a:accent2>
+      <a:accent3>
+        <a:srgbClr val="ED561B"/>
+      </a:accent3>
+      <a:accent4>
+        <a:srgbClr val="EDEF00"/>
+      </a:accent4>
+      <a:accent5>
+        <a:srgbClr val="24CBE5"/>
+      </a:accent5>
+      <a:accent6>
+        <a:srgbClr val="64E572"/>
+      </a:accent6>
+      <a:hlink>
+        <a:srgbClr val="2200CC"/>
+      </a:hlink>
+      <a:folHlink>
+        <a:srgbClr val="551A8B"/>
+      </a:folHlink>
+    </a:clrScheme>
+    <a:fontScheme name="Office">
+      <a:majorFont>
+        <a:latin typeface="Arial"/>
+        <a:ea typeface=""/>
+        <a:cs typeface=""/>
+        <a:font script="Jpan" typeface="ＭＳ Ｐゴシック"/>
+        <a:font script="Hang" typeface="맑은 고딕"/>
+        <a:font script="Hans" typeface="宋体"/>
+        <a:font script="Hant" typeface="新細明體"/>
+        <a:font script="Arab" typeface="Times New Roman"/>
+        <a:font script="Hebr" typeface="Times New Roman"/>
+        <a:font script="Thai" typeface="Angsana New"/>
+        <a:font script="Ethi" typeface="Nyala"/>
+        <a:font script="Beng" typeface="Vrinda"/>
+        <a:font script="Gujr" typeface="Shruti"/>
+        <a:font script="Khmr" typeface="MoolBoran"/>
+        <a:font script="Knda" typeface="Tunga"/>
+        <a:font script="Guru" typeface="Raavi"/>
+        <a:font script="Cans" typeface="Euphemia"/>
+        <a:font script="Cher" typeface="Plantagenet Cherokee"/>
+        <a:font script="Yiii" typeface="Microsoft Yi Baiti"/>
+        <a:font script="Tibt" typeface="Microsoft Himalaya"/>
+        <a:font script="Thaa" typeface="MV Boli"/>
+        <a:font script="Deva" typeface="Mangal"/>
+        <a:font script="Telu" typeface="Gautami"/>
+        <a:font script="Taml" typeface="Latha"/>
+        <a:font script="Syrc" typeface="Estrangelo Edessa"/>
+        <a:font script="Orya" typeface="Kalinga"/>
+        <a:font script="Mlym" typeface="Kartika"/>
+        <a:font script="Laoo" typeface="DokChampa"/>
+        <a:font script="Sinh" typeface="Iskoola Pota"/>
+        <a:font script="Mong" typeface="Mongolian Baiti"/>
+        <a:font script="Viet" typeface="Times New Roman"/>
+        <a:font script="Uigh" typeface="Microsoft Uighur"/>
+        <a:font script="Geor" typeface="Sylfaen"/>
+      </a:majorFont>
+      <a:minorFont>
+        <a:latin typeface="Arial"/>
+        <a:ea typeface=""/>
+        <a:cs typeface=""/>
+        <a:font script="Jpan" typeface="ＭＳ Ｐゴシック"/>
+        <a:font script="Hang" typeface="맑은 고딕"/>
+        <a:font script="Hans" typeface="宋体"/>
+        <a:font script="Hant" typeface="新細明體"/>
+        <a:font script="Arab" typeface="Arial"/>
+        <a:font script="Hebr" typeface="Arial"/>
+        <a:font script="Thai" typeface="Cordia New"/>
+        <a:font script="Ethi" typeface="Nyala"/>
+        <a:font script="Beng" typeface="Vrinda"/>
+        <a:font script="Gujr" typeface="Shruti"/>
+        <a:font script="Khmr" typeface="DaunPenh"/>
+        <a:font script="Knda" typeface="Tunga"/>
+        <a:font script="Guru" typeface="Raavi"/>
+        <a:font script="Cans" typeface="Euphemia"/>
+        <a:font script="Cher" typeface="Plantagenet Cherokee"/>
+        <a:font script="Yiii" typeface="Microsoft Yi Baiti"/>
+        <a:font script="Tibt" typeface="Microsoft Himalaya"/>
+        <a:font script="Thaa" typeface="MV Boli"/>
+        <a:font script="Deva" typeface="Mangal"/>
+        <a:font script="Telu" typeface="Gautami"/>
+        <a:font script="Taml" typeface="Latha"/>
+        <a:font script="Syrc" typeface="Estrangelo Edessa"/>
+        <a:font script="Orya" typeface="Kalinga"/>
+        <a:font script="Mlym" typeface="Kartika"/>
+        <a:font script="Laoo" typeface="DokChampa"/>
+        <a:font script="Sinh" typeface="Iskoola Pota"/>
+        <a:font script="Mong" typeface="Mongolian Baiti"/>
+        <a:font script="Viet" typeface="Arial"/>
+        <a:font script="Uigh" typeface="Microsoft Uighur"/>
+        <a:font script="Geor" typeface="Sylfaen"/>
+      </a:minorFont>
+    </a:fontScheme>
+    <a:fmtScheme name="Office">
+      <a:fillStyleLst>
+        <a:solidFill>
+          <a:schemeClr val="phClr"/>
+        </a:solidFill>
+        <a:gradFill rotWithShape="1">
+          <a:gsLst>
+            <a:gs pos="0">
+              <a:schemeClr val="phClr">
+                <a:tint val="50000"/>
+                <a:satMod val="300000"/>
+              </a:schemeClr>
+            </a:gs>
+            <a:gs pos="35000">
+              <a:schemeClr val="phClr">
+                <a:tint val="37000"/>
+                <a:satMod val="300000"/>
+              </a:schemeClr>
+            </a:gs>
+            <a:gs pos="100000">
+              <a:schemeClr val="phClr">
+                <a:tint val="15000"/>
+                <a:satMod val="350000"/>
+              </a:schemeClr>
+            </a:gs>
+          </a:gsLst>
+          <a:lin ang="16200000" scaled="1"/>
+        </a:gradFill>
+        <a:gradFill rotWithShape="1">
+          <a:gsLst>
+            <a:gs pos="0">
+              <a:schemeClr val="phClr">
+                <a:tint val="100000"/>
+                <a:shade val="100000"/>
+                <a:satMod val="130000"/>
+              </a:schemeClr>
+            </a:gs>
+            <a:gs pos="100000">
+              <a:schemeClr val="phClr">
+                <a:tint val="50000"/>
+                <a:shade val="100000"/>
+                <a:satMod val="350000"/>
+              </a:schemeClr>
+            </a:gs>
+          </a:gsLst>
+          <a:lin ang="16200000" scaled="0"/>
+        </a:gradFill>
+      </a:fillStyleLst>
+      <a:lnStyleLst>
+        <a:ln w="9525" cap="flat" cmpd="sng" algn="ctr">
+          <a:solidFill>
+            <a:schemeClr val="phClr">
+              <a:shade val="95000"/>
+              <a:satMod val="105000"/>
+            </a:schemeClr>
+          </a:solidFill>
+          <a:prstDash val="solid"/>
+        </a:ln>
+        <a:ln w="25400" cap="flat" cmpd="sng" algn="ctr">
+          <a:solidFill>
+            <a:schemeClr val="phClr"/>
+          </a:solidFill>
+          <a:prstDash val="solid"/>
+        </a:ln>
+        <a:ln w="38100" cap="flat" cmpd="sng" algn="ctr">
+          <a:solidFill>
+            <a:schemeClr val="phClr"/>
+          </a:solidFill>
+          <a:prstDash val="solid"/>
+        </a:ln>
+      </a:lnStyleLst>
+      <a:effectStyleLst>
+        <a:effectStyle>
+          <a:effectLst>
+            <a:outerShdw blurRad="40000" dist="20000" dir="5400000" rotWithShape="0">
+              <a:srgbClr val="000000">
+                <a:alpha val="38000"/>
+              </a:srgbClr>
+            </a:outerShdw>
+          </a:effectLst>
+        </a:effectStyle>
+        <a:effectStyle>
+          <a:effectLst>
+            <a:outerShdw blurRad="40000" dist="23000" dir="5400000" rotWithShape="0">
+              <a:srgbClr val="000000">
+                <a:alpha val="35000"/>
+              </a:srgbClr>
+            </a:outerShdw>
+          </a:effectLst>
+        </a:effectStyle>
+        <a:effectStyle>
+          <a:effectLst>
+            <a:outerShdw blurRad="40000" dist="23000" dir="5400000" rotWithShape="0">
+              <a:srgbClr val="000000">
+                <a:alpha val="35000"/>
+              </a:srgbClr>
+            </a:outerShdw>
+          </a:effectLst>
+          <a:scene3d>
+            <a:camera prst="orthographicFront">
+              <a:rot lat="0" lon="0" rev="0"/>
+            </a:camera>
+            <a:lightRig rig="threePt" dir="t">
+              <a:rot lat="0" lon="0" rev="1200000"/>
+            </a:lightRig>
+          </a:scene3d>
+          <a:sp3d>
+            <a:bevelT w="63500" h="25400"/>
+          </a:sp3d>
+        </a:effectStyle>
+      </a:effectStyleLst>
+      <a:bgFillStyleLst>
+        <a:solidFill>
+          <a:schemeClr val="phClr"/>
+        </a:solidFill>
+        <a:gradFill rotWithShape="1">
+          <a:gsLst>
+            <a:gs pos="0">
+              <a:schemeClr val="phClr">
+                <a:tint val="40000"/>
+                <a:satMod val="350000"/>
+              </a:schemeClr>
+            </a:gs>
+            <a:gs pos="40000">
+              <a:schemeClr val="phClr">
+                <a:tint val="45000"/>
+                <a:shade val="99000"/>
+                <a:satMod val="350000"/>
+              </a:schemeClr>
+            </a:gs>
+            <a:gs pos="100000">
+              <a:schemeClr val="phClr">
+                <a:shade val="20000"/>
+                <a:satMod val="255000"/>
+              </a:schemeClr>
+            </a:gs>
+          </a:gsLst>
+          <a:path path="circle">
+            <a:fillToRect l="50000" t="-80000" r="50000" b="180000"/>
+          </a:path>
+        </a:gradFill>
+        <a:gradFill rotWithShape="1">
+          <a:gsLst>
+            <a:gs pos="0">
+              <a:schemeClr val="phClr">
+                <a:tint val="80000"/>
+                <a:satMod val="300000"/>
+              </a:schemeClr>
+            </a:gs>
+            <a:gs pos="100000">
+              <a:schemeClr val="phClr">
+                <a:shade val="30000"/>
+                <a:satMod val="200000"/>
+              </a:schemeClr>
+            </a:gs>
+          </a:gsLst>
+          <a:path path="circle">
+            <a:fillToRect l="50000" t="50000" r="50000" b="50000"/>
+          </a:path>
+        </a:gradFill>
+      </a:bgFillStyleLst>
+    </a:fmtScheme>
+  </a:themeElements>
+</a:theme>
+</file>
+
+<file path=ppt/theme/theme2.xml><?xml version="1.0" encoding="utf-8"?>
 <a:theme xmlns:a="http://schemas.openxmlformats.org/drawingml/2006/main" xmlns:r="http://schemas.openxmlformats.org/officeDocument/2006/relationships" name="Streamline">
   <a:themeElements>
     <a:clrScheme name="Streamline">
@@ -28201,283 +28394,4 @@
     </a:fmtScheme>
   </a:themeElements>
 </a:theme>
-</file>
-
-<file path=ppt/theme/theme2.xml><?xml version="1.0" encoding="utf-8"?>
-<a:theme xmlns:a="http://schemas.openxmlformats.org/drawingml/2006/main" xmlns:r="http://schemas.openxmlformats.org/officeDocument/2006/relationships">
-  <a:themeElements>
-    <a:clrScheme name="Default">
-      <a:dk1>
-        <a:srgbClr val="000000"/>
-      </a:dk1>
-      <a:lt1>
-        <a:srgbClr val="FFFFFF"/>
-      </a:lt1>
-      <a:dk2>
-        <a:srgbClr val="158158"/>
-      </a:dk2>
-      <a:lt2>
-        <a:srgbClr val="F3F3F3"/>
-      </a:lt2>
-      <a:accent1>
-        <a:srgbClr val="058DC7"/>
-      </a:accent1>
-      <a:accent2>
-        <a:srgbClr val="50B432"/>
-      </a:accent2>
-      <a:accent3>
-        <a:srgbClr val="ED561B"/>
-      </a:accent3>
-      <a:accent4>
-        <a:srgbClr val="EDEF00"/>
-      </a:accent4>
-      <a:accent5>
-        <a:srgbClr val="24CBE5"/>
-      </a:accent5>
-      <a:accent6>
-        <a:srgbClr val="64E572"/>
-      </a:accent6>
-      <a:hlink>
-        <a:srgbClr val="2200CC"/>
-      </a:hlink>
-      <a:folHlink>
-        <a:srgbClr val="551A8B"/>
-      </a:folHlink>
-    </a:clrScheme>
-    <a:fontScheme name="Office">
-      <a:majorFont>
-        <a:latin typeface="Arial"/>
-        <a:ea typeface=""/>
-        <a:cs typeface=""/>
-        <a:font script="Jpan" typeface="ＭＳ Ｐゴシック"/>
-        <a:font script="Hang" typeface="맑은 고딕"/>
-        <a:font script="Hans" typeface="宋体"/>
-        <a:font script="Hant" typeface="新細明體"/>
-        <a:font script="Arab" typeface="Times New Roman"/>
-        <a:font script="Hebr" typeface="Times New Roman"/>
-        <a:font script="Thai" typeface="Angsana New"/>
-        <a:font script="Ethi" typeface="Nyala"/>
-        <a:font script="Beng" typeface="Vrinda"/>
-        <a:font script="Gujr" typeface="Shruti"/>
-        <a:font script="Khmr" typeface="MoolBoran"/>
-        <a:font script="Knda" typeface="Tunga"/>
-        <a:font script="Guru" typeface="Raavi"/>
-        <a:font script="Cans" typeface="Euphemia"/>
-        <a:font script="Cher" typeface="Plantagenet Cherokee"/>
-        <a:font script="Yiii" typeface="Microsoft Yi Baiti"/>
-        <a:font script="Tibt" typeface="Microsoft Himalaya"/>
-        <a:font script="Thaa" typeface="MV Boli"/>
-        <a:font script="Deva" typeface="Mangal"/>
-        <a:font script="Telu" typeface="Gautami"/>
-        <a:font script="Taml" typeface="Latha"/>
-        <a:font script="Syrc" typeface="Estrangelo Edessa"/>
-        <a:font script="Orya" typeface="Kalinga"/>
-        <a:font script="Mlym" typeface="Kartika"/>
-        <a:font script="Laoo" typeface="DokChampa"/>
-        <a:font script="Sinh" typeface="Iskoola Pota"/>
-        <a:font script="Mong" typeface="Mongolian Baiti"/>
-        <a:font script="Viet" typeface="Times New Roman"/>
-        <a:font script="Uigh" typeface="Microsoft Uighur"/>
-        <a:font script="Geor" typeface="Sylfaen"/>
-      </a:majorFont>
-      <a:minorFont>
-        <a:latin typeface="Arial"/>
-        <a:ea typeface=""/>
-        <a:cs typeface=""/>
-        <a:font script="Jpan" typeface="ＭＳ Ｐゴシック"/>
-        <a:font script="Hang" typeface="맑은 고딕"/>
-        <a:font script="Hans" typeface="宋体"/>
-        <a:font script="Hant" typeface="新細明體"/>
-        <a:font script="Arab" typeface="Arial"/>
-        <a:font script="Hebr" typeface="Arial"/>
-        <a:font script="Thai" typeface="Cordia New"/>
-        <a:font script="Ethi" typeface="Nyala"/>
-        <a:font script="Beng" typeface="Vrinda"/>
-        <a:font script="Gujr" typeface="Shruti"/>
-        <a:font script="Khmr" typeface="DaunPenh"/>
-        <a:font script="Knda" typeface="Tunga"/>
-        <a:font script="Guru" typeface="Raavi"/>
-        <a:font script="Cans" typeface="Euphemia"/>
-        <a:font script="Cher" typeface="Plantagenet Cherokee"/>
-        <a:font script="Yiii" typeface="Microsoft Yi Baiti"/>
-        <a:font script="Tibt" typeface="Microsoft Himalaya"/>
-        <a:font script="Thaa" typeface="MV Boli"/>
-        <a:font script="Deva" typeface="Mangal"/>
-        <a:font script="Telu" typeface="Gautami"/>
-        <a:font script="Taml" typeface="Latha"/>
-        <a:font script="Syrc" typeface="Estrangelo Edessa"/>
-        <a:font script="Orya" typeface="Kalinga"/>
-        <a:font script="Mlym" typeface="Kartika"/>
-        <a:font script="Laoo" typeface="DokChampa"/>
-        <a:font script="Sinh" typeface="Iskoola Pota"/>
-        <a:font script="Mong" typeface="Mongolian Baiti"/>
-        <a:font script="Viet" typeface="Arial"/>
-        <a:font script="Uigh" typeface="Microsoft Uighur"/>
-        <a:font script="Geor" typeface="Sylfaen"/>
-      </a:minorFont>
-    </a:fontScheme>
-    <a:fmtScheme name="Office">
-      <a:fillStyleLst>
-        <a:solidFill>
-          <a:schemeClr val="phClr"/>
-        </a:solidFill>
-        <a:gradFill rotWithShape="1">
-          <a:gsLst>
-            <a:gs pos="0">
-              <a:schemeClr val="phClr">
-                <a:tint val="50000"/>
-                <a:satMod val="300000"/>
-              </a:schemeClr>
-            </a:gs>
-            <a:gs pos="35000">
-              <a:schemeClr val="phClr">
-                <a:tint val="37000"/>
-                <a:satMod val="300000"/>
-              </a:schemeClr>
-            </a:gs>
-            <a:gs pos="100000">
-              <a:schemeClr val="phClr">
-                <a:tint val="15000"/>
-                <a:satMod val="350000"/>
-              </a:schemeClr>
-            </a:gs>
-          </a:gsLst>
-          <a:lin ang="16200000" scaled="1"/>
-        </a:gradFill>
-        <a:gradFill rotWithShape="1">
-          <a:gsLst>
-            <a:gs pos="0">
-              <a:schemeClr val="phClr">
-                <a:tint val="100000"/>
-                <a:shade val="100000"/>
-                <a:satMod val="130000"/>
-              </a:schemeClr>
-            </a:gs>
-            <a:gs pos="100000">
-              <a:schemeClr val="phClr">
-                <a:tint val="50000"/>
-                <a:shade val="100000"/>
-                <a:satMod val="350000"/>
-              </a:schemeClr>
-            </a:gs>
-          </a:gsLst>
-          <a:lin ang="16200000" scaled="0"/>
-        </a:gradFill>
-      </a:fillStyleLst>
-      <a:lnStyleLst>
-        <a:ln w="9525" cap="flat" cmpd="sng" algn="ctr">
-          <a:solidFill>
-            <a:schemeClr val="phClr">
-              <a:shade val="95000"/>
-              <a:satMod val="105000"/>
-            </a:schemeClr>
-          </a:solidFill>
-          <a:prstDash val="solid"/>
-        </a:ln>
-        <a:ln w="25400" cap="flat" cmpd="sng" algn="ctr">
-          <a:solidFill>
-            <a:schemeClr val="phClr"/>
-          </a:solidFill>
-          <a:prstDash val="solid"/>
-        </a:ln>
-        <a:ln w="38100" cap="flat" cmpd="sng" algn="ctr">
-          <a:solidFill>
-            <a:schemeClr val="phClr"/>
-          </a:solidFill>
-          <a:prstDash val="solid"/>
-        </a:ln>
-      </a:lnStyleLst>
-      <a:effectStyleLst>
-        <a:effectStyle>
-          <a:effectLst>
-            <a:outerShdw blurRad="40000" dist="20000" dir="5400000" rotWithShape="0">
-              <a:srgbClr val="000000">
-                <a:alpha val="38000"/>
-              </a:srgbClr>
-            </a:outerShdw>
-          </a:effectLst>
-        </a:effectStyle>
-        <a:effectStyle>
-          <a:effectLst>
-            <a:outerShdw blurRad="40000" dist="23000" dir="5400000" rotWithShape="0">
-              <a:srgbClr val="000000">
-                <a:alpha val="35000"/>
-              </a:srgbClr>
-            </a:outerShdw>
-          </a:effectLst>
-        </a:effectStyle>
-        <a:effectStyle>
-          <a:effectLst>
-            <a:outerShdw blurRad="40000" dist="23000" dir="5400000" rotWithShape="0">
-              <a:srgbClr val="000000">
-                <a:alpha val="35000"/>
-              </a:srgbClr>
-            </a:outerShdw>
-          </a:effectLst>
-          <a:scene3d>
-            <a:camera prst="orthographicFront">
-              <a:rot lat="0" lon="0" rev="0"/>
-            </a:camera>
-            <a:lightRig rig="threePt" dir="t">
-              <a:rot lat="0" lon="0" rev="1200000"/>
-            </a:lightRig>
-          </a:scene3d>
-          <a:sp3d>
-            <a:bevelT w="63500" h="25400"/>
-          </a:sp3d>
-        </a:effectStyle>
-      </a:effectStyleLst>
-      <a:bgFillStyleLst>
-        <a:solidFill>
-          <a:schemeClr val="phClr"/>
-        </a:solidFill>
-        <a:gradFill rotWithShape="1">
-          <a:gsLst>
-            <a:gs pos="0">
-              <a:schemeClr val="phClr">
-                <a:tint val="40000"/>
-                <a:satMod val="350000"/>
-              </a:schemeClr>
-            </a:gs>
-            <a:gs pos="40000">
-              <a:schemeClr val="phClr">
-                <a:tint val="45000"/>
-                <a:shade val="99000"/>
-                <a:satMod val="350000"/>
-              </a:schemeClr>
-            </a:gs>
-            <a:gs pos="100000">
-              <a:schemeClr val="phClr">
-                <a:shade val="20000"/>
-                <a:satMod val="255000"/>
-              </a:schemeClr>
-            </a:gs>
-          </a:gsLst>
-          <a:path path="circle">
-            <a:fillToRect l="50000" t="-80000" r="50000" b="180000"/>
-          </a:path>
-        </a:gradFill>
-        <a:gradFill rotWithShape="1">
-          <a:gsLst>
-            <a:gs pos="0">
-              <a:schemeClr val="phClr">
-                <a:tint val="80000"/>
-                <a:satMod val="300000"/>
-              </a:schemeClr>
-            </a:gs>
-            <a:gs pos="100000">
-              <a:schemeClr val="phClr">
-                <a:shade val="30000"/>
-                <a:satMod val="200000"/>
-              </a:schemeClr>
-            </a:gs>
-          </a:gsLst>
-          <a:path path="circle">
-            <a:fillToRect l="50000" t="50000" r="50000" b="50000"/>
-          </a:path>
-        </a:gradFill>
-      </a:bgFillStyleLst>
-    </a:fmtScheme>
-  </a:themeElements>
-</a:theme>
 </file>